--- a/8.1_振动状态监测器_中期答辩_技术版.pptx
+++ b/8.1_振动状态监测器_中期答辩_技术版.pptx
@@ -4,24 +4,27 @@
   <p:sldMasterIdLst>
     <p:sldMasterId id="2147483648" r:id="rId1"/>
   </p:sldMasterIdLst>
+  <p:notesMasterIdLst>
+    <p:notesMasterId r:id="rId17"/>
+  </p:notesMasterIdLst>
   <p:sldIdLst>
-    <p:sldId id="256" r:id="rId7"/>
-    <p:sldId id="257" r:id="rId9"/>
-    <p:sldId id="258" r:id="rId10"/>
-    <p:sldId id="259" r:id="rId11"/>
-    <p:sldId id="260" r:id="rId12"/>
-    <p:sldId id="261" r:id="rId13"/>
-    <p:sldId id="262" r:id="rId14"/>
-    <p:sldId id="263" r:id="rId15"/>
-    <p:sldId id="264" r:id="rId16"/>
-    <p:sldId id="265" r:id="rId17"/>
-    <p:sldId id="266" r:id="rId18"/>
-    <p:sldId id="267" r:id="rId19"/>
-    <p:sldId id="268" r:id="rId20"/>
-    <p:sldId id="269" r:id="rId21"/>
-    <p:sldId id="270" r:id="rId22"/>
+    <p:sldId id="256" r:id="rId2"/>
+    <p:sldId id="257" r:id="rId3"/>
+    <p:sldId id="258" r:id="rId4"/>
+    <p:sldId id="259" r:id="rId5"/>
+    <p:sldId id="260" r:id="rId6"/>
+    <p:sldId id="261" r:id="rId7"/>
+    <p:sldId id="262" r:id="rId8"/>
+    <p:sldId id="263" r:id="rId9"/>
+    <p:sldId id="264" r:id="rId10"/>
+    <p:sldId id="265" r:id="rId11"/>
+    <p:sldId id="266" r:id="rId12"/>
+    <p:sldId id="267" r:id="rId13"/>
+    <p:sldId id="268" r:id="rId14"/>
+    <p:sldId id="269" r:id="rId15"/>
+    <p:sldId id="270" r:id="rId16"/>
   </p:sldIdLst>
-  <p:sldSz cx="12191695" cy="6858000" type="screen4x3"/>
+  <p:sldSz cx="12192000" cy="6858000"/>
   <p:notesSz cx="6858000" cy="9144000"/>
   <p:defaultTextStyle>
     <a:defPPr>
@@ -118,11 +121,27 @@
       </a:defRPr>
     </a:lvl9pPr>
   </p:defaultTextStyle>
+  <p:extLst>
+    <p:ext uri="{EFAFB233-063F-42B5-8137-9DF3F51BA10A}">
+      <p15:sldGuideLst xmlns:p15="http://schemas.microsoft.com/office/powerpoint/2012/main">
+        <p15:guide id="1" orient="horz" pos="2160">
+          <p15:clr>
+            <a:srgbClr val="A4A3A4"/>
+          </p15:clr>
+        </p15:guide>
+        <p15:guide id="2" pos="2880">
+          <p15:clr>
+            <a:srgbClr val="A4A3A4"/>
+          </p15:clr>
+        </p15:guide>
+      </p15:sldGuideLst>
+    </p:ext>
+  </p:extLst>
 </p:presentation>
 </file>
 
 <file path=ppt/notesMasters/notesMaster1.xml><?xml version="1.0" encoding="utf-8"?>
-<p:notesMaster xmlns:a="http://schemas.openxmlformats.org/drawingml/2006/main" xmlns:p="http://schemas.openxmlformats.org/presentationml/2006/main" xmlns:r="http://schemas.openxmlformats.org/officeDocument/2006/relationships">
+<p:notesMaster xmlns:a="http://schemas.openxmlformats.org/drawingml/2006/main" xmlns:r="http://schemas.openxmlformats.org/officeDocument/2006/relationships" xmlns:p="http://schemas.openxmlformats.org/presentationml/2006/main">
   <p:cSld>
     <p:bg>
       <p:bgRef idx="1001">
@@ -143,241 +162,16 @@
           <a:chExt cx="0" cy="0"/>
         </a:xfrm>
       </p:grpSpPr>
-      <p:sp>
-        <p:nvSpPr>
-          <p:cNvPr id="2" name="Header Placeholder 1"/>
-          <p:cNvSpPr>
-            <a:spLocks noGrp="1"/>
-          </p:cNvSpPr>
-          <p:nvPr>
-            <p:ph type="hdr" sz="quarter"/>
-          </p:nvPr>
-        </p:nvSpPr>
-        <p:spPr>
-          <a:xfrm>
-            <a:off x="0" y="0"/>
-            <a:ext cx="2971800" cy="457200"/>
-          </a:xfrm>
-          <a:prstGeom prst="rect">
-            <a:avLst/>
-          </a:prstGeom>
-        </p:spPr>
-        <p:txBody>
-          <a:bodyPr vert="horz" lIns="91440" tIns="45720" rIns="91440" bIns="45720" rtlCol="0"/>
-          <a:lstStyle>
-            <a:lvl1pPr algn="l">
-              <a:defRPr sz="1200"/>
-            </a:lvl1pPr>
-          </a:lstStyle>
-          <a:p>
-            <a:endParaRPr lang="en-US"/>
-          </a:p>
-        </p:txBody>
-      </p:sp>
-      <p:sp>
-        <p:nvSpPr>
-          <p:cNvPr id="3" name="Date Placeholder 2"/>
-          <p:cNvSpPr>
-            <a:spLocks noGrp="1"/>
-          </p:cNvSpPr>
-          <p:nvPr>
-            <p:ph type="dt" idx="1"/>
-          </p:nvPr>
-        </p:nvSpPr>
-        <p:spPr>
-          <a:xfrm>
-            <a:off x="3884613" y="0"/>
-            <a:ext cx="2971800" cy="457200"/>
-          </a:xfrm>
-          <a:prstGeom prst="rect">
-            <a:avLst/>
-          </a:prstGeom>
-        </p:spPr>
-        <p:txBody>
-          <a:bodyPr vert="horz" lIns="91440" tIns="45720" rIns="91440" bIns="45720" rtlCol="0"/>
-          <a:lstStyle>
-            <a:lvl1pPr algn="r">
-              <a:defRPr sz="1200"/>
-            </a:lvl1pPr>
-          </a:lstStyle>
-          <a:p>
-            <a:fld id="{0F89C1C7-3DCD-1040-A9CF-14679D8B5DDD}" type="datetimeFigureOut">
-              <a:rPr lang="en-US" smtClean="0"/>
-              <a:t>10/17/16</a:t>
-            </a:fld>
-            <a:endParaRPr lang="en-US"/>
-          </a:p>
-        </p:txBody>
-      </p:sp>
-      <p:sp>
-        <p:nvSpPr>
-          <p:cNvPr id="4" name="Slide Image Placeholder 3"/>
-          <p:cNvSpPr>
-            <a:spLocks noGrp="1" noRot="1" noChangeAspect="1"/>
-          </p:cNvSpPr>
-          <p:nvPr>
-            <p:ph type="sldImg" idx="2"/>
-          </p:nvPr>
-        </p:nvSpPr>
-        <p:spPr>
-          <a:xfrm>
-            <a:off x="1143000" y="685800"/>
-            <a:ext cx="4572000" cy="3429000"/>
-          </a:xfrm>
-          <a:prstGeom prst="rect">
-            <a:avLst/>
-          </a:prstGeom>
-          <a:noFill/>
-          <a:ln w="12700">
-            <a:solidFill>
-              <a:prstClr val="black"/>
-            </a:solidFill>
-          </a:ln>
-        </p:spPr>
-        <p:txBody>
-          <a:bodyPr vert="horz" lIns="91440" tIns="45720" rIns="91440" bIns="45720" rtlCol="0" anchor="ctr"/>
-          <a:lstStyle/>
-          <a:p>
-            <a:endParaRPr lang="en-US"/>
-          </a:p>
-        </p:txBody>
-      </p:sp>
-      <p:sp>
-        <p:nvSpPr>
-          <p:cNvPr id="5" name="Notes Placeholder 4"/>
-          <p:cNvSpPr>
-            <a:spLocks noGrp="1"/>
-          </p:cNvSpPr>
-          <p:nvPr>
-            <p:ph type="body" sz="quarter" idx="3"/>
-          </p:nvPr>
-        </p:nvSpPr>
-        <p:spPr>
-          <a:xfrm>
-            <a:off x="685800" y="4343400"/>
-            <a:ext cx="5486400" cy="4114800"/>
-          </a:xfrm>
-          <a:prstGeom prst="rect">
-            <a:avLst/>
-          </a:prstGeom>
-        </p:spPr>
-        <p:txBody>
-          <a:bodyPr vert="horz" lIns="91440" tIns="45720" rIns="91440" bIns="45720" rtlCol="0"/>
-          <a:lstStyle/>
-          <a:p>
-            <a:pPr lvl="0"/>
-            <a:r>
-              <a:rPr lang="en-US" smtClean="0"/>
-              <a:t>Click to edit Master text styles</a:t>
-            </a:r>
-          </a:p>
-          <a:p>
-            <a:pPr lvl="1"/>
-            <a:r>
-              <a:rPr lang="en-US" smtClean="0"/>
-              <a:t>Second level</a:t>
-            </a:r>
-          </a:p>
-          <a:p>
-            <a:pPr lvl="2"/>
-            <a:r>
-              <a:rPr lang="en-US" smtClean="0"/>
-              <a:t>Third level</a:t>
-            </a:r>
-          </a:p>
-          <a:p>
-            <a:pPr lvl="3"/>
-            <a:r>
-              <a:rPr lang="en-US" smtClean="0"/>
-              <a:t>Fourth level</a:t>
-            </a:r>
-          </a:p>
-          <a:p>
-            <a:pPr lvl="4"/>
-            <a:r>
-              <a:rPr lang="en-US" smtClean="0"/>
-              <a:t>Fifth level</a:t>
-            </a:r>
-            <a:endParaRPr lang="en-US"/>
-          </a:p>
-        </p:txBody>
-      </p:sp>
-      <p:sp>
-        <p:nvSpPr>
-          <p:cNvPr id="6" name="Footer Placeholder 5"/>
-          <p:cNvSpPr>
-            <a:spLocks noGrp="1"/>
-          </p:cNvSpPr>
-          <p:nvPr>
-            <p:ph type="ftr" sz="quarter" idx="4"/>
-          </p:nvPr>
-        </p:nvSpPr>
-        <p:spPr>
-          <a:xfrm>
-            <a:off x="0" y="8685213"/>
-            <a:ext cx="2971800" cy="457200"/>
-          </a:xfrm>
-          <a:prstGeom prst="rect">
-            <a:avLst/>
-          </a:prstGeom>
-        </p:spPr>
-        <p:txBody>
-          <a:bodyPr vert="horz" lIns="91440" tIns="45720" rIns="91440" bIns="45720" rtlCol="0" anchor="b"/>
-          <a:lstStyle>
-            <a:lvl1pPr algn="l">
-              <a:defRPr sz="1200"/>
-            </a:lvl1pPr>
-          </a:lstStyle>
-          <a:p>
-            <a:endParaRPr lang="en-US"/>
-          </a:p>
-        </p:txBody>
-      </p:sp>
-      <p:sp>
-        <p:nvSpPr>
-          <p:cNvPr id="7" name="Slide Number Placeholder 6"/>
-          <p:cNvSpPr>
-            <a:spLocks noGrp="1"/>
-          </p:cNvSpPr>
-          <p:nvPr>
-            <p:ph type="sldNum" sz="quarter" idx="5"/>
-          </p:nvPr>
-        </p:nvSpPr>
-        <p:spPr>
-          <a:xfrm>
-            <a:off x="3884613" y="8685213"/>
-            <a:ext cx="2971800" cy="457200"/>
-          </a:xfrm>
-          <a:prstGeom prst="rect">
-            <a:avLst/>
-          </a:prstGeom>
-        </p:spPr>
-        <p:txBody>
-          <a:bodyPr vert="horz" lIns="91440" tIns="45720" rIns="91440" bIns="45720" rtlCol="0" anchor="b"/>
-          <a:lstStyle>
-            <a:lvl1pPr algn="r">
-              <a:defRPr sz="1200"/>
-            </a:lvl1pPr>
-          </a:lstStyle>
-          <a:p>
-            <a:fld id="{BB5E49A5-4136-284D-997B-48E1D791AD67}" type="slidenum">
-              <a:rPr lang="en-US" smtClean="0"/>
-              <a:t>‹#›</a:t>
-            </a:fld>
-            <a:endParaRPr lang="en-US"/>
-          </a:p>
-        </p:txBody>
-      </p:sp>
     </p:spTree>
     <p:extLst>
       <p:ext uri="{BB962C8B-B14F-4D97-AF65-F5344CB8AC3E}">
-        <p14:creationId xmlns:p14="http://schemas.microsoft.com/office/powerpoint/2010/main" val="2623252185"/>
+        <p14:creationId xmlns:p14="http://schemas.microsoft.com/office/powerpoint/2010/main" val="3410376024"/>
       </p:ext>
     </p:extLst>
   </p:cSld>
   <p:clrMap bg1="lt1" tx1="dk1" bg2="lt2" tx2="dk2" accent1="accent1" accent2="accent2" accent3="accent3" accent4="accent4" accent5="accent5" accent6="accent6" hlink="hlink" folHlink="folHlink"/>
   <p:notesStyle>
-    <a:lvl1pPr marL="0" algn="l" defTabSz="457200" rtl="0" eaLnBrk="1" latinLnBrk="0" hangingPunct="1">
+    <a:lvl1pPr marL="0" algn="l" defTabSz="914400" rtl="0" eaLnBrk="1" latinLnBrk="0" hangingPunct="1">
       <a:defRPr sz="1200" kern="1200">
         <a:solidFill>
           <a:schemeClr val="tx1"/>
@@ -387,7 +181,7 @@
         <a:cs typeface="+mn-cs"/>
       </a:defRPr>
     </a:lvl1pPr>
-    <a:lvl2pPr marL="457200" algn="l" defTabSz="457200" rtl="0" eaLnBrk="1" latinLnBrk="0" hangingPunct="1">
+    <a:lvl2pPr marL="457200" algn="l" defTabSz="914400" rtl="0" eaLnBrk="1" latinLnBrk="0" hangingPunct="1">
       <a:defRPr sz="1200" kern="1200">
         <a:solidFill>
           <a:schemeClr val="tx1"/>
@@ -397,7 +191,7 @@
         <a:cs typeface="+mn-cs"/>
       </a:defRPr>
     </a:lvl2pPr>
-    <a:lvl3pPr marL="914400" algn="l" defTabSz="457200" rtl="0" eaLnBrk="1" latinLnBrk="0" hangingPunct="1">
+    <a:lvl3pPr marL="914400" algn="l" defTabSz="914400" rtl="0" eaLnBrk="1" latinLnBrk="0" hangingPunct="1">
       <a:defRPr sz="1200" kern="1200">
         <a:solidFill>
           <a:schemeClr val="tx1"/>
@@ -407,7 +201,7 @@
         <a:cs typeface="+mn-cs"/>
       </a:defRPr>
     </a:lvl3pPr>
-    <a:lvl4pPr marL="1371600" algn="l" defTabSz="457200" rtl="0" eaLnBrk="1" latinLnBrk="0" hangingPunct="1">
+    <a:lvl4pPr marL="1371600" algn="l" defTabSz="914400" rtl="0" eaLnBrk="1" latinLnBrk="0" hangingPunct="1">
       <a:defRPr sz="1200" kern="1200">
         <a:solidFill>
           <a:schemeClr val="tx1"/>
@@ -417,7 +211,7 @@
         <a:cs typeface="+mn-cs"/>
       </a:defRPr>
     </a:lvl4pPr>
-    <a:lvl5pPr marL="1828800" algn="l" defTabSz="457200" rtl="0" eaLnBrk="1" latinLnBrk="0" hangingPunct="1">
+    <a:lvl5pPr marL="1828800" algn="l" defTabSz="914400" rtl="0" eaLnBrk="1" latinLnBrk="0" hangingPunct="1">
       <a:defRPr sz="1200" kern="1200">
         <a:solidFill>
           <a:schemeClr val="tx1"/>
@@ -427,7 +221,7 @@
         <a:cs typeface="+mn-cs"/>
       </a:defRPr>
     </a:lvl5pPr>
-    <a:lvl6pPr marL="2286000" algn="l" defTabSz="457200" rtl="0" eaLnBrk="1" latinLnBrk="0" hangingPunct="1">
+    <a:lvl6pPr marL="2286000" algn="l" defTabSz="914400" rtl="0" eaLnBrk="1" latinLnBrk="0" hangingPunct="1">
       <a:defRPr sz="1200" kern="1200">
         <a:solidFill>
           <a:schemeClr val="tx1"/>
@@ -437,7 +231,7 @@
         <a:cs typeface="+mn-cs"/>
       </a:defRPr>
     </a:lvl6pPr>
-    <a:lvl7pPr marL="2743200" algn="l" defTabSz="457200" rtl="0" eaLnBrk="1" latinLnBrk="0" hangingPunct="1">
+    <a:lvl7pPr marL="2743200" algn="l" defTabSz="914400" rtl="0" eaLnBrk="1" latinLnBrk="0" hangingPunct="1">
       <a:defRPr sz="1200" kern="1200">
         <a:solidFill>
           <a:schemeClr val="tx1"/>
@@ -447,7 +241,7 @@
         <a:cs typeface="+mn-cs"/>
       </a:defRPr>
     </a:lvl7pPr>
-    <a:lvl8pPr marL="3200400" algn="l" defTabSz="457200" rtl="0" eaLnBrk="1" latinLnBrk="0" hangingPunct="1">
+    <a:lvl8pPr marL="3200400" algn="l" defTabSz="914400" rtl="0" eaLnBrk="1" latinLnBrk="0" hangingPunct="1">
       <a:defRPr sz="1200" kern="1200">
         <a:solidFill>
           <a:schemeClr val="tx1"/>
@@ -457,7 +251,7 @@
         <a:cs typeface="+mn-cs"/>
       </a:defRPr>
     </a:lvl8pPr>
-    <a:lvl9pPr marL="3657600" algn="l" defTabSz="457200" rtl="0" eaLnBrk="1" latinLnBrk="0" hangingPunct="1">
+    <a:lvl9pPr marL="3657600" algn="l" defTabSz="914400" rtl="0" eaLnBrk="1" latinLnBrk="0" hangingPunct="1">
       <a:defRPr sz="1200" kern="1200">
         <a:solidFill>
           <a:schemeClr val="tx1"/>
@@ -472,7 +266,7 @@
 </file>
 
 <file path=ppt/notesSlides/notesSlide1.xml><?xml version="1.0" encoding="utf-8"?>
-<p:notes xmlns:a="http://schemas.openxmlformats.org/drawingml/2006/main" xmlns:p="http://schemas.openxmlformats.org/presentationml/2006/main" xmlns:r="http://schemas.openxmlformats.org/officeDocument/2006/relationships">
+<p:notes xmlns:a="http://schemas.openxmlformats.org/drawingml/2006/main" xmlns:r="http://schemas.openxmlformats.org/officeDocument/2006/relationships" xmlns:p="http://schemas.openxmlformats.org/presentationml/2006/main">
   <p:cSld>
     <p:spTree>
       <p:nvGrpSpPr>
@@ -492,7 +286,7 @@
         <p:nvSpPr>
           <p:cNvPr id="2" name="Slide Image Placeholder 1"/>
           <p:cNvSpPr>
-            <a:spLocks noGrp="1"/>
+            <a:spLocks noGrp="1" noRot="1" noChangeAspect="1"/>
           </p:cNvSpPr>
           <p:nvPr>
             <p:ph type="sldImg" idx="2"/>
@@ -507,7 +301,7 @@
             <a:spLocks noGrp="1"/>
           </p:cNvSpPr>
           <p:nvPr>
-            <p:ph type="body" idx="3" sz="quarter"/>
+            <p:ph type="body" sz="quarter" idx="3"/>
           </p:nvPr>
         </p:nvSpPr>
         <p:spPr/>
@@ -528,7 +322,7 @@
             <a:spLocks noGrp="1"/>
           </p:cNvSpPr>
           <p:nvPr>
-            <p:ph type="sldNum" idx="5" sz="quarter"/>
+            <p:ph type="sldNum" sz="quarter" idx="5"/>
           </p:nvPr>
         </p:nvSpPr>
         <p:spPr/>
@@ -542,7 +336,7 @@
 </file>
 
 <file path=ppt/notesSlides/notesSlide10.xml><?xml version="1.0" encoding="utf-8"?>
-<p:notes xmlns:a="http://schemas.openxmlformats.org/drawingml/2006/main" xmlns:p="http://schemas.openxmlformats.org/presentationml/2006/main" xmlns:r="http://schemas.openxmlformats.org/officeDocument/2006/relationships">
+<p:notes xmlns:a="http://schemas.openxmlformats.org/drawingml/2006/main" xmlns:r="http://schemas.openxmlformats.org/officeDocument/2006/relationships" xmlns:p="http://schemas.openxmlformats.org/presentationml/2006/main">
   <p:cSld>
     <p:spTree>
       <p:nvGrpSpPr>
@@ -562,7 +356,7 @@
         <p:nvSpPr>
           <p:cNvPr id="2" name="Slide Image Placeholder 1"/>
           <p:cNvSpPr>
-            <a:spLocks noGrp="1"/>
+            <a:spLocks noGrp="1" noRot="1" noChangeAspect="1"/>
           </p:cNvSpPr>
           <p:nvPr>
             <p:ph type="sldImg" idx="2"/>
@@ -577,7 +371,7 @@
             <a:spLocks noGrp="1"/>
           </p:cNvSpPr>
           <p:nvPr>
-            <p:ph type="body" idx="3" sz="quarter"/>
+            <p:ph type="body" sz="quarter" idx="3"/>
           </p:nvPr>
         </p:nvSpPr>
         <p:spPr/>
@@ -598,7 +392,7 @@
             <a:spLocks noGrp="1"/>
           </p:cNvSpPr>
           <p:nvPr>
-            <p:ph type="sldNum" idx="5" sz="quarter"/>
+            <p:ph type="sldNum" sz="quarter" idx="5"/>
           </p:nvPr>
         </p:nvSpPr>
         <p:spPr/>
@@ -612,7 +406,7 @@
 </file>
 
 <file path=ppt/notesSlides/notesSlide11.xml><?xml version="1.0" encoding="utf-8"?>
-<p:notes xmlns:a="http://schemas.openxmlformats.org/drawingml/2006/main" xmlns:p="http://schemas.openxmlformats.org/presentationml/2006/main" xmlns:r="http://schemas.openxmlformats.org/officeDocument/2006/relationships">
+<p:notes xmlns:a="http://schemas.openxmlformats.org/drawingml/2006/main" xmlns:r="http://schemas.openxmlformats.org/officeDocument/2006/relationships" xmlns:p="http://schemas.openxmlformats.org/presentationml/2006/main">
   <p:cSld>
     <p:spTree>
       <p:nvGrpSpPr>
@@ -632,7 +426,7 @@
         <p:nvSpPr>
           <p:cNvPr id="2" name="Slide Image Placeholder 1"/>
           <p:cNvSpPr>
-            <a:spLocks noGrp="1"/>
+            <a:spLocks noGrp="1" noRot="1" noChangeAspect="1"/>
           </p:cNvSpPr>
           <p:nvPr>
             <p:ph type="sldImg" idx="2"/>
@@ -647,7 +441,7 @@
             <a:spLocks noGrp="1"/>
           </p:cNvSpPr>
           <p:nvPr>
-            <p:ph type="body" idx="3" sz="quarter"/>
+            <p:ph type="body" sz="quarter" idx="3"/>
           </p:nvPr>
         </p:nvSpPr>
         <p:spPr/>
@@ -668,7 +462,7 @@
             <a:spLocks noGrp="1"/>
           </p:cNvSpPr>
           <p:nvPr>
-            <p:ph type="sldNum" idx="5" sz="quarter"/>
+            <p:ph type="sldNum" sz="quarter" idx="5"/>
           </p:nvPr>
         </p:nvSpPr>
         <p:spPr/>
@@ -682,7 +476,7 @@
 </file>
 
 <file path=ppt/notesSlides/notesSlide12.xml><?xml version="1.0" encoding="utf-8"?>
-<p:notes xmlns:a="http://schemas.openxmlformats.org/drawingml/2006/main" xmlns:p="http://schemas.openxmlformats.org/presentationml/2006/main" xmlns:r="http://schemas.openxmlformats.org/officeDocument/2006/relationships">
+<p:notes xmlns:a="http://schemas.openxmlformats.org/drawingml/2006/main" xmlns:r="http://schemas.openxmlformats.org/officeDocument/2006/relationships" xmlns:p="http://schemas.openxmlformats.org/presentationml/2006/main">
   <p:cSld>
     <p:spTree>
       <p:nvGrpSpPr>
@@ -702,7 +496,7 @@
         <p:nvSpPr>
           <p:cNvPr id="2" name="Slide Image Placeholder 1"/>
           <p:cNvSpPr>
-            <a:spLocks noGrp="1"/>
+            <a:spLocks noGrp="1" noRot="1" noChangeAspect="1"/>
           </p:cNvSpPr>
           <p:nvPr>
             <p:ph type="sldImg" idx="2"/>
@@ -717,7 +511,7 @@
             <a:spLocks noGrp="1"/>
           </p:cNvSpPr>
           <p:nvPr>
-            <p:ph type="body" idx="3" sz="quarter"/>
+            <p:ph type="body" sz="quarter" idx="3"/>
           </p:nvPr>
         </p:nvSpPr>
         <p:spPr/>
@@ -738,7 +532,7 @@
             <a:spLocks noGrp="1"/>
           </p:cNvSpPr>
           <p:nvPr>
-            <p:ph type="sldNum" idx="5" sz="quarter"/>
+            <p:ph type="sldNum" sz="quarter" idx="5"/>
           </p:nvPr>
         </p:nvSpPr>
         <p:spPr/>
@@ -752,7 +546,7 @@
 </file>
 
 <file path=ppt/notesSlides/notesSlide13.xml><?xml version="1.0" encoding="utf-8"?>
-<p:notes xmlns:a="http://schemas.openxmlformats.org/drawingml/2006/main" xmlns:p="http://schemas.openxmlformats.org/presentationml/2006/main" xmlns:r="http://schemas.openxmlformats.org/officeDocument/2006/relationships">
+<p:notes xmlns:a="http://schemas.openxmlformats.org/drawingml/2006/main" xmlns:r="http://schemas.openxmlformats.org/officeDocument/2006/relationships" xmlns:p="http://schemas.openxmlformats.org/presentationml/2006/main">
   <p:cSld>
     <p:spTree>
       <p:nvGrpSpPr>
@@ -772,7 +566,7 @@
         <p:nvSpPr>
           <p:cNvPr id="2" name="Slide Image Placeholder 1"/>
           <p:cNvSpPr>
-            <a:spLocks noGrp="1"/>
+            <a:spLocks noGrp="1" noRot="1" noChangeAspect="1"/>
           </p:cNvSpPr>
           <p:nvPr>
             <p:ph type="sldImg" idx="2"/>
@@ -787,7 +581,7 @@
             <a:spLocks noGrp="1"/>
           </p:cNvSpPr>
           <p:nvPr>
-            <p:ph type="body" idx="3" sz="quarter"/>
+            <p:ph type="body" sz="quarter" idx="3"/>
           </p:nvPr>
         </p:nvSpPr>
         <p:spPr/>
@@ -808,7 +602,7 @@
             <a:spLocks noGrp="1"/>
           </p:cNvSpPr>
           <p:nvPr>
-            <p:ph type="sldNum" idx="5" sz="quarter"/>
+            <p:ph type="sldNum" sz="quarter" idx="5"/>
           </p:nvPr>
         </p:nvSpPr>
         <p:spPr/>
@@ -822,7 +616,7 @@
 </file>
 
 <file path=ppt/notesSlides/notesSlide14.xml><?xml version="1.0" encoding="utf-8"?>
-<p:notes xmlns:a="http://schemas.openxmlformats.org/drawingml/2006/main" xmlns:p="http://schemas.openxmlformats.org/presentationml/2006/main" xmlns:r="http://schemas.openxmlformats.org/officeDocument/2006/relationships">
+<p:notes xmlns:a="http://schemas.openxmlformats.org/drawingml/2006/main" xmlns:r="http://schemas.openxmlformats.org/officeDocument/2006/relationships" xmlns:p="http://schemas.openxmlformats.org/presentationml/2006/main">
   <p:cSld>
     <p:spTree>
       <p:nvGrpSpPr>
@@ -842,7 +636,7 @@
         <p:nvSpPr>
           <p:cNvPr id="2" name="Slide Image Placeholder 1"/>
           <p:cNvSpPr>
-            <a:spLocks noGrp="1"/>
+            <a:spLocks noGrp="1" noRot="1" noChangeAspect="1"/>
           </p:cNvSpPr>
           <p:nvPr>
             <p:ph type="sldImg" idx="2"/>
@@ -857,7 +651,7 @@
             <a:spLocks noGrp="1"/>
           </p:cNvSpPr>
           <p:nvPr>
-            <p:ph type="body" idx="3" sz="quarter"/>
+            <p:ph type="body" sz="quarter" idx="3"/>
           </p:nvPr>
         </p:nvSpPr>
         <p:spPr/>
@@ -878,7 +672,7 @@
             <a:spLocks noGrp="1"/>
           </p:cNvSpPr>
           <p:nvPr>
-            <p:ph type="sldNum" idx="5" sz="quarter"/>
+            <p:ph type="sldNum" sz="quarter" idx="5"/>
           </p:nvPr>
         </p:nvSpPr>
         <p:spPr/>
@@ -892,7 +686,7 @@
 </file>
 
 <file path=ppt/notesSlides/notesSlide15.xml><?xml version="1.0" encoding="utf-8"?>
-<p:notes xmlns:a="http://schemas.openxmlformats.org/drawingml/2006/main" xmlns:p="http://schemas.openxmlformats.org/presentationml/2006/main" xmlns:r="http://schemas.openxmlformats.org/officeDocument/2006/relationships">
+<p:notes xmlns:a="http://schemas.openxmlformats.org/drawingml/2006/main" xmlns:r="http://schemas.openxmlformats.org/officeDocument/2006/relationships" xmlns:p="http://schemas.openxmlformats.org/presentationml/2006/main">
   <p:cSld>
     <p:spTree>
       <p:nvGrpSpPr>
@@ -912,7 +706,7 @@
         <p:nvSpPr>
           <p:cNvPr id="2" name="Slide Image Placeholder 1"/>
           <p:cNvSpPr>
-            <a:spLocks noGrp="1"/>
+            <a:spLocks noGrp="1" noRot="1" noChangeAspect="1"/>
           </p:cNvSpPr>
           <p:nvPr>
             <p:ph type="sldImg" idx="2"/>
@@ -927,7 +721,7 @@
             <a:spLocks noGrp="1"/>
           </p:cNvSpPr>
           <p:nvPr>
-            <p:ph type="body" idx="3" sz="quarter"/>
+            <p:ph type="body" sz="quarter" idx="3"/>
           </p:nvPr>
         </p:nvSpPr>
         <p:spPr/>
@@ -948,7 +742,7 @@
             <a:spLocks noGrp="1"/>
           </p:cNvSpPr>
           <p:nvPr>
-            <p:ph type="sldNum" idx="5" sz="quarter"/>
+            <p:ph type="sldNum" sz="quarter" idx="5"/>
           </p:nvPr>
         </p:nvSpPr>
         <p:spPr/>
@@ -962,7 +756,7 @@
 </file>
 
 <file path=ppt/notesSlides/notesSlide2.xml><?xml version="1.0" encoding="utf-8"?>
-<p:notes xmlns:a="http://schemas.openxmlformats.org/drawingml/2006/main" xmlns:p="http://schemas.openxmlformats.org/presentationml/2006/main" xmlns:r="http://schemas.openxmlformats.org/officeDocument/2006/relationships">
+<p:notes xmlns:a="http://schemas.openxmlformats.org/drawingml/2006/main" xmlns:r="http://schemas.openxmlformats.org/officeDocument/2006/relationships" xmlns:p="http://schemas.openxmlformats.org/presentationml/2006/main">
   <p:cSld>
     <p:spTree>
       <p:nvGrpSpPr>
@@ -982,7 +776,7 @@
         <p:nvSpPr>
           <p:cNvPr id="2" name="Slide Image Placeholder 1"/>
           <p:cNvSpPr>
-            <a:spLocks noGrp="1"/>
+            <a:spLocks noGrp="1" noRot="1" noChangeAspect="1"/>
           </p:cNvSpPr>
           <p:nvPr>
             <p:ph type="sldImg" idx="2"/>
@@ -997,7 +791,7 @@
             <a:spLocks noGrp="1"/>
           </p:cNvSpPr>
           <p:nvPr>
-            <p:ph type="body" idx="3" sz="quarter"/>
+            <p:ph type="body" sz="quarter" idx="3"/>
           </p:nvPr>
         </p:nvSpPr>
         <p:spPr/>
@@ -1018,7 +812,7 @@
             <a:spLocks noGrp="1"/>
           </p:cNvSpPr>
           <p:nvPr>
-            <p:ph type="sldNum" idx="5" sz="quarter"/>
+            <p:ph type="sldNum" sz="quarter" idx="5"/>
           </p:nvPr>
         </p:nvSpPr>
         <p:spPr/>
@@ -1032,7 +826,7 @@
 </file>
 
 <file path=ppt/notesSlides/notesSlide3.xml><?xml version="1.0" encoding="utf-8"?>
-<p:notes xmlns:a="http://schemas.openxmlformats.org/drawingml/2006/main" xmlns:p="http://schemas.openxmlformats.org/presentationml/2006/main" xmlns:r="http://schemas.openxmlformats.org/officeDocument/2006/relationships">
+<p:notes xmlns:a="http://schemas.openxmlformats.org/drawingml/2006/main" xmlns:r="http://schemas.openxmlformats.org/officeDocument/2006/relationships" xmlns:p="http://schemas.openxmlformats.org/presentationml/2006/main">
   <p:cSld>
     <p:spTree>
       <p:nvGrpSpPr>
@@ -1052,7 +846,7 @@
         <p:nvSpPr>
           <p:cNvPr id="2" name="Slide Image Placeholder 1"/>
           <p:cNvSpPr>
-            <a:spLocks noGrp="1"/>
+            <a:spLocks noGrp="1" noRot="1" noChangeAspect="1"/>
           </p:cNvSpPr>
           <p:nvPr>
             <p:ph type="sldImg" idx="2"/>
@@ -1067,7 +861,7 @@
             <a:spLocks noGrp="1"/>
           </p:cNvSpPr>
           <p:nvPr>
-            <p:ph type="body" idx="3" sz="quarter"/>
+            <p:ph type="body" sz="quarter" idx="3"/>
           </p:nvPr>
         </p:nvSpPr>
         <p:spPr/>
@@ -1088,7 +882,7 @@
             <a:spLocks noGrp="1"/>
           </p:cNvSpPr>
           <p:nvPr>
-            <p:ph type="sldNum" idx="5" sz="quarter"/>
+            <p:ph type="sldNum" sz="quarter" idx="5"/>
           </p:nvPr>
         </p:nvSpPr>
         <p:spPr/>
@@ -1102,7 +896,7 @@
 </file>
 
 <file path=ppt/notesSlides/notesSlide4.xml><?xml version="1.0" encoding="utf-8"?>
-<p:notes xmlns:a="http://schemas.openxmlformats.org/drawingml/2006/main" xmlns:p="http://schemas.openxmlformats.org/presentationml/2006/main" xmlns:r="http://schemas.openxmlformats.org/officeDocument/2006/relationships">
+<p:notes xmlns:a="http://schemas.openxmlformats.org/drawingml/2006/main" xmlns:r="http://schemas.openxmlformats.org/officeDocument/2006/relationships" xmlns:p="http://schemas.openxmlformats.org/presentationml/2006/main">
   <p:cSld>
     <p:spTree>
       <p:nvGrpSpPr>
@@ -1122,7 +916,7 @@
         <p:nvSpPr>
           <p:cNvPr id="2" name="Slide Image Placeholder 1"/>
           <p:cNvSpPr>
-            <a:spLocks noGrp="1"/>
+            <a:spLocks noGrp="1" noRot="1" noChangeAspect="1"/>
           </p:cNvSpPr>
           <p:nvPr>
             <p:ph type="sldImg" idx="2"/>
@@ -1137,7 +931,7 @@
             <a:spLocks noGrp="1"/>
           </p:cNvSpPr>
           <p:nvPr>
-            <p:ph type="body" idx="3" sz="quarter"/>
+            <p:ph type="body" sz="quarter" idx="3"/>
           </p:nvPr>
         </p:nvSpPr>
         <p:spPr/>
@@ -1158,7 +952,7 @@
             <a:spLocks noGrp="1"/>
           </p:cNvSpPr>
           <p:nvPr>
-            <p:ph type="sldNum" idx="5" sz="quarter"/>
+            <p:ph type="sldNum" sz="quarter" idx="5"/>
           </p:nvPr>
         </p:nvSpPr>
         <p:spPr/>
@@ -1172,7 +966,7 @@
 </file>
 
 <file path=ppt/notesSlides/notesSlide5.xml><?xml version="1.0" encoding="utf-8"?>
-<p:notes xmlns:a="http://schemas.openxmlformats.org/drawingml/2006/main" xmlns:p="http://schemas.openxmlformats.org/presentationml/2006/main" xmlns:r="http://schemas.openxmlformats.org/officeDocument/2006/relationships">
+<p:notes xmlns:a="http://schemas.openxmlformats.org/drawingml/2006/main" xmlns:r="http://schemas.openxmlformats.org/officeDocument/2006/relationships" xmlns:p="http://schemas.openxmlformats.org/presentationml/2006/main">
   <p:cSld>
     <p:spTree>
       <p:nvGrpSpPr>
@@ -1192,7 +986,7 @@
         <p:nvSpPr>
           <p:cNvPr id="2" name="Slide Image Placeholder 1"/>
           <p:cNvSpPr>
-            <a:spLocks noGrp="1"/>
+            <a:spLocks noGrp="1" noRot="1" noChangeAspect="1"/>
           </p:cNvSpPr>
           <p:nvPr>
             <p:ph type="sldImg" idx="2"/>
@@ -1207,7 +1001,7 @@
             <a:spLocks noGrp="1"/>
           </p:cNvSpPr>
           <p:nvPr>
-            <p:ph type="body" idx="3" sz="quarter"/>
+            <p:ph type="body" sz="quarter" idx="3"/>
           </p:nvPr>
         </p:nvSpPr>
         <p:spPr/>
@@ -1228,7 +1022,7 @@
             <a:spLocks noGrp="1"/>
           </p:cNvSpPr>
           <p:nvPr>
-            <p:ph type="sldNum" idx="5" sz="quarter"/>
+            <p:ph type="sldNum" sz="quarter" idx="5"/>
           </p:nvPr>
         </p:nvSpPr>
         <p:spPr/>
@@ -1242,7 +1036,7 @@
 </file>
 
 <file path=ppt/notesSlides/notesSlide6.xml><?xml version="1.0" encoding="utf-8"?>
-<p:notes xmlns:a="http://schemas.openxmlformats.org/drawingml/2006/main" xmlns:p="http://schemas.openxmlformats.org/presentationml/2006/main" xmlns:r="http://schemas.openxmlformats.org/officeDocument/2006/relationships">
+<p:notes xmlns:a="http://schemas.openxmlformats.org/drawingml/2006/main" xmlns:r="http://schemas.openxmlformats.org/officeDocument/2006/relationships" xmlns:p="http://schemas.openxmlformats.org/presentationml/2006/main">
   <p:cSld>
     <p:spTree>
       <p:nvGrpSpPr>
@@ -1262,7 +1056,7 @@
         <p:nvSpPr>
           <p:cNvPr id="2" name="Slide Image Placeholder 1"/>
           <p:cNvSpPr>
-            <a:spLocks noGrp="1"/>
+            <a:spLocks noGrp="1" noRot="1" noChangeAspect="1"/>
           </p:cNvSpPr>
           <p:nvPr>
             <p:ph type="sldImg" idx="2"/>
@@ -1277,7 +1071,7 @@
             <a:spLocks noGrp="1"/>
           </p:cNvSpPr>
           <p:nvPr>
-            <p:ph type="body" idx="3" sz="quarter"/>
+            <p:ph type="body" sz="quarter" idx="3"/>
           </p:nvPr>
         </p:nvSpPr>
         <p:spPr/>
@@ -1298,7 +1092,7 @@
             <a:spLocks noGrp="1"/>
           </p:cNvSpPr>
           <p:nvPr>
-            <p:ph type="sldNum" idx="5" sz="quarter"/>
+            <p:ph type="sldNum" sz="quarter" idx="5"/>
           </p:nvPr>
         </p:nvSpPr>
         <p:spPr/>
@@ -1312,7 +1106,7 @@
 </file>
 
 <file path=ppt/notesSlides/notesSlide7.xml><?xml version="1.0" encoding="utf-8"?>
-<p:notes xmlns:a="http://schemas.openxmlformats.org/drawingml/2006/main" xmlns:p="http://schemas.openxmlformats.org/presentationml/2006/main" xmlns:r="http://schemas.openxmlformats.org/officeDocument/2006/relationships">
+<p:notes xmlns:a="http://schemas.openxmlformats.org/drawingml/2006/main" xmlns:r="http://schemas.openxmlformats.org/officeDocument/2006/relationships" xmlns:p="http://schemas.openxmlformats.org/presentationml/2006/main">
   <p:cSld>
     <p:spTree>
       <p:nvGrpSpPr>
@@ -1332,7 +1126,7 @@
         <p:nvSpPr>
           <p:cNvPr id="2" name="Slide Image Placeholder 1"/>
           <p:cNvSpPr>
-            <a:spLocks noGrp="1"/>
+            <a:spLocks noGrp="1" noRot="1" noChangeAspect="1"/>
           </p:cNvSpPr>
           <p:nvPr>
             <p:ph type="sldImg" idx="2"/>
@@ -1347,7 +1141,7 @@
             <a:spLocks noGrp="1"/>
           </p:cNvSpPr>
           <p:nvPr>
-            <p:ph type="body" idx="3" sz="quarter"/>
+            <p:ph type="body" sz="quarter" idx="3"/>
           </p:nvPr>
         </p:nvSpPr>
         <p:spPr/>
@@ -1368,7 +1162,7 @@
             <a:spLocks noGrp="1"/>
           </p:cNvSpPr>
           <p:nvPr>
-            <p:ph type="sldNum" idx="5" sz="quarter"/>
+            <p:ph type="sldNum" sz="quarter" idx="5"/>
           </p:nvPr>
         </p:nvSpPr>
         <p:spPr/>
@@ -1382,7 +1176,7 @@
 </file>
 
 <file path=ppt/notesSlides/notesSlide8.xml><?xml version="1.0" encoding="utf-8"?>
-<p:notes xmlns:a="http://schemas.openxmlformats.org/drawingml/2006/main" xmlns:p="http://schemas.openxmlformats.org/presentationml/2006/main" xmlns:r="http://schemas.openxmlformats.org/officeDocument/2006/relationships">
+<p:notes xmlns:a="http://schemas.openxmlformats.org/drawingml/2006/main" xmlns:r="http://schemas.openxmlformats.org/officeDocument/2006/relationships" xmlns:p="http://schemas.openxmlformats.org/presentationml/2006/main">
   <p:cSld>
     <p:spTree>
       <p:nvGrpSpPr>
@@ -1402,7 +1196,7 @@
         <p:nvSpPr>
           <p:cNvPr id="2" name="Slide Image Placeholder 1"/>
           <p:cNvSpPr>
-            <a:spLocks noGrp="1"/>
+            <a:spLocks noGrp="1" noRot="1" noChangeAspect="1"/>
           </p:cNvSpPr>
           <p:nvPr>
             <p:ph type="sldImg" idx="2"/>
@@ -1417,7 +1211,7 @@
             <a:spLocks noGrp="1"/>
           </p:cNvSpPr>
           <p:nvPr>
-            <p:ph type="body" idx="3" sz="quarter"/>
+            <p:ph type="body" sz="quarter" idx="3"/>
           </p:nvPr>
         </p:nvSpPr>
         <p:spPr/>
@@ -1438,7 +1232,7 @@
             <a:spLocks noGrp="1"/>
           </p:cNvSpPr>
           <p:nvPr>
-            <p:ph type="sldNum" idx="5" sz="quarter"/>
+            <p:ph type="sldNum" sz="quarter" idx="5"/>
           </p:nvPr>
         </p:nvSpPr>
         <p:spPr/>
@@ -1452,7 +1246,7 @@
 </file>
 
 <file path=ppt/notesSlides/notesSlide9.xml><?xml version="1.0" encoding="utf-8"?>
-<p:notes xmlns:a="http://schemas.openxmlformats.org/drawingml/2006/main" xmlns:p="http://schemas.openxmlformats.org/presentationml/2006/main" xmlns:r="http://schemas.openxmlformats.org/officeDocument/2006/relationships">
+<p:notes xmlns:a="http://schemas.openxmlformats.org/drawingml/2006/main" xmlns:r="http://schemas.openxmlformats.org/officeDocument/2006/relationships" xmlns:p="http://schemas.openxmlformats.org/presentationml/2006/main">
   <p:cSld>
     <p:spTree>
       <p:nvGrpSpPr>
@@ -1472,7 +1266,7 @@
         <p:nvSpPr>
           <p:cNvPr id="2" name="Slide Image Placeholder 1"/>
           <p:cNvSpPr>
-            <a:spLocks noGrp="1"/>
+            <a:spLocks noGrp="1" noRot="1" noChangeAspect="1"/>
           </p:cNvSpPr>
           <p:nvPr>
             <p:ph type="sldImg" idx="2"/>
@@ -1487,7 +1281,7 @@
             <a:spLocks noGrp="1"/>
           </p:cNvSpPr>
           <p:nvPr>
-            <p:ph type="body" idx="3" sz="quarter"/>
+            <p:ph type="body" sz="quarter" idx="3"/>
           </p:nvPr>
         </p:nvSpPr>
         <p:spPr/>
@@ -1508,7 +1302,7 @@
             <a:spLocks noGrp="1"/>
           </p:cNvSpPr>
           <p:nvPr>
-            <p:ph type="sldNum" idx="5" sz="quarter"/>
+            <p:ph type="sldNum" sz="quarter" idx="5"/>
           </p:nvPr>
         </p:nvSpPr>
         <p:spPr/>
@@ -1559,10 +1353,9 @@
           <a:lstStyle/>
           <a:p>
             <a:r>
-              <a:rPr lang="en-US" smtClean="0"/>
+              <a:rPr lang="en-US"/>
               <a:t>Click to edit Master title style</a:t>
             </a:r>
-            <a:endParaRPr lang="en-US"/>
           </a:p>
         </p:txBody>
       </p:sp>
@@ -1678,10 +1471,9 @@
           </a:lstStyle>
           <a:p>
             <a:r>
-              <a:rPr lang="en-US" smtClean="0"/>
+              <a:rPr lang="en-US"/>
               <a:t>Click to edit Master subtitle style</a:t>
             </a:r>
-            <a:endParaRPr lang="en-US"/>
           </a:p>
         </p:txBody>
       </p:sp>
@@ -1702,7 +1494,7 @@
           <a:p>
             <a:fld id="{5BCAD085-E8A6-8845-BD4E-CB4CCA059FC4}" type="datetimeFigureOut">
               <a:rPr lang="en-US" smtClean="0"/>
-              <a:t>1/27/13</a:t>
+              <a:t>10/30/2026</a:t>
             </a:fld>
             <a:endParaRPr lang="en-US"/>
           </a:p>
@@ -1796,10 +1588,9 @@
           <a:lstStyle/>
           <a:p>
             <a:r>
-              <a:rPr lang="en-US" smtClean="0"/>
+              <a:rPr lang="en-US"/>
               <a:t>Click to edit Master title style</a:t>
             </a:r>
-            <a:endParaRPr lang="en-US"/>
           </a:p>
         </p:txBody>
       </p:sp>
@@ -1820,38 +1611,37 @@
           <a:p>
             <a:pPr lvl="0"/>
             <a:r>
-              <a:rPr lang="en-US" smtClean="0"/>
+              <a:rPr lang="en-US"/>
               <a:t>Click to edit Master text styles</a:t>
             </a:r>
           </a:p>
           <a:p>
             <a:pPr lvl="1"/>
             <a:r>
-              <a:rPr lang="en-US" smtClean="0"/>
+              <a:rPr lang="en-US"/>
               <a:t>Second level</a:t>
             </a:r>
           </a:p>
           <a:p>
             <a:pPr lvl="2"/>
             <a:r>
-              <a:rPr lang="en-US" smtClean="0"/>
+              <a:rPr lang="en-US"/>
               <a:t>Third level</a:t>
             </a:r>
           </a:p>
           <a:p>
             <a:pPr lvl="3"/>
             <a:r>
-              <a:rPr lang="en-US" smtClean="0"/>
+              <a:rPr lang="en-US"/>
               <a:t>Fourth level</a:t>
             </a:r>
           </a:p>
           <a:p>
             <a:pPr lvl="4"/>
             <a:r>
-              <a:rPr lang="en-US" smtClean="0"/>
+              <a:rPr lang="en-US"/>
               <a:t>Fifth level</a:t>
             </a:r>
-            <a:endParaRPr lang="en-US"/>
           </a:p>
         </p:txBody>
       </p:sp>
@@ -1872,7 +1662,7 @@
           <a:p>
             <a:fld id="{5BCAD085-E8A6-8845-BD4E-CB4CCA059FC4}" type="datetimeFigureOut">
               <a:rPr lang="en-US" smtClean="0"/>
-              <a:t>1/27/13</a:t>
+              <a:t>10/30/2026</a:t>
             </a:fld>
             <a:endParaRPr lang="en-US"/>
           </a:p>
@@ -1971,10 +1761,9 @@
           <a:lstStyle/>
           <a:p>
             <a:r>
-              <a:rPr lang="en-US" smtClean="0"/>
+              <a:rPr lang="en-US"/>
               <a:t>Click to edit Master title style</a:t>
             </a:r>
-            <a:endParaRPr lang="en-US"/>
           </a:p>
         </p:txBody>
       </p:sp>
@@ -2000,38 +1789,37 @@
           <a:p>
             <a:pPr lvl="0"/>
             <a:r>
-              <a:rPr lang="en-US" smtClean="0"/>
+              <a:rPr lang="en-US"/>
               <a:t>Click to edit Master text styles</a:t>
             </a:r>
           </a:p>
           <a:p>
             <a:pPr lvl="1"/>
             <a:r>
-              <a:rPr lang="en-US" smtClean="0"/>
+              <a:rPr lang="en-US"/>
               <a:t>Second level</a:t>
             </a:r>
           </a:p>
           <a:p>
             <a:pPr lvl="2"/>
             <a:r>
-              <a:rPr lang="en-US" smtClean="0"/>
+              <a:rPr lang="en-US"/>
               <a:t>Third level</a:t>
             </a:r>
           </a:p>
           <a:p>
             <a:pPr lvl="3"/>
             <a:r>
-              <a:rPr lang="en-US" smtClean="0"/>
+              <a:rPr lang="en-US"/>
               <a:t>Fourth level</a:t>
             </a:r>
           </a:p>
           <a:p>
             <a:pPr lvl="4"/>
             <a:r>
-              <a:rPr lang="en-US" smtClean="0"/>
+              <a:rPr lang="en-US"/>
               <a:t>Fifth level</a:t>
             </a:r>
-            <a:endParaRPr lang="en-US"/>
           </a:p>
         </p:txBody>
       </p:sp>
@@ -2052,7 +1840,7 @@
           <a:p>
             <a:fld id="{5BCAD085-E8A6-8845-BD4E-CB4CCA059FC4}" type="datetimeFigureOut">
               <a:rPr lang="en-US" smtClean="0"/>
-              <a:t>1/27/13</a:t>
+              <a:t>10/30/2026</a:t>
             </a:fld>
             <a:endParaRPr lang="en-US"/>
           </a:p>
@@ -2146,10 +1934,9 @@
           <a:lstStyle/>
           <a:p>
             <a:r>
-              <a:rPr lang="en-US" smtClean="0"/>
+              <a:rPr lang="en-US"/>
               <a:t>Click to edit Master title style</a:t>
             </a:r>
-            <a:endParaRPr lang="en-US"/>
           </a:p>
         </p:txBody>
       </p:sp>
@@ -2170,38 +1957,37 @@
           <a:p>
             <a:pPr lvl="0"/>
             <a:r>
-              <a:rPr lang="en-US" smtClean="0"/>
+              <a:rPr lang="en-US"/>
               <a:t>Click to edit Master text styles</a:t>
             </a:r>
           </a:p>
           <a:p>
             <a:pPr lvl="1"/>
             <a:r>
-              <a:rPr lang="en-US" smtClean="0"/>
+              <a:rPr lang="en-US"/>
               <a:t>Second level</a:t>
             </a:r>
           </a:p>
           <a:p>
             <a:pPr lvl="2"/>
             <a:r>
-              <a:rPr lang="en-US" smtClean="0"/>
+              <a:rPr lang="en-US"/>
               <a:t>Third level</a:t>
             </a:r>
           </a:p>
           <a:p>
             <a:pPr lvl="3"/>
             <a:r>
-              <a:rPr lang="en-US" smtClean="0"/>
+              <a:rPr lang="en-US"/>
               <a:t>Fourth level</a:t>
             </a:r>
           </a:p>
           <a:p>
             <a:pPr lvl="4"/>
             <a:r>
-              <a:rPr lang="en-US" smtClean="0"/>
+              <a:rPr lang="en-US"/>
               <a:t>Fifth level</a:t>
             </a:r>
-            <a:endParaRPr lang="en-US"/>
           </a:p>
         </p:txBody>
       </p:sp>
@@ -2222,7 +2008,7 @@
           <a:p>
             <a:fld id="{5BCAD085-E8A6-8845-BD4E-CB4CCA059FC4}" type="datetimeFigureOut">
               <a:rPr lang="en-US" smtClean="0"/>
-              <a:t>1/27/13</a:t>
+              <a:t>10/30/2026</a:t>
             </a:fld>
             <a:endParaRPr lang="en-US"/>
           </a:p>
@@ -2325,10 +2111,9 @@
           </a:lstStyle>
           <a:p>
             <a:r>
-              <a:rPr lang="en-US" smtClean="0"/>
+              <a:rPr lang="en-US"/>
               <a:t>Click to edit Master title style</a:t>
             </a:r>
-            <a:endParaRPr lang="en-US"/>
           </a:p>
         </p:txBody>
       </p:sp>
@@ -2445,7 +2230,7 @@
           <a:p>
             <a:pPr lvl="0"/>
             <a:r>
-              <a:rPr lang="en-US" smtClean="0"/>
+              <a:rPr lang="en-US"/>
               <a:t>Click to edit Master text styles</a:t>
             </a:r>
           </a:p>
@@ -2468,7 +2253,7 @@
           <a:p>
             <a:fld id="{5BCAD085-E8A6-8845-BD4E-CB4CCA059FC4}" type="datetimeFigureOut">
               <a:rPr lang="en-US" smtClean="0"/>
-              <a:t>1/27/13</a:t>
+              <a:t>10/30/2026</a:t>
             </a:fld>
             <a:endParaRPr lang="en-US"/>
           </a:p>
@@ -2562,10 +2347,9 @@
           <a:lstStyle/>
           <a:p>
             <a:r>
-              <a:rPr lang="en-US" smtClean="0"/>
+              <a:rPr lang="en-US"/>
               <a:t>Click to edit Master title style</a:t>
             </a:r>
-            <a:endParaRPr lang="en-US"/>
           </a:p>
         </p:txBody>
       </p:sp>
@@ -2619,38 +2403,37 @@
           <a:p>
             <a:pPr lvl="0"/>
             <a:r>
-              <a:rPr lang="en-US" smtClean="0"/>
+              <a:rPr lang="en-US"/>
               <a:t>Click to edit Master text styles</a:t>
             </a:r>
           </a:p>
           <a:p>
             <a:pPr lvl="1"/>
             <a:r>
-              <a:rPr lang="en-US" smtClean="0"/>
+              <a:rPr lang="en-US"/>
               <a:t>Second level</a:t>
             </a:r>
           </a:p>
           <a:p>
             <a:pPr lvl="2"/>
             <a:r>
-              <a:rPr lang="en-US" smtClean="0"/>
+              <a:rPr lang="en-US"/>
               <a:t>Third level</a:t>
             </a:r>
           </a:p>
           <a:p>
             <a:pPr lvl="3"/>
             <a:r>
-              <a:rPr lang="en-US" smtClean="0"/>
+              <a:rPr lang="en-US"/>
               <a:t>Fourth level</a:t>
             </a:r>
           </a:p>
           <a:p>
             <a:pPr lvl="4"/>
             <a:r>
-              <a:rPr lang="en-US" smtClean="0"/>
+              <a:rPr lang="en-US"/>
               <a:t>Fifth level</a:t>
             </a:r>
-            <a:endParaRPr lang="en-US"/>
           </a:p>
         </p:txBody>
       </p:sp>
@@ -2704,38 +2487,37 @@
           <a:p>
             <a:pPr lvl="0"/>
             <a:r>
-              <a:rPr lang="en-US" smtClean="0"/>
+              <a:rPr lang="en-US"/>
               <a:t>Click to edit Master text styles</a:t>
             </a:r>
           </a:p>
           <a:p>
             <a:pPr lvl="1"/>
             <a:r>
-              <a:rPr lang="en-US" smtClean="0"/>
+              <a:rPr lang="en-US"/>
               <a:t>Second level</a:t>
             </a:r>
           </a:p>
           <a:p>
             <a:pPr lvl="2"/>
             <a:r>
-              <a:rPr lang="en-US" smtClean="0"/>
+              <a:rPr lang="en-US"/>
               <a:t>Third level</a:t>
             </a:r>
           </a:p>
           <a:p>
             <a:pPr lvl="3"/>
             <a:r>
-              <a:rPr lang="en-US" smtClean="0"/>
+              <a:rPr lang="en-US"/>
               <a:t>Fourth level</a:t>
             </a:r>
           </a:p>
           <a:p>
             <a:pPr lvl="4"/>
             <a:r>
-              <a:rPr lang="en-US" smtClean="0"/>
+              <a:rPr lang="en-US"/>
               <a:t>Fifth level</a:t>
             </a:r>
-            <a:endParaRPr lang="en-US"/>
           </a:p>
         </p:txBody>
       </p:sp>
@@ -2756,7 +2538,7 @@
           <a:p>
             <a:fld id="{5BCAD085-E8A6-8845-BD4E-CB4CCA059FC4}" type="datetimeFigureOut">
               <a:rPr lang="en-US" smtClean="0"/>
-              <a:t>1/27/13</a:t>
+              <a:t>10/30/2026</a:t>
             </a:fld>
             <a:endParaRPr lang="en-US"/>
           </a:p>
@@ -2854,10 +2636,9 @@
           </a:lstStyle>
           <a:p>
             <a:r>
-              <a:rPr lang="en-US" smtClean="0"/>
+              <a:rPr lang="en-US"/>
               <a:t>Click to edit Master title style</a:t>
             </a:r>
-            <a:endParaRPr lang="en-US"/>
           </a:p>
         </p:txBody>
       </p:sp>
@@ -2920,7 +2701,7 @@
           <a:p>
             <a:pPr lvl="0"/>
             <a:r>
-              <a:rPr lang="en-US" smtClean="0"/>
+              <a:rPr lang="en-US"/>
               <a:t>Click to edit Master text styles</a:t>
             </a:r>
           </a:p>
@@ -2976,38 +2757,37 @@
           <a:p>
             <a:pPr lvl="0"/>
             <a:r>
-              <a:rPr lang="en-US" smtClean="0"/>
+              <a:rPr lang="en-US"/>
               <a:t>Click to edit Master text styles</a:t>
             </a:r>
           </a:p>
           <a:p>
             <a:pPr lvl="1"/>
             <a:r>
-              <a:rPr lang="en-US" smtClean="0"/>
+              <a:rPr lang="en-US"/>
               <a:t>Second level</a:t>
             </a:r>
           </a:p>
           <a:p>
             <a:pPr lvl="2"/>
             <a:r>
-              <a:rPr lang="en-US" smtClean="0"/>
+              <a:rPr lang="en-US"/>
               <a:t>Third level</a:t>
             </a:r>
           </a:p>
           <a:p>
             <a:pPr lvl="3"/>
             <a:r>
-              <a:rPr lang="en-US" smtClean="0"/>
+              <a:rPr lang="en-US"/>
               <a:t>Fourth level</a:t>
             </a:r>
           </a:p>
           <a:p>
             <a:pPr lvl="4"/>
             <a:r>
-              <a:rPr lang="en-US" smtClean="0"/>
+              <a:rPr lang="en-US"/>
               <a:t>Fifth level</a:t>
             </a:r>
-            <a:endParaRPr lang="en-US"/>
           </a:p>
         </p:txBody>
       </p:sp>
@@ -3070,7 +2850,7 @@
           <a:p>
             <a:pPr lvl="0"/>
             <a:r>
-              <a:rPr lang="en-US" smtClean="0"/>
+              <a:rPr lang="en-US"/>
               <a:t>Click to edit Master text styles</a:t>
             </a:r>
           </a:p>
@@ -3126,38 +2906,37 @@
           <a:p>
             <a:pPr lvl="0"/>
             <a:r>
-              <a:rPr lang="en-US" smtClean="0"/>
+              <a:rPr lang="en-US"/>
               <a:t>Click to edit Master text styles</a:t>
             </a:r>
           </a:p>
           <a:p>
             <a:pPr lvl="1"/>
             <a:r>
-              <a:rPr lang="en-US" smtClean="0"/>
+              <a:rPr lang="en-US"/>
               <a:t>Second level</a:t>
             </a:r>
           </a:p>
           <a:p>
             <a:pPr lvl="2"/>
             <a:r>
-              <a:rPr lang="en-US" smtClean="0"/>
+              <a:rPr lang="en-US"/>
               <a:t>Third level</a:t>
             </a:r>
           </a:p>
           <a:p>
             <a:pPr lvl="3"/>
             <a:r>
-              <a:rPr lang="en-US" smtClean="0"/>
+              <a:rPr lang="en-US"/>
               <a:t>Fourth level</a:t>
             </a:r>
           </a:p>
           <a:p>
             <a:pPr lvl="4"/>
             <a:r>
-              <a:rPr lang="en-US" smtClean="0"/>
+              <a:rPr lang="en-US"/>
               <a:t>Fifth level</a:t>
             </a:r>
-            <a:endParaRPr lang="en-US"/>
           </a:p>
         </p:txBody>
       </p:sp>
@@ -3178,7 +2957,7 @@
           <a:p>
             <a:fld id="{5BCAD085-E8A6-8845-BD4E-CB4CCA059FC4}" type="datetimeFigureOut">
               <a:rPr lang="en-US" smtClean="0"/>
-              <a:t>1/27/13</a:t>
+              <a:t>10/30/2026</a:t>
             </a:fld>
             <a:endParaRPr lang="en-US"/>
           </a:p>
@@ -3272,10 +3051,9 @@
           <a:lstStyle/>
           <a:p>
             <a:r>
-              <a:rPr lang="en-US" smtClean="0"/>
+              <a:rPr lang="en-US"/>
               <a:t>Click to edit Master title style</a:t>
             </a:r>
-            <a:endParaRPr lang="en-US"/>
           </a:p>
         </p:txBody>
       </p:sp>
@@ -3296,7 +3074,7 @@
           <a:p>
             <a:fld id="{5BCAD085-E8A6-8845-BD4E-CB4CCA059FC4}" type="datetimeFigureOut">
               <a:rPr lang="en-US" smtClean="0"/>
-              <a:t>1/27/13</a:t>
+              <a:t>10/30/2026</a:t>
             </a:fld>
             <a:endParaRPr lang="en-US"/>
           </a:p>
@@ -3391,7 +3169,7 @@
           <a:p>
             <a:fld id="{5BCAD085-E8A6-8845-BD4E-CB4CCA059FC4}" type="datetimeFigureOut">
               <a:rPr lang="en-US" smtClean="0"/>
-              <a:t>1/27/13</a:t>
+              <a:t>10/30/2026</a:t>
             </a:fld>
             <a:endParaRPr lang="en-US"/>
           </a:p>
@@ -3494,10 +3272,9 @@
           </a:lstStyle>
           <a:p>
             <a:r>
-              <a:rPr lang="en-US" smtClean="0"/>
+              <a:rPr lang="en-US"/>
               <a:t>Click to edit Master title style</a:t>
             </a:r>
-            <a:endParaRPr lang="en-US"/>
           </a:p>
         </p:txBody>
       </p:sp>
@@ -3551,38 +3328,37 @@
           <a:p>
             <a:pPr lvl="0"/>
             <a:r>
-              <a:rPr lang="en-US" smtClean="0"/>
+              <a:rPr lang="en-US"/>
               <a:t>Click to edit Master text styles</a:t>
             </a:r>
           </a:p>
           <a:p>
             <a:pPr lvl="1"/>
             <a:r>
-              <a:rPr lang="en-US" smtClean="0"/>
+              <a:rPr lang="en-US"/>
               <a:t>Second level</a:t>
             </a:r>
           </a:p>
           <a:p>
             <a:pPr lvl="2"/>
             <a:r>
-              <a:rPr lang="en-US" smtClean="0"/>
+              <a:rPr lang="en-US"/>
               <a:t>Third level</a:t>
             </a:r>
           </a:p>
           <a:p>
             <a:pPr lvl="3"/>
             <a:r>
-              <a:rPr lang="en-US" smtClean="0"/>
+              <a:rPr lang="en-US"/>
               <a:t>Fourth level</a:t>
             </a:r>
           </a:p>
           <a:p>
             <a:pPr lvl="4"/>
             <a:r>
-              <a:rPr lang="en-US" smtClean="0"/>
+              <a:rPr lang="en-US"/>
               <a:t>Fifth level</a:t>
             </a:r>
-            <a:endParaRPr lang="en-US"/>
           </a:p>
         </p:txBody>
       </p:sp>
@@ -3645,7 +3421,7 @@
           <a:p>
             <a:pPr lvl="0"/>
             <a:r>
-              <a:rPr lang="en-US" smtClean="0"/>
+              <a:rPr lang="en-US"/>
               <a:t>Click to edit Master text styles</a:t>
             </a:r>
           </a:p>
@@ -3668,7 +3444,7 @@
           <a:p>
             <a:fld id="{5BCAD085-E8A6-8845-BD4E-CB4CCA059FC4}" type="datetimeFigureOut">
               <a:rPr lang="en-US" smtClean="0"/>
-              <a:t>1/27/13</a:t>
+              <a:t>10/30/2026</a:t>
             </a:fld>
             <a:endParaRPr lang="en-US"/>
           </a:p>
@@ -3771,10 +3547,9 @@
           </a:lstStyle>
           <a:p>
             <a:r>
-              <a:rPr lang="en-US" smtClean="0"/>
+              <a:rPr lang="en-US"/>
               <a:t>Click to edit Master title style</a:t>
             </a:r>
-            <a:endParaRPr lang="en-US"/>
           </a:p>
         </p:txBody>
       </p:sp>
@@ -3898,7 +3673,7 @@
           <a:p>
             <a:pPr lvl="0"/>
             <a:r>
-              <a:rPr lang="en-US" smtClean="0"/>
+              <a:rPr lang="en-US"/>
               <a:t>Click to edit Master text styles</a:t>
             </a:r>
           </a:p>
@@ -3921,7 +3696,7 @@
           <a:p>
             <a:fld id="{5BCAD085-E8A6-8845-BD4E-CB4CCA059FC4}" type="datetimeFigureOut">
               <a:rPr lang="en-US" smtClean="0"/>
-              <a:t>1/27/13</a:t>
+              <a:t>10/30/2026</a:t>
             </a:fld>
             <a:endParaRPr lang="en-US"/>
           </a:p>
@@ -4030,10 +3805,9 @@
           <a:lstStyle/>
           <a:p>
             <a:r>
-              <a:rPr lang="en-US" smtClean="0"/>
+              <a:rPr lang="en-US"/>
               <a:t>Click to edit Master title style</a:t>
             </a:r>
-            <a:endParaRPr lang="en-US"/>
           </a:p>
         </p:txBody>
       </p:sp>
@@ -4064,38 +3838,37 @@
           <a:p>
             <a:pPr lvl="0"/>
             <a:r>
-              <a:rPr lang="en-US" smtClean="0"/>
+              <a:rPr lang="en-US"/>
               <a:t>Click to edit Master text styles</a:t>
             </a:r>
           </a:p>
           <a:p>
             <a:pPr lvl="1"/>
             <a:r>
-              <a:rPr lang="en-US" smtClean="0"/>
+              <a:rPr lang="en-US"/>
               <a:t>Second level</a:t>
             </a:r>
           </a:p>
           <a:p>
             <a:pPr lvl="2"/>
             <a:r>
-              <a:rPr lang="en-US" smtClean="0"/>
+              <a:rPr lang="en-US"/>
               <a:t>Third level</a:t>
             </a:r>
           </a:p>
           <a:p>
             <a:pPr lvl="3"/>
             <a:r>
-              <a:rPr lang="en-US" smtClean="0"/>
+              <a:rPr lang="en-US"/>
               <a:t>Fourth level</a:t>
             </a:r>
           </a:p>
           <a:p>
             <a:pPr lvl="4"/>
             <a:r>
-              <a:rPr lang="en-US" smtClean="0"/>
+              <a:rPr lang="en-US"/>
               <a:t>Fifth level</a:t>
             </a:r>
-            <a:endParaRPr lang="en-US"/>
           </a:p>
         </p:txBody>
       </p:sp>
@@ -4134,7 +3907,7 @@
           <a:p>
             <a:fld id="{5BCAD085-E8A6-8845-BD4E-CB4CCA059FC4}" type="datetimeFigureOut">
               <a:rPr lang="en-US" smtClean="0"/>
-              <a:t>1/27/13</a:t>
+              <a:t>10/30/2026</a:t>
             </a:fld>
             <a:endParaRPr lang="en-US"/>
           </a:p>
@@ -4493,7 +4266,7 @@
 </file>
 
 <file path=ppt/slides/slide1.xml><?xml version="1.0" encoding="utf-8"?>
-<p:sld xmlns:a="http://schemas.openxmlformats.org/drawingml/2006/main" xmlns:p="http://schemas.openxmlformats.org/presentationml/2006/main" xmlns:r="http://schemas.openxmlformats.org/officeDocument/2006/relationships">
+<p:sld xmlns:a="http://schemas.openxmlformats.org/drawingml/2006/main" xmlns:r="http://schemas.openxmlformats.org/officeDocument/2006/relationships" xmlns:p="http://schemas.openxmlformats.org/presentationml/2006/main">
   <p:cSld>
     <p:spTree>
       <p:nvGrpSpPr>
@@ -4501,7 +4274,14 @@
         <p:cNvGrpSpPr/>
         <p:nvPr/>
       </p:nvGrpSpPr>
-      <p:grpSpPr/>
+      <p:grpSpPr>
+        <a:xfrm>
+          <a:off x="0" y="0"/>
+          <a:ext cx="0" cy="0"/>
+          <a:chOff x="0" y="0"/>
+          <a:chExt cx="0" cy="0"/>
+        </a:xfrm>
+      </p:grpSpPr>
       <p:sp>
         <p:nvSpPr>
           <p:cNvPr id="2" name="Rectangle 1"/>
@@ -4542,6 +4322,7 @@
           <a:lstStyle/>
           <a:p>
             <a:pPr algn="ctr"/>
+            <a:endParaRPr/>
           </a:p>
         </p:txBody>
       </p:sp>
@@ -4562,7 +4343,7 @@
           <a:noFill/>
         </p:spPr>
         <p:txBody>
-          <a:bodyPr wrap="square" anchor="t" lIns="50800" rIns="50800" tIns="25400" bIns="25400">
+          <a:bodyPr wrap="square" lIns="50800" tIns="25400" rIns="50800" bIns="25400" anchor="t">
             <a:spAutoFit/>
           </a:bodyPr>
           <a:lstStyle/>
@@ -4603,7 +4384,7 @@
           <a:noFill/>
         </p:spPr>
         <p:txBody>
-          <a:bodyPr wrap="square" anchor="t" lIns="50800" rIns="50800" tIns="25400" bIns="25400">
+          <a:bodyPr wrap="square" lIns="50800" tIns="25400" rIns="50800" bIns="25400" anchor="t">
             <a:spAutoFit/>
           </a:bodyPr>
           <a:lstStyle/>
@@ -4644,7 +4425,7 @@
           <a:noFill/>
         </p:spPr>
         <p:txBody>
-          <a:bodyPr wrap="square" anchor="t" lIns="50800" rIns="50800" tIns="25400" bIns="25400">
+          <a:bodyPr wrap="square" lIns="50800" tIns="25400" rIns="50800" bIns="25400" anchor="t">
             <a:spAutoFit/>
           </a:bodyPr>
           <a:lstStyle/>
@@ -4685,7 +4466,7 @@
           <a:noFill/>
         </p:spPr>
         <p:txBody>
-          <a:bodyPr wrap="square" anchor="t" lIns="50800" rIns="50800" tIns="25400" bIns="25400">
+          <a:bodyPr wrap="square" lIns="50800" tIns="25400" rIns="50800" bIns="25400" anchor="t">
             <a:spAutoFit/>
           </a:bodyPr>
           <a:lstStyle/>
@@ -4798,7 +4579,7 @@
           <a:noFill/>
         </p:spPr>
         <p:txBody>
-          <a:bodyPr wrap="square" anchor="t" lIns="50800" rIns="50800" tIns="25400" bIns="25400">
+          <a:bodyPr wrap="square" lIns="50800" tIns="25400" rIns="50800" bIns="25400" anchor="t">
             <a:spAutoFit/>
           </a:bodyPr>
           <a:lstStyle/>
@@ -4880,6 +4661,7 @@
           <a:lstStyle/>
           <a:p>
             <a:pPr algn="ctr"/>
+            <a:endParaRPr/>
           </a:p>
         </p:txBody>
       </p:sp>
@@ -4892,7 +4674,7 @@
 </file>
 
 <file path=ppt/slides/slide10.xml><?xml version="1.0" encoding="utf-8"?>
-<p:sld xmlns:a="http://schemas.openxmlformats.org/drawingml/2006/main" xmlns:p="http://schemas.openxmlformats.org/presentationml/2006/main" xmlns:r="http://schemas.openxmlformats.org/officeDocument/2006/relationships">
+<p:sld xmlns:a="http://schemas.openxmlformats.org/drawingml/2006/main" xmlns:r="http://schemas.openxmlformats.org/officeDocument/2006/relationships" xmlns:p="http://schemas.openxmlformats.org/presentationml/2006/main">
   <p:cSld>
     <p:spTree>
       <p:nvGrpSpPr>
@@ -4900,7 +4682,14 @@
         <p:cNvGrpSpPr/>
         <p:nvPr/>
       </p:nvGrpSpPr>
-      <p:grpSpPr/>
+      <p:grpSpPr>
+        <a:xfrm>
+          <a:off x="0" y="0"/>
+          <a:ext cx="0" cy="0"/>
+          <a:chOff x="0" y="0"/>
+          <a:chExt cx="0" cy="0"/>
+        </a:xfrm>
+      </p:grpSpPr>
       <p:sp>
         <p:nvSpPr>
           <p:cNvPr id="2" name="Rectangle 1"/>
@@ -4941,6 +4730,7 @@
           <a:lstStyle/>
           <a:p>
             <a:pPr algn="ctr"/>
+            <a:endParaRPr/>
           </a:p>
         </p:txBody>
       </p:sp>
@@ -4980,7 +4770,7 @@
           </a:fontRef>
         </p:style>
         <p:txBody>
-          <a:bodyPr rtlCol="0" anchor="ctr" wrap="none" lIns="25400" rIns="25400"/>
+          <a:bodyPr wrap="none" lIns="25400" rIns="25400" rtlCol="0" anchor="ctr"/>
           <a:lstStyle/>
           <a:p>
             <a:pPr algn="ctr"/>
@@ -5015,7 +4805,7 @@
           <a:noFill/>
         </p:spPr>
         <p:txBody>
-          <a:bodyPr wrap="square" anchor="ctr" lIns="50800" rIns="50800" tIns="25400" bIns="25400">
+          <a:bodyPr wrap="square" lIns="50800" tIns="25400" rIns="50800" bIns="25400" anchor="ctr">
             <a:spAutoFit/>
           </a:bodyPr>
           <a:lstStyle/>
@@ -5079,6 +4869,7 @@
           <a:lstStyle/>
           <a:p>
             <a:pPr algn="ctr"/>
+            <a:endParaRPr/>
           </a:p>
         </p:txBody>
       </p:sp>
@@ -5101,16 +4892,46 @@
                 <a:tableStyleId>{5C22544A-7EE6-4342-B048-85BDC9FD1C3A}</a:tableStyleId>
               </a:tblPr>
               <a:tblGrid>
-                <a:gridCol w="892454"/>
-                <a:gridCol w="1450238"/>
-                <a:gridCol w="3346703"/>
-                <a:gridCol w="3123590"/>
-                <a:gridCol w="2342692"/>
+                <a:gridCol w="892454">
+                  <a:extLst>
+                    <a:ext uri="{9D8B030D-6E8A-4147-A177-3AD203B41FA5}">
+                      <a16:colId xmlns:a16="http://schemas.microsoft.com/office/drawing/2014/main" val="20000"/>
+                    </a:ext>
+                  </a:extLst>
+                </a:gridCol>
+                <a:gridCol w="1450238">
+                  <a:extLst>
+                    <a:ext uri="{9D8B030D-6E8A-4147-A177-3AD203B41FA5}">
+                      <a16:colId xmlns:a16="http://schemas.microsoft.com/office/drawing/2014/main" val="20001"/>
+                    </a:ext>
+                  </a:extLst>
+                </a:gridCol>
+                <a:gridCol w="3346703">
+                  <a:extLst>
+                    <a:ext uri="{9D8B030D-6E8A-4147-A177-3AD203B41FA5}">
+                      <a16:colId xmlns:a16="http://schemas.microsoft.com/office/drawing/2014/main" val="20002"/>
+                    </a:ext>
+                  </a:extLst>
+                </a:gridCol>
+                <a:gridCol w="3123590">
+                  <a:extLst>
+                    <a:ext uri="{9D8B030D-6E8A-4147-A177-3AD203B41FA5}">
+                      <a16:colId xmlns:a16="http://schemas.microsoft.com/office/drawing/2014/main" val="20003"/>
+                    </a:ext>
+                  </a:extLst>
+                </a:gridCol>
+                <a:gridCol w="2342692">
+                  <a:extLst>
+                    <a:ext uri="{9D8B030D-6E8A-4147-A177-3AD203B41FA5}">
+                      <a16:colId xmlns:a16="http://schemas.microsoft.com/office/drawing/2014/main" val="20004"/>
+                    </a:ext>
+                  </a:extLst>
+                </a:gridCol>
               </a:tblGrid>
               <a:tr h="402336">
                 <a:tc>
                   <a:txBody>
-                    <a:bodyPr wrap="square"/>
+                    <a:bodyPr/>
                     <a:lstStyle/>
                     <a:p>
                       <a:pPr algn="l"/>
@@ -5135,7 +4956,7 @@
                 </a:tc>
                 <a:tc>
                   <a:txBody>
-                    <a:bodyPr wrap="square"/>
+                    <a:bodyPr/>
                     <a:lstStyle/>
                     <a:p>
                       <a:pPr algn="l"/>
@@ -5160,7 +4981,7 @@
                 </a:tc>
                 <a:tc>
                   <a:txBody>
-                    <a:bodyPr wrap="square"/>
+                    <a:bodyPr/>
                     <a:lstStyle/>
                     <a:p>
                       <a:pPr algn="l"/>
@@ -5185,7 +5006,7 @@
                 </a:tc>
                 <a:tc>
                   <a:txBody>
-                    <a:bodyPr wrap="square"/>
+                    <a:bodyPr/>
                     <a:lstStyle/>
                     <a:p>
                       <a:pPr algn="l"/>
@@ -5210,7 +5031,7 @@
                 </a:tc>
                 <a:tc>
                   <a:txBody>
-                    <a:bodyPr wrap="square"/>
+                    <a:bodyPr/>
                     <a:lstStyle/>
                     <a:p>
                       <a:pPr algn="l"/>
@@ -5233,11 +5054,16 @@
                     </a:solidFill>
                   </a:tcPr>
                 </a:tc>
+                <a:extLst>
+                  <a:ext uri="{0D108BD9-81ED-4DB2-BD59-A6C34878D82A}">
+                    <a16:rowId xmlns:a16="http://schemas.microsoft.com/office/drawing/2014/main" val="10000"/>
+                  </a:ext>
+                </a:extLst>
               </a:tr>
               <a:tr h="402336">
                 <a:tc>
                   <a:txBody>
-                    <a:bodyPr wrap="square"/>
+                    <a:bodyPr/>
                     <a:lstStyle/>
                     <a:p>
                       <a:pPr algn="l"/>
@@ -5262,7 +5088,7 @@
                 </a:tc>
                 <a:tc>
                   <a:txBody>
-                    <a:bodyPr wrap="square"/>
+                    <a:bodyPr/>
                     <a:lstStyle/>
                     <a:p>
                       <a:pPr algn="l"/>
@@ -5287,7 +5113,7 @@
                 </a:tc>
                 <a:tc>
                   <a:txBody>
-                    <a:bodyPr wrap="square"/>
+                    <a:bodyPr/>
                     <a:lstStyle/>
                     <a:p>
                       <a:pPr algn="l"/>
@@ -5312,7 +5138,7 @@
                 </a:tc>
                 <a:tc>
                   <a:txBody>
-                    <a:bodyPr wrap="square"/>
+                    <a:bodyPr/>
                     <a:lstStyle/>
                     <a:p>
                       <a:pPr algn="l"/>
@@ -5337,7 +5163,7 @@
                 </a:tc>
                 <a:tc>
                   <a:txBody>
-                    <a:bodyPr wrap="square"/>
+                    <a:bodyPr/>
                     <a:lstStyle/>
                     <a:p>
                       <a:pPr algn="l"/>
@@ -5360,11 +5186,16 @@
                     </a:solidFill>
                   </a:tcPr>
                 </a:tc>
+                <a:extLst>
+                  <a:ext uri="{0D108BD9-81ED-4DB2-BD59-A6C34878D82A}">
+                    <a16:rowId xmlns:a16="http://schemas.microsoft.com/office/drawing/2014/main" val="10001"/>
+                  </a:ext>
+                </a:extLst>
               </a:tr>
               <a:tr h="402336">
                 <a:tc>
                   <a:txBody>
-                    <a:bodyPr wrap="square"/>
+                    <a:bodyPr/>
                     <a:lstStyle/>
                     <a:p>
                       <a:pPr algn="l"/>
@@ -5389,7 +5220,7 @@
                 </a:tc>
                 <a:tc>
                   <a:txBody>
-                    <a:bodyPr wrap="square"/>
+                    <a:bodyPr/>
                     <a:lstStyle/>
                     <a:p>
                       <a:pPr algn="l"/>
@@ -5414,7 +5245,7 @@
                 </a:tc>
                 <a:tc>
                   <a:txBody>
-                    <a:bodyPr wrap="square"/>
+                    <a:bodyPr/>
                     <a:lstStyle/>
                     <a:p>
                       <a:pPr algn="l"/>
@@ -5439,7 +5270,7 @@
                 </a:tc>
                 <a:tc>
                   <a:txBody>
-                    <a:bodyPr wrap="square"/>
+                    <a:bodyPr/>
                     <a:lstStyle/>
                     <a:p>
                       <a:pPr algn="l"/>
@@ -5464,7 +5295,7 @@
                 </a:tc>
                 <a:tc>
                   <a:txBody>
-                    <a:bodyPr wrap="square"/>
+                    <a:bodyPr/>
                     <a:lstStyle/>
                     <a:p>
                       <a:pPr algn="l"/>
@@ -5487,11 +5318,16 @@
                     </a:solidFill>
                   </a:tcPr>
                 </a:tc>
+                <a:extLst>
+                  <a:ext uri="{0D108BD9-81ED-4DB2-BD59-A6C34878D82A}">
+                    <a16:rowId xmlns:a16="http://schemas.microsoft.com/office/drawing/2014/main" val="10002"/>
+                  </a:ext>
+                </a:extLst>
               </a:tr>
               <a:tr h="402336">
                 <a:tc>
                   <a:txBody>
-                    <a:bodyPr wrap="square"/>
+                    <a:bodyPr/>
                     <a:lstStyle/>
                     <a:p>
                       <a:pPr algn="l"/>
@@ -5516,7 +5352,7 @@
                 </a:tc>
                 <a:tc>
                   <a:txBody>
-                    <a:bodyPr wrap="square"/>
+                    <a:bodyPr/>
                     <a:lstStyle/>
                     <a:p>
                       <a:pPr algn="l"/>
@@ -5541,7 +5377,7 @@
                 </a:tc>
                 <a:tc>
                   <a:txBody>
-                    <a:bodyPr wrap="square"/>
+                    <a:bodyPr/>
                     <a:lstStyle/>
                     <a:p>
                       <a:pPr algn="l"/>
@@ -5566,7 +5402,7 @@
                 </a:tc>
                 <a:tc>
                   <a:txBody>
-                    <a:bodyPr wrap="square"/>
+                    <a:bodyPr/>
                     <a:lstStyle/>
                     <a:p>
                       <a:pPr algn="l"/>
@@ -5591,7 +5427,7 @@
                 </a:tc>
                 <a:tc>
                   <a:txBody>
-                    <a:bodyPr wrap="square"/>
+                    <a:bodyPr/>
                     <a:lstStyle/>
                     <a:p>
                       <a:pPr algn="l"/>
@@ -5614,11 +5450,16 @@
                     </a:solidFill>
                   </a:tcPr>
                 </a:tc>
+                <a:extLst>
+                  <a:ext uri="{0D108BD9-81ED-4DB2-BD59-A6C34878D82A}">
+                    <a16:rowId xmlns:a16="http://schemas.microsoft.com/office/drawing/2014/main" val="10003"/>
+                  </a:ext>
+                </a:extLst>
               </a:tr>
               <a:tr h="402336">
                 <a:tc>
                   <a:txBody>
-                    <a:bodyPr wrap="square"/>
+                    <a:bodyPr/>
                     <a:lstStyle/>
                     <a:p>
                       <a:pPr algn="l"/>
@@ -5643,7 +5484,7 @@
                 </a:tc>
                 <a:tc>
                   <a:txBody>
-                    <a:bodyPr wrap="square"/>
+                    <a:bodyPr/>
                     <a:lstStyle/>
                     <a:p>
                       <a:pPr algn="l"/>
@@ -5668,7 +5509,7 @@
                 </a:tc>
                 <a:tc>
                   <a:txBody>
-                    <a:bodyPr wrap="square"/>
+                    <a:bodyPr/>
                     <a:lstStyle/>
                     <a:p>
                       <a:pPr algn="l"/>
@@ -5693,7 +5534,7 @@
                 </a:tc>
                 <a:tc>
                   <a:txBody>
-                    <a:bodyPr wrap="square"/>
+                    <a:bodyPr/>
                     <a:lstStyle/>
                     <a:p>
                       <a:pPr algn="l"/>
@@ -5718,7 +5559,7 @@
                 </a:tc>
                 <a:tc>
                   <a:txBody>
-                    <a:bodyPr wrap="square"/>
+                    <a:bodyPr/>
                     <a:lstStyle/>
                     <a:p>
                       <a:pPr algn="l"/>
@@ -5741,11 +5582,16 @@
                     </a:solidFill>
                   </a:tcPr>
                 </a:tc>
+                <a:extLst>
+                  <a:ext uri="{0D108BD9-81ED-4DB2-BD59-A6C34878D82A}">
+                    <a16:rowId xmlns:a16="http://schemas.microsoft.com/office/drawing/2014/main" val="10004"/>
+                  </a:ext>
+                </a:extLst>
               </a:tr>
               <a:tr h="402336">
                 <a:tc>
                   <a:txBody>
-                    <a:bodyPr wrap="square"/>
+                    <a:bodyPr/>
                     <a:lstStyle/>
                     <a:p>
                       <a:pPr algn="l"/>
@@ -5770,7 +5616,7 @@
                 </a:tc>
                 <a:tc>
                   <a:txBody>
-                    <a:bodyPr wrap="square"/>
+                    <a:bodyPr/>
                     <a:lstStyle/>
                     <a:p>
                       <a:pPr algn="l"/>
@@ -5795,7 +5641,7 @@
                 </a:tc>
                 <a:tc>
                   <a:txBody>
-                    <a:bodyPr wrap="square"/>
+                    <a:bodyPr/>
                     <a:lstStyle/>
                     <a:p>
                       <a:pPr algn="l"/>
@@ -5820,7 +5666,7 @@
                 </a:tc>
                 <a:tc>
                   <a:txBody>
-                    <a:bodyPr wrap="square"/>
+                    <a:bodyPr/>
                     <a:lstStyle/>
                     <a:p>
                       <a:pPr algn="l"/>
@@ -5845,7 +5691,7 @@
                 </a:tc>
                 <a:tc>
                   <a:txBody>
-                    <a:bodyPr wrap="square"/>
+                    <a:bodyPr/>
                     <a:lstStyle/>
                     <a:p>
                       <a:pPr algn="l"/>
@@ -5868,11 +5714,16 @@
                     </a:solidFill>
                   </a:tcPr>
                 </a:tc>
+                <a:extLst>
+                  <a:ext uri="{0D108BD9-81ED-4DB2-BD59-A6C34878D82A}">
+                    <a16:rowId xmlns:a16="http://schemas.microsoft.com/office/drawing/2014/main" val="10005"/>
+                  </a:ext>
+                </a:extLst>
               </a:tr>
               <a:tr h="402336">
                 <a:tc>
                   <a:txBody>
-                    <a:bodyPr wrap="square"/>
+                    <a:bodyPr/>
                     <a:lstStyle/>
                     <a:p>
                       <a:pPr algn="l"/>
@@ -5897,7 +5748,7 @@
                 </a:tc>
                 <a:tc>
                   <a:txBody>
-                    <a:bodyPr wrap="square"/>
+                    <a:bodyPr/>
                     <a:lstStyle/>
                     <a:p>
                       <a:pPr algn="l"/>
@@ -5922,7 +5773,7 @@
                 </a:tc>
                 <a:tc>
                   <a:txBody>
-                    <a:bodyPr wrap="square"/>
+                    <a:bodyPr/>
                     <a:lstStyle/>
                     <a:p>
                       <a:pPr algn="l"/>
@@ -5947,7 +5798,7 @@
                 </a:tc>
                 <a:tc>
                   <a:txBody>
-                    <a:bodyPr wrap="square"/>
+                    <a:bodyPr/>
                     <a:lstStyle/>
                     <a:p>
                       <a:pPr algn="l"/>
@@ -5972,7 +5823,7 @@
                 </a:tc>
                 <a:tc>
                   <a:txBody>
-                    <a:bodyPr wrap="square"/>
+                    <a:bodyPr/>
                     <a:lstStyle/>
                     <a:p>
                       <a:pPr algn="l"/>
@@ -5995,11 +5846,16 @@
                     </a:solidFill>
                   </a:tcPr>
                 </a:tc>
+                <a:extLst>
+                  <a:ext uri="{0D108BD9-81ED-4DB2-BD59-A6C34878D82A}">
+                    <a16:rowId xmlns:a16="http://schemas.microsoft.com/office/drawing/2014/main" val="10006"/>
+                  </a:ext>
+                </a:extLst>
               </a:tr>
               <a:tr h="402336">
                 <a:tc>
                   <a:txBody>
-                    <a:bodyPr wrap="square"/>
+                    <a:bodyPr/>
                     <a:lstStyle/>
                     <a:p>
                       <a:pPr algn="l"/>
@@ -6024,7 +5880,7 @@
                 </a:tc>
                 <a:tc>
                   <a:txBody>
-                    <a:bodyPr wrap="square"/>
+                    <a:bodyPr/>
                     <a:lstStyle/>
                     <a:p>
                       <a:pPr algn="l"/>
@@ -6049,7 +5905,7 @@
                 </a:tc>
                 <a:tc>
                   <a:txBody>
-                    <a:bodyPr wrap="square"/>
+                    <a:bodyPr/>
                     <a:lstStyle/>
                     <a:p>
                       <a:pPr algn="l"/>
@@ -6074,7 +5930,7 @@
                 </a:tc>
                 <a:tc>
                   <a:txBody>
-                    <a:bodyPr wrap="square"/>
+                    <a:bodyPr/>
                     <a:lstStyle/>
                     <a:p>
                       <a:pPr algn="l"/>
@@ -6099,7 +5955,7 @@
                 </a:tc>
                 <a:tc>
                   <a:txBody>
-                    <a:bodyPr wrap="square"/>
+                    <a:bodyPr/>
                     <a:lstStyle/>
                     <a:p>
                       <a:pPr algn="l"/>
@@ -6122,6 +5978,11 @@
                     </a:solidFill>
                   </a:tcPr>
                 </a:tc>
+                <a:extLst>
+                  <a:ext uri="{0D108BD9-81ED-4DB2-BD59-A6C34878D82A}">
+                    <a16:rowId xmlns:a16="http://schemas.microsoft.com/office/drawing/2014/main" val="10007"/>
+                  </a:ext>
+                </a:extLst>
               </a:tr>
             </a:tbl>
           </a:graphicData>
@@ -6144,7 +6005,7 @@
           <a:noFill/>
         </p:spPr>
         <p:txBody>
-          <a:bodyPr wrap="square" anchor="t" lIns="50800" rIns="50800" tIns="25400" bIns="25400">
+          <a:bodyPr wrap="square" lIns="50800" tIns="25400" rIns="50800" bIns="25400" anchor="t">
             <a:spAutoFit/>
           </a:bodyPr>
           <a:lstStyle/>
@@ -6203,7 +6064,7 @@
           <a:noFill/>
         </p:spPr>
         <p:txBody>
-          <a:bodyPr wrap="square" anchor="t" lIns="50800" rIns="50800" tIns="25400" bIns="25400">
+          <a:bodyPr wrap="square" lIns="50800" tIns="25400" rIns="50800" bIns="25400" anchor="t">
             <a:spAutoFit/>
           </a:bodyPr>
           <a:lstStyle/>
@@ -6236,7 +6097,7 @@
 </file>
 
 <file path=ppt/slides/slide11.xml><?xml version="1.0" encoding="utf-8"?>
-<p:sld xmlns:a="http://schemas.openxmlformats.org/drawingml/2006/main" xmlns:p="http://schemas.openxmlformats.org/presentationml/2006/main" xmlns:r="http://schemas.openxmlformats.org/officeDocument/2006/relationships">
+<p:sld xmlns:a="http://schemas.openxmlformats.org/drawingml/2006/main" xmlns:r="http://schemas.openxmlformats.org/officeDocument/2006/relationships" xmlns:p="http://schemas.openxmlformats.org/presentationml/2006/main">
   <p:cSld>
     <p:spTree>
       <p:nvGrpSpPr>
@@ -6244,7 +6105,14 @@
         <p:cNvGrpSpPr/>
         <p:nvPr/>
       </p:nvGrpSpPr>
-      <p:grpSpPr/>
+      <p:grpSpPr>
+        <a:xfrm>
+          <a:off x="0" y="0"/>
+          <a:ext cx="0" cy="0"/>
+          <a:chOff x="0" y="0"/>
+          <a:chExt cx="0" cy="0"/>
+        </a:xfrm>
+      </p:grpSpPr>
       <p:sp>
         <p:nvSpPr>
           <p:cNvPr id="2" name="Rectangle 1"/>
@@ -6285,6 +6153,7 @@
           <a:lstStyle/>
           <a:p>
             <a:pPr algn="ctr"/>
+            <a:endParaRPr/>
           </a:p>
         </p:txBody>
       </p:sp>
@@ -6324,7 +6193,7 @@
           </a:fontRef>
         </p:style>
         <p:txBody>
-          <a:bodyPr rtlCol="0" anchor="ctr" wrap="none" lIns="25400" rIns="25400"/>
+          <a:bodyPr wrap="none" lIns="25400" rIns="25400" rtlCol="0" anchor="ctr"/>
           <a:lstStyle/>
           <a:p>
             <a:pPr algn="ctr"/>
@@ -6359,7 +6228,7 @@
           <a:noFill/>
         </p:spPr>
         <p:txBody>
-          <a:bodyPr wrap="square" anchor="ctr" lIns="50800" rIns="50800" tIns="25400" bIns="25400">
+          <a:bodyPr wrap="square" lIns="50800" tIns="25400" rIns="50800" bIns="25400" anchor="ctr">
             <a:spAutoFit/>
           </a:bodyPr>
           <a:lstStyle/>
@@ -6400,7 +6269,7 @@
           <a:noFill/>
         </p:spPr>
         <p:txBody>
-          <a:bodyPr wrap="square" anchor="t" lIns="50800" rIns="50800" tIns="25400" bIns="25400">
+          <a:bodyPr wrap="square" lIns="50800" tIns="25400" rIns="50800" bIns="25400" anchor="t">
             <a:spAutoFit/>
           </a:bodyPr>
           <a:lstStyle/>
@@ -6464,6 +6333,7 @@
           <a:lstStyle/>
           <a:p>
             <a:pPr algn="ctr"/>
+            <a:endParaRPr/>
           </a:p>
         </p:txBody>
       </p:sp>
@@ -6477,7 +6347,7 @@
         </p:nvGraphicFramePr>
         <p:xfrm>
           <a:off x="502920" y="1335024"/>
-          <a:ext cx="5806437" cy="1463040"/>
+          <a:ext cx="5806437" cy="1503680"/>
         </p:xfrm>
         <a:graphic>
           <a:graphicData uri="http://schemas.openxmlformats.org/drawingml/2006/table">
@@ -6486,16 +6356,46 @@
                 <a:tableStyleId>{5C22544A-7EE6-4342-B048-85BDC9FD1C3A}</a:tableStyleId>
               </a:tblPr>
               <a:tblGrid>
-                <a:gridCol w="929030"/>
-                <a:gridCol w="929030"/>
-                <a:gridCol w="1567738"/>
-                <a:gridCol w="1509674"/>
-                <a:gridCol w="870965"/>
+                <a:gridCol w="929030">
+                  <a:extLst>
+                    <a:ext uri="{9D8B030D-6E8A-4147-A177-3AD203B41FA5}">
+                      <a16:colId xmlns:a16="http://schemas.microsoft.com/office/drawing/2014/main" val="20000"/>
+                    </a:ext>
+                  </a:extLst>
+                </a:gridCol>
+                <a:gridCol w="929030">
+                  <a:extLst>
+                    <a:ext uri="{9D8B030D-6E8A-4147-A177-3AD203B41FA5}">
+                      <a16:colId xmlns:a16="http://schemas.microsoft.com/office/drawing/2014/main" val="20001"/>
+                    </a:ext>
+                  </a:extLst>
+                </a:gridCol>
+                <a:gridCol w="1567738">
+                  <a:extLst>
+                    <a:ext uri="{9D8B030D-6E8A-4147-A177-3AD203B41FA5}">
+                      <a16:colId xmlns:a16="http://schemas.microsoft.com/office/drawing/2014/main" val="20002"/>
+                    </a:ext>
+                  </a:extLst>
+                </a:gridCol>
+                <a:gridCol w="1509674">
+                  <a:extLst>
+                    <a:ext uri="{9D8B030D-6E8A-4147-A177-3AD203B41FA5}">
+                      <a16:colId xmlns:a16="http://schemas.microsoft.com/office/drawing/2014/main" val="20003"/>
+                    </a:ext>
+                  </a:extLst>
+                </a:gridCol>
+                <a:gridCol w="870965">
+                  <a:extLst>
+                    <a:ext uri="{9D8B030D-6E8A-4147-A177-3AD203B41FA5}">
+                      <a16:colId xmlns:a16="http://schemas.microsoft.com/office/drawing/2014/main" val="20004"/>
+                    </a:ext>
+                  </a:extLst>
+                </a:gridCol>
               </a:tblGrid>
               <a:tr h="365760">
                 <a:tc>
                   <a:txBody>
-                    <a:bodyPr wrap="square"/>
+                    <a:bodyPr/>
                     <a:lstStyle/>
                     <a:p>
                       <a:pPr algn="l"/>
@@ -6520,7 +6420,7 @@
                 </a:tc>
                 <a:tc>
                   <a:txBody>
-                    <a:bodyPr wrap="square"/>
+                    <a:bodyPr/>
                     <a:lstStyle/>
                     <a:p>
                       <a:pPr algn="l"/>
@@ -6545,7 +6445,7 @@
                 </a:tc>
                 <a:tc>
                   <a:txBody>
-                    <a:bodyPr wrap="square"/>
+                    <a:bodyPr/>
                     <a:lstStyle/>
                     <a:p>
                       <a:pPr algn="l"/>
@@ -6570,7 +6470,7 @@
                 </a:tc>
                 <a:tc>
                   <a:txBody>
-                    <a:bodyPr wrap="square"/>
+                    <a:bodyPr/>
                     <a:lstStyle/>
                     <a:p>
                       <a:pPr algn="l"/>
@@ -6595,7 +6495,7 @@
                 </a:tc>
                 <a:tc>
                   <a:txBody>
-                    <a:bodyPr wrap="square"/>
+                    <a:bodyPr/>
                     <a:lstStyle/>
                     <a:p>
                       <a:pPr algn="l"/>
@@ -6618,11 +6518,16 @@
                     </a:solidFill>
                   </a:tcPr>
                 </a:tc>
+                <a:extLst>
+                  <a:ext uri="{0D108BD9-81ED-4DB2-BD59-A6C34878D82A}">
+                    <a16:rowId xmlns:a16="http://schemas.microsoft.com/office/drawing/2014/main" val="10000"/>
+                  </a:ext>
+                </a:extLst>
               </a:tr>
               <a:tr h="365760">
                 <a:tc>
                   <a:txBody>
-                    <a:bodyPr wrap="square"/>
+                    <a:bodyPr/>
                     <a:lstStyle/>
                     <a:p>
                       <a:pPr algn="l"/>
@@ -6647,7 +6552,7 @@
                 </a:tc>
                 <a:tc>
                   <a:txBody>
-                    <a:bodyPr wrap="square"/>
+                    <a:bodyPr/>
                     <a:lstStyle/>
                     <a:p>
                       <a:pPr algn="l"/>
@@ -6672,7 +6577,7 @@
                 </a:tc>
                 <a:tc>
                   <a:txBody>
-                    <a:bodyPr wrap="square"/>
+                    <a:bodyPr/>
                     <a:lstStyle/>
                     <a:p>
                       <a:pPr algn="l"/>
@@ -6697,7 +6602,7 @@
                 </a:tc>
                 <a:tc>
                   <a:txBody>
-                    <a:bodyPr wrap="square"/>
+                    <a:bodyPr/>
                     <a:lstStyle/>
                     <a:p>
                       <a:pPr algn="l"/>
@@ -6722,7 +6627,7 @@
                 </a:tc>
                 <a:tc>
                   <a:txBody>
-                    <a:bodyPr wrap="square"/>
+                    <a:bodyPr/>
                     <a:lstStyle/>
                     <a:p>
                       <a:pPr algn="l"/>
@@ -6745,11 +6650,16 @@
                     </a:solidFill>
                   </a:tcPr>
                 </a:tc>
+                <a:extLst>
+                  <a:ext uri="{0D108BD9-81ED-4DB2-BD59-A6C34878D82A}">
+                    <a16:rowId xmlns:a16="http://schemas.microsoft.com/office/drawing/2014/main" val="10001"/>
+                  </a:ext>
+                </a:extLst>
               </a:tr>
               <a:tr h="365760">
                 <a:tc>
                   <a:txBody>
-                    <a:bodyPr wrap="square"/>
+                    <a:bodyPr/>
                     <a:lstStyle/>
                     <a:p>
                       <a:pPr algn="l"/>
@@ -6774,7 +6684,7 @@
                 </a:tc>
                 <a:tc>
                   <a:txBody>
-                    <a:bodyPr wrap="square"/>
+                    <a:bodyPr/>
                     <a:lstStyle/>
                     <a:p>
                       <a:pPr algn="l"/>
@@ -6799,7 +6709,7 @@
                 </a:tc>
                 <a:tc>
                   <a:txBody>
-                    <a:bodyPr wrap="square"/>
+                    <a:bodyPr/>
                     <a:lstStyle/>
                     <a:p>
                       <a:pPr algn="l"/>
@@ -6824,7 +6734,7 @@
                 </a:tc>
                 <a:tc>
                   <a:txBody>
-                    <a:bodyPr wrap="square"/>
+                    <a:bodyPr/>
                     <a:lstStyle/>
                     <a:p>
                       <a:pPr algn="l"/>
@@ -6849,7 +6759,7 @@
                 </a:tc>
                 <a:tc>
                   <a:txBody>
-                    <a:bodyPr wrap="square"/>
+                    <a:bodyPr/>
                     <a:lstStyle/>
                     <a:p>
                       <a:pPr algn="l"/>
@@ -6872,11 +6782,16 @@
                     </a:solidFill>
                   </a:tcPr>
                 </a:tc>
+                <a:extLst>
+                  <a:ext uri="{0D108BD9-81ED-4DB2-BD59-A6C34878D82A}">
+                    <a16:rowId xmlns:a16="http://schemas.microsoft.com/office/drawing/2014/main" val="10002"/>
+                  </a:ext>
+                </a:extLst>
               </a:tr>
               <a:tr h="365760">
                 <a:tc>
                   <a:txBody>
-                    <a:bodyPr wrap="square"/>
+                    <a:bodyPr/>
                     <a:lstStyle/>
                     <a:p>
                       <a:pPr algn="l"/>
@@ -6901,7 +6816,7 @@
                 </a:tc>
                 <a:tc>
                   <a:txBody>
-                    <a:bodyPr wrap="square"/>
+                    <a:bodyPr/>
                     <a:lstStyle/>
                     <a:p>
                       <a:pPr algn="l"/>
@@ -6926,7 +6841,7 @@
                 </a:tc>
                 <a:tc>
                   <a:txBody>
-                    <a:bodyPr wrap="square"/>
+                    <a:bodyPr/>
                     <a:lstStyle/>
                     <a:p>
                       <a:pPr algn="l"/>
@@ -6951,7 +6866,7 @@
                 </a:tc>
                 <a:tc>
                   <a:txBody>
-                    <a:bodyPr wrap="square"/>
+                    <a:bodyPr/>
                     <a:lstStyle/>
                     <a:p>
                       <a:pPr algn="l"/>
@@ -6976,7 +6891,7 @@
                 </a:tc>
                 <a:tc>
                   <a:txBody>
-                    <a:bodyPr wrap="square"/>
+                    <a:bodyPr/>
                     <a:lstStyle/>
                     <a:p>
                       <a:pPr algn="l"/>
@@ -6999,6 +6914,11 @@
                     </a:solidFill>
                   </a:tcPr>
                 </a:tc>
+                <a:extLst>
+                  <a:ext uri="{0D108BD9-81ED-4DB2-BD59-A6C34878D82A}">
+                    <a16:rowId xmlns:a16="http://schemas.microsoft.com/office/drawing/2014/main" val="10003"/>
+                  </a:ext>
+                </a:extLst>
               </a:tr>
             </a:tbl>
           </a:graphicData>
@@ -7021,7 +6941,7 @@
           <a:noFill/>
         </p:spPr>
         <p:txBody>
-          <a:bodyPr wrap="square" anchor="t" lIns="50800" rIns="50800" tIns="25400" bIns="25400">
+          <a:bodyPr wrap="square" lIns="50800" tIns="25400" rIns="50800" bIns="25400" anchor="t">
             <a:spAutoFit/>
           </a:bodyPr>
           <a:lstStyle/>
@@ -7108,7 +7028,7 @@
           <p:nvPr/>
         </p:nvPicPr>
         <p:blipFill>
-          <a:blip r:embed="rId2"/>
+          <a:blip r:embed="rId3"/>
           <a:stretch>
             <a:fillRect/>
           </a:stretch>
@@ -7140,7 +7060,7 @@
           <a:noFill/>
         </p:spPr>
         <p:txBody>
-          <a:bodyPr wrap="square" anchor="t" lIns="50800" rIns="50800" tIns="25400" bIns="25400">
+          <a:bodyPr wrap="square" lIns="50800" tIns="25400" rIns="50800" bIns="25400" anchor="t">
             <a:spAutoFit/>
           </a:bodyPr>
           <a:lstStyle/>
@@ -7173,7 +7093,7 @@
 </file>
 
 <file path=ppt/slides/slide12.xml><?xml version="1.0" encoding="utf-8"?>
-<p:sld xmlns:a="http://schemas.openxmlformats.org/drawingml/2006/main" xmlns:p="http://schemas.openxmlformats.org/presentationml/2006/main" xmlns:r="http://schemas.openxmlformats.org/officeDocument/2006/relationships">
+<p:sld xmlns:a="http://schemas.openxmlformats.org/drawingml/2006/main" xmlns:r="http://schemas.openxmlformats.org/officeDocument/2006/relationships" xmlns:p="http://schemas.openxmlformats.org/presentationml/2006/main">
   <p:cSld>
     <p:spTree>
       <p:nvGrpSpPr>
@@ -7181,7 +7101,14 @@
         <p:cNvGrpSpPr/>
         <p:nvPr/>
       </p:nvGrpSpPr>
-      <p:grpSpPr/>
+      <p:grpSpPr>
+        <a:xfrm>
+          <a:off x="0" y="0"/>
+          <a:ext cx="0" cy="0"/>
+          <a:chOff x="0" y="0"/>
+          <a:chExt cx="0" cy="0"/>
+        </a:xfrm>
+      </p:grpSpPr>
       <p:sp>
         <p:nvSpPr>
           <p:cNvPr id="2" name="Rectangle 1"/>
@@ -7222,6 +7149,7 @@
           <a:lstStyle/>
           <a:p>
             <a:pPr algn="ctr"/>
+            <a:endParaRPr/>
           </a:p>
         </p:txBody>
       </p:sp>
@@ -7261,7 +7189,7 @@
           </a:fontRef>
         </p:style>
         <p:txBody>
-          <a:bodyPr rtlCol="0" anchor="ctr" wrap="none" lIns="25400" rIns="25400"/>
+          <a:bodyPr wrap="none" lIns="25400" rIns="25400" rtlCol="0" anchor="ctr"/>
           <a:lstStyle/>
           <a:p>
             <a:pPr algn="ctr"/>
@@ -7296,7 +7224,7 @@
           <a:noFill/>
         </p:spPr>
         <p:txBody>
-          <a:bodyPr wrap="square" anchor="ctr" lIns="50800" rIns="50800" tIns="25400" bIns="25400">
+          <a:bodyPr wrap="square" lIns="50800" tIns="25400" rIns="50800" bIns="25400" anchor="ctr">
             <a:spAutoFit/>
           </a:bodyPr>
           <a:lstStyle/>
@@ -7337,7 +7265,7 @@
           <a:noFill/>
         </p:spPr>
         <p:txBody>
-          <a:bodyPr wrap="square" anchor="t" lIns="50800" rIns="50800" tIns="25400" bIns="25400">
+          <a:bodyPr wrap="square" lIns="50800" tIns="25400" rIns="50800" bIns="25400" anchor="t">
             <a:spAutoFit/>
           </a:bodyPr>
           <a:lstStyle/>
@@ -7401,6 +7329,7 @@
           <a:lstStyle/>
           <a:p>
             <a:pPr algn="ctr"/>
+            <a:endParaRPr/>
           </a:p>
         </p:txBody>
       </p:sp>
@@ -7423,17 +7352,53 @@
                 <a:tableStyleId>{5C22544A-7EE6-4342-B048-85BDC9FD1C3A}</a:tableStyleId>
               </a:tblPr>
               <a:tblGrid>
-                <a:gridCol w="1004011"/>
-                <a:gridCol w="1004011"/>
-                <a:gridCol w="2231136"/>
-                <a:gridCol w="2231136"/>
-                <a:gridCol w="2342692"/>
-                <a:gridCol w="1227124"/>
+                <a:gridCol w="1004011">
+                  <a:extLst>
+                    <a:ext uri="{9D8B030D-6E8A-4147-A177-3AD203B41FA5}">
+                      <a16:colId xmlns:a16="http://schemas.microsoft.com/office/drawing/2014/main" val="20000"/>
+                    </a:ext>
+                  </a:extLst>
+                </a:gridCol>
+                <a:gridCol w="1004011">
+                  <a:extLst>
+                    <a:ext uri="{9D8B030D-6E8A-4147-A177-3AD203B41FA5}">
+                      <a16:colId xmlns:a16="http://schemas.microsoft.com/office/drawing/2014/main" val="20001"/>
+                    </a:ext>
+                  </a:extLst>
+                </a:gridCol>
+                <a:gridCol w="2231136">
+                  <a:extLst>
+                    <a:ext uri="{9D8B030D-6E8A-4147-A177-3AD203B41FA5}">
+                      <a16:colId xmlns:a16="http://schemas.microsoft.com/office/drawing/2014/main" val="20002"/>
+                    </a:ext>
+                  </a:extLst>
+                </a:gridCol>
+                <a:gridCol w="2231136">
+                  <a:extLst>
+                    <a:ext uri="{9D8B030D-6E8A-4147-A177-3AD203B41FA5}">
+                      <a16:colId xmlns:a16="http://schemas.microsoft.com/office/drawing/2014/main" val="20003"/>
+                    </a:ext>
+                  </a:extLst>
+                </a:gridCol>
+                <a:gridCol w="2342692">
+                  <a:extLst>
+                    <a:ext uri="{9D8B030D-6E8A-4147-A177-3AD203B41FA5}">
+                      <a16:colId xmlns:a16="http://schemas.microsoft.com/office/drawing/2014/main" val="20004"/>
+                    </a:ext>
+                  </a:extLst>
+                </a:gridCol>
+                <a:gridCol w="1227124">
+                  <a:extLst>
+                    <a:ext uri="{9D8B030D-6E8A-4147-A177-3AD203B41FA5}">
+                      <a16:colId xmlns:a16="http://schemas.microsoft.com/office/drawing/2014/main" val="20005"/>
+                    </a:ext>
+                  </a:extLst>
+                </a:gridCol>
               </a:tblGrid>
               <a:tr h="384048">
                 <a:tc>
                   <a:txBody>
-                    <a:bodyPr wrap="square"/>
+                    <a:bodyPr/>
                     <a:lstStyle/>
                     <a:p>
                       <a:pPr algn="l"/>
@@ -7458,7 +7423,7 @@
                 </a:tc>
                 <a:tc>
                   <a:txBody>
-                    <a:bodyPr wrap="square"/>
+                    <a:bodyPr/>
                     <a:lstStyle/>
                     <a:p>
                       <a:pPr algn="l"/>
@@ -7483,7 +7448,7 @@
                 </a:tc>
                 <a:tc>
                   <a:txBody>
-                    <a:bodyPr wrap="square"/>
+                    <a:bodyPr/>
                     <a:lstStyle/>
                     <a:p>
                       <a:pPr algn="l"/>
@@ -7508,7 +7473,7 @@
                 </a:tc>
                 <a:tc>
                   <a:txBody>
-                    <a:bodyPr wrap="square"/>
+                    <a:bodyPr/>
                     <a:lstStyle/>
                     <a:p>
                       <a:pPr algn="l"/>
@@ -7533,7 +7498,7 @@
                 </a:tc>
                 <a:tc>
                   <a:txBody>
-                    <a:bodyPr wrap="square"/>
+                    <a:bodyPr/>
                     <a:lstStyle/>
                     <a:p>
                       <a:pPr algn="l"/>
@@ -7558,7 +7523,7 @@
                 </a:tc>
                 <a:tc>
                   <a:txBody>
-                    <a:bodyPr wrap="square"/>
+                    <a:bodyPr/>
                     <a:lstStyle/>
                     <a:p>
                       <a:pPr algn="l"/>
@@ -7581,11 +7546,16 @@
                     </a:solidFill>
                   </a:tcPr>
                 </a:tc>
+                <a:extLst>
+                  <a:ext uri="{0D108BD9-81ED-4DB2-BD59-A6C34878D82A}">
+                    <a16:rowId xmlns:a16="http://schemas.microsoft.com/office/drawing/2014/main" val="10000"/>
+                  </a:ext>
+                </a:extLst>
               </a:tr>
               <a:tr h="384048">
                 <a:tc>
                   <a:txBody>
-                    <a:bodyPr wrap="square"/>
+                    <a:bodyPr/>
                     <a:lstStyle/>
                     <a:p>
                       <a:pPr algn="l"/>
@@ -7610,7 +7580,7 @@
                 </a:tc>
                 <a:tc>
                   <a:txBody>
-                    <a:bodyPr wrap="square"/>
+                    <a:bodyPr/>
                     <a:lstStyle/>
                     <a:p>
                       <a:pPr algn="l"/>
@@ -7635,7 +7605,7 @@
                 </a:tc>
                 <a:tc>
                   <a:txBody>
-                    <a:bodyPr wrap="square"/>
+                    <a:bodyPr/>
                     <a:lstStyle/>
                     <a:p>
                       <a:pPr algn="l"/>
@@ -7660,7 +7630,7 @@
                 </a:tc>
                 <a:tc>
                   <a:txBody>
-                    <a:bodyPr wrap="square"/>
+                    <a:bodyPr/>
                     <a:lstStyle/>
                     <a:p>
                       <a:pPr algn="l"/>
@@ -7685,7 +7655,7 @@
                 </a:tc>
                 <a:tc>
                   <a:txBody>
-                    <a:bodyPr wrap="square"/>
+                    <a:bodyPr/>
                     <a:lstStyle/>
                     <a:p>
                       <a:pPr algn="l"/>
@@ -7710,7 +7680,7 @@
                 </a:tc>
                 <a:tc>
                   <a:txBody>
-                    <a:bodyPr wrap="square"/>
+                    <a:bodyPr/>
                     <a:lstStyle/>
                     <a:p>
                       <a:pPr algn="l"/>
@@ -7733,11 +7703,16 @@
                     </a:solidFill>
                   </a:tcPr>
                 </a:tc>
+                <a:extLst>
+                  <a:ext uri="{0D108BD9-81ED-4DB2-BD59-A6C34878D82A}">
+                    <a16:rowId xmlns:a16="http://schemas.microsoft.com/office/drawing/2014/main" val="10001"/>
+                  </a:ext>
+                </a:extLst>
               </a:tr>
               <a:tr h="384048">
                 <a:tc>
                   <a:txBody>
-                    <a:bodyPr wrap="square"/>
+                    <a:bodyPr/>
                     <a:lstStyle/>
                     <a:p>
                       <a:pPr algn="l"/>
@@ -7762,7 +7737,7 @@
                 </a:tc>
                 <a:tc>
                   <a:txBody>
-                    <a:bodyPr wrap="square"/>
+                    <a:bodyPr/>
                     <a:lstStyle/>
                     <a:p>
                       <a:pPr algn="l"/>
@@ -7787,7 +7762,7 @@
                 </a:tc>
                 <a:tc>
                   <a:txBody>
-                    <a:bodyPr wrap="square"/>
+                    <a:bodyPr/>
                     <a:lstStyle/>
                     <a:p>
                       <a:pPr algn="l"/>
@@ -7812,7 +7787,7 @@
                 </a:tc>
                 <a:tc>
                   <a:txBody>
-                    <a:bodyPr wrap="square"/>
+                    <a:bodyPr/>
                     <a:lstStyle/>
                     <a:p>
                       <a:pPr algn="l"/>
@@ -7837,7 +7812,7 @@
                 </a:tc>
                 <a:tc>
                   <a:txBody>
-                    <a:bodyPr wrap="square"/>
+                    <a:bodyPr/>
                     <a:lstStyle/>
                     <a:p>
                       <a:pPr algn="l"/>
@@ -7862,7 +7837,7 @@
                 </a:tc>
                 <a:tc>
                   <a:txBody>
-                    <a:bodyPr wrap="square"/>
+                    <a:bodyPr/>
                     <a:lstStyle/>
                     <a:p>
                       <a:pPr algn="l"/>
@@ -7885,11 +7860,16 @@
                     </a:solidFill>
                   </a:tcPr>
                 </a:tc>
+                <a:extLst>
+                  <a:ext uri="{0D108BD9-81ED-4DB2-BD59-A6C34878D82A}">
+                    <a16:rowId xmlns:a16="http://schemas.microsoft.com/office/drawing/2014/main" val="10002"/>
+                  </a:ext>
+                </a:extLst>
               </a:tr>
               <a:tr h="384048">
                 <a:tc>
                   <a:txBody>
-                    <a:bodyPr wrap="square"/>
+                    <a:bodyPr/>
                     <a:lstStyle/>
                     <a:p>
                       <a:pPr algn="l"/>
@@ -7914,7 +7894,7 @@
                 </a:tc>
                 <a:tc>
                   <a:txBody>
-                    <a:bodyPr wrap="square"/>
+                    <a:bodyPr/>
                     <a:lstStyle/>
                     <a:p>
                       <a:pPr algn="l"/>
@@ -7939,7 +7919,7 @@
                 </a:tc>
                 <a:tc>
                   <a:txBody>
-                    <a:bodyPr wrap="square"/>
+                    <a:bodyPr/>
                     <a:lstStyle/>
                     <a:p>
                       <a:pPr algn="l"/>
@@ -7964,7 +7944,7 @@
                 </a:tc>
                 <a:tc>
                   <a:txBody>
-                    <a:bodyPr wrap="square"/>
+                    <a:bodyPr/>
                     <a:lstStyle/>
                     <a:p>
                       <a:pPr algn="l"/>
@@ -7989,7 +7969,7 @@
                 </a:tc>
                 <a:tc>
                   <a:txBody>
-                    <a:bodyPr wrap="square"/>
+                    <a:bodyPr/>
                     <a:lstStyle/>
                     <a:p>
                       <a:pPr algn="l"/>
@@ -8014,7 +7994,7 @@
                 </a:tc>
                 <a:tc>
                   <a:txBody>
-                    <a:bodyPr wrap="square"/>
+                    <a:bodyPr/>
                     <a:lstStyle/>
                     <a:p>
                       <a:pPr algn="l"/>
@@ -8037,6 +8017,11 @@
                     </a:solidFill>
                   </a:tcPr>
                 </a:tc>
+                <a:extLst>
+                  <a:ext uri="{0D108BD9-81ED-4DB2-BD59-A6C34878D82A}">
+                    <a16:rowId xmlns:a16="http://schemas.microsoft.com/office/drawing/2014/main" val="10003"/>
+                  </a:ext>
+                </a:extLst>
               </a:tr>
             </a:tbl>
           </a:graphicData>
@@ -8059,7 +8044,7 @@
           <a:noFill/>
         </p:spPr>
         <p:txBody>
-          <a:bodyPr wrap="square" anchor="t" lIns="50800" rIns="50800" tIns="25400" bIns="25400">
+          <a:bodyPr wrap="square" lIns="50800" tIns="25400" rIns="50800" bIns="25400" anchor="t">
             <a:spAutoFit/>
           </a:bodyPr>
           <a:lstStyle/>
@@ -8146,7 +8131,7 @@
           <p:nvPr/>
         </p:nvPicPr>
         <p:blipFill>
-          <a:blip r:embed="rId2"/>
+          <a:blip r:embed="rId3"/>
           <a:stretch>
             <a:fillRect/>
           </a:stretch>
@@ -8178,7 +8163,7 @@
           <a:noFill/>
         </p:spPr>
         <p:txBody>
-          <a:bodyPr wrap="square" anchor="t" lIns="50800" rIns="50800" tIns="25400" bIns="25400">
+          <a:bodyPr wrap="square" lIns="50800" tIns="25400" rIns="50800" bIns="25400" anchor="t">
             <a:spAutoFit/>
           </a:bodyPr>
           <a:lstStyle/>
@@ -8211,7 +8196,7 @@
 </file>
 
 <file path=ppt/slides/slide13.xml><?xml version="1.0" encoding="utf-8"?>
-<p:sld xmlns:a="http://schemas.openxmlformats.org/drawingml/2006/main" xmlns:p="http://schemas.openxmlformats.org/presentationml/2006/main" xmlns:r="http://schemas.openxmlformats.org/officeDocument/2006/relationships">
+<p:sld xmlns:a="http://schemas.openxmlformats.org/drawingml/2006/main" xmlns:r="http://schemas.openxmlformats.org/officeDocument/2006/relationships" xmlns:p="http://schemas.openxmlformats.org/presentationml/2006/main">
   <p:cSld>
     <p:spTree>
       <p:nvGrpSpPr>
@@ -8219,7 +8204,14 @@
         <p:cNvGrpSpPr/>
         <p:nvPr/>
       </p:nvGrpSpPr>
-      <p:grpSpPr/>
+      <p:grpSpPr>
+        <a:xfrm>
+          <a:off x="0" y="0"/>
+          <a:ext cx="0" cy="0"/>
+          <a:chOff x="0" y="0"/>
+          <a:chExt cx="0" cy="0"/>
+        </a:xfrm>
+      </p:grpSpPr>
       <p:sp>
         <p:nvSpPr>
           <p:cNvPr id="2" name="Rectangle 1"/>
@@ -8260,6 +8252,7 @@
           <a:lstStyle/>
           <a:p>
             <a:pPr algn="ctr"/>
+            <a:endParaRPr/>
           </a:p>
         </p:txBody>
       </p:sp>
@@ -8299,7 +8292,7 @@
           </a:fontRef>
         </p:style>
         <p:txBody>
-          <a:bodyPr rtlCol="0" anchor="ctr" wrap="none" lIns="25400" rIns="25400"/>
+          <a:bodyPr wrap="none" lIns="25400" rIns="25400" rtlCol="0" anchor="ctr"/>
           <a:lstStyle/>
           <a:p>
             <a:pPr algn="ctr"/>
@@ -8334,7 +8327,7 @@
           <a:noFill/>
         </p:spPr>
         <p:txBody>
-          <a:bodyPr wrap="square" anchor="ctr" lIns="50800" rIns="50800" tIns="25400" bIns="25400">
+          <a:bodyPr wrap="square" lIns="50800" tIns="25400" rIns="50800" bIns="25400" anchor="ctr">
             <a:spAutoFit/>
           </a:bodyPr>
           <a:lstStyle/>
@@ -8398,6 +8391,7 @@
           <a:lstStyle/>
           <a:p>
             <a:pPr algn="ctr"/>
+            <a:endParaRPr/>
           </a:p>
         </p:txBody>
       </p:sp>
@@ -8420,16 +8414,46 @@
                 <a:tableStyleId>{5C22544A-7EE6-4342-B048-85BDC9FD1C3A}</a:tableStyleId>
               </a:tblPr>
               <a:tblGrid>
-                <a:gridCol w="1673351"/>
-                <a:gridCol w="2454249"/>
-                <a:gridCol w="2008022"/>
-                <a:gridCol w="1673351"/>
-                <a:gridCol w="3346703"/>
+                <a:gridCol w="1673351">
+                  <a:extLst>
+                    <a:ext uri="{9D8B030D-6E8A-4147-A177-3AD203B41FA5}">
+                      <a16:colId xmlns:a16="http://schemas.microsoft.com/office/drawing/2014/main" val="20000"/>
+                    </a:ext>
+                  </a:extLst>
+                </a:gridCol>
+                <a:gridCol w="2454249">
+                  <a:extLst>
+                    <a:ext uri="{9D8B030D-6E8A-4147-A177-3AD203B41FA5}">
+                      <a16:colId xmlns:a16="http://schemas.microsoft.com/office/drawing/2014/main" val="20001"/>
+                    </a:ext>
+                  </a:extLst>
+                </a:gridCol>
+                <a:gridCol w="2008022">
+                  <a:extLst>
+                    <a:ext uri="{9D8B030D-6E8A-4147-A177-3AD203B41FA5}">
+                      <a16:colId xmlns:a16="http://schemas.microsoft.com/office/drawing/2014/main" val="20002"/>
+                    </a:ext>
+                  </a:extLst>
+                </a:gridCol>
+                <a:gridCol w="1673351">
+                  <a:extLst>
+                    <a:ext uri="{9D8B030D-6E8A-4147-A177-3AD203B41FA5}">
+                      <a16:colId xmlns:a16="http://schemas.microsoft.com/office/drawing/2014/main" val="20003"/>
+                    </a:ext>
+                  </a:extLst>
+                </a:gridCol>
+                <a:gridCol w="3346703">
+                  <a:extLst>
+                    <a:ext uri="{9D8B030D-6E8A-4147-A177-3AD203B41FA5}">
+                      <a16:colId xmlns:a16="http://schemas.microsoft.com/office/drawing/2014/main" val="20004"/>
+                    </a:ext>
+                  </a:extLst>
+                </a:gridCol>
               </a:tblGrid>
               <a:tr h="384048">
                 <a:tc>
                   <a:txBody>
-                    <a:bodyPr wrap="square"/>
+                    <a:bodyPr/>
                     <a:lstStyle/>
                     <a:p>
                       <a:pPr algn="l"/>
@@ -8454,7 +8478,7 @@
                 </a:tc>
                 <a:tc>
                   <a:txBody>
-                    <a:bodyPr wrap="square"/>
+                    <a:bodyPr/>
                     <a:lstStyle/>
                     <a:p>
                       <a:pPr algn="l"/>
@@ -8479,7 +8503,7 @@
                 </a:tc>
                 <a:tc>
                   <a:txBody>
-                    <a:bodyPr wrap="square"/>
+                    <a:bodyPr/>
                     <a:lstStyle/>
                     <a:p>
                       <a:pPr algn="l"/>
@@ -8504,7 +8528,7 @@
                 </a:tc>
                 <a:tc>
                   <a:txBody>
-                    <a:bodyPr wrap="square"/>
+                    <a:bodyPr/>
                     <a:lstStyle/>
                     <a:p>
                       <a:pPr algn="l"/>
@@ -8529,7 +8553,7 @@
                 </a:tc>
                 <a:tc>
                   <a:txBody>
-                    <a:bodyPr wrap="square"/>
+                    <a:bodyPr/>
                     <a:lstStyle/>
                     <a:p>
                       <a:pPr algn="l"/>
@@ -8552,11 +8576,16 @@
                     </a:solidFill>
                   </a:tcPr>
                 </a:tc>
+                <a:extLst>
+                  <a:ext uri="{0D108BD9-81ED-4DB2-BD59-A6C34878D82A}">
+                    <a16:rowId xmlns:a16="http://schemas.microsoft.com/office/drawing/2014/main" val="10000"/>
+                  </a:ext>
+                </a:extLst>
               </a:tr>
               <a:tr h="384048">
                 <a:tc>
                   <a:txBody>
-                    <a:bodyPr wrap="square"/>
+                    <a:bodyPr/>
                     <a:lstStyle/>
                     <a:p>
                       <a:pPr algn="l"/>
@@ -8581,7 +8610,7 @@
                 </a:tc>
                 <a:tc>
                   <a:txBody>
-                    <a:bodyPr wrap="square"/>
+                    <a:bodyPr/>
                     <a:lstStyle/>
                     <a:p>
                       <a:pPr algn="l"/>
@@ -8606,7 +8635,7 @@
                 </a:tc>
                 <a:tc>
                   <a:txBody>
-                    <a:bodyPr wrap="square"/>
+                    <a:bodyPr/>
                     <a:lstStyle/>
                     <a:p>
                       <a:pPr algn="l"/>
@@ -8631,7 +8660,7 @@
                 </a:tc>
                 <a:tc>
                   <a:txBody>
-                    <a:bodyPr wrap="square"/>
+                    <a:bodyPr/>
                     <a:lstStyle/>
                     <a:p>
                       <a:pPr algn="l"/>
@@ -8656,7 +8685,7 @@
                 </a:tc>
                 <a:tc>
                   <a:txBody>
-                    <a:bodyPr wrap="square"/>
+                    <a:bodyPr/>
                     <a:lstStyle/>
                     <a:p>
                       <a:pPr algn="l"/>
@@ -8679,11 +8708,16 @@
                     </a:solidFill>
                   </a:tcPr>
                 </a:tc>
+                <a:extLst>
+                  <a:ext uri="{0D108BD9-81ED-4DB2-BD59-A6C34878D82A}">
+                    <a16:rowId xmlns:a16="http://schemas.microsoft.com/office/drawing/2014/main" val="10001"/>
+                  </a:ext>
+                </a:extLst>
               </a:tr>
               <a:tr h="384048">
                 <a:tc>
                   <a:txBody>
-                    <a:bodyPr wrap="square"/>
+                    <a:bodyPr/>
                     <a:lstStyle/>
                     <a:p>
                       <a:pPr algn="l"/>
@@ -8708,7 +8742,7 @@
                 </a:tc>
                 <a:tc>
                   <a:txBody>
-                    <a:bodyPr wrap="square"/>
+                    <a:bodyPr/>
                     <a:lstStyle/>
                     <a:p>
                       <a:pPr algn="l"/>
@@ -8733,7 +8767,7 @@
                 </a:tc>
                 <a:tc>
                   <a:txBody>
-                    <a:bodyPr wrap="square"/>
+                    <a:bodyPr/>
                     <a:lstStyle/>
                     <a:p>
                       <a:pPr algn="l"/>
@@ -8758,7 +8792,7 @@
                 </a:tc>
                 <a:tc>
                   <a:txBody>
-                    <a:bodyPr wrap="square"/>
+                    <a:bodyPr/>
                     <a:lstStyle/>
                     <a:p>
                       <a:pPr algn="l"/>
@@ -8783,7 +8817,7 @@
                 </a:tc>
                 <a:tc>
                   <a:txBody>
-                    <a:bodyPr wrap="square"/>
+                    <a:bodyPr/>
                     <a:lstStyle/>
                     <a:p>
                       <a:pPr algn="l"/>
@@ -8806,6 +8840,11 @@
                     </a:solidFill>
                   </a:tcPr>
                 </a:tc>
+                <a:extLst>
+                  <a:ext uri="{0D108BD9-81ED-4DB2-BD59-A6C34878D82A}">
+                    <a16:rowId xmlns:a16="http://schemas.microsoft.com/office/drawing/2014/main" val="10002"/>
+                  </a:ext>
+                </a:extLst>
               </a:tr>
             </a:tbl>
           </a:graphicData>
@@ -8828,7 +8867,7 @@
           <a:noFill/>
         </p:spPr>
         <p:txBody>
-          <a:bodyPr wrap="square" anchor="t" lIns="50800" rIns="50800" tIns="25400" bIns="25400">
+          <a:bodyPr wrap="square" lIns="50800" tIns="25400" rIns="50800" bIns="25400" anchor="t">
             <a:spAutoFit/>
           </a:bodyPr>
           <a:lstStyle/>
@@ -8851,7 +8890,7 @@
             </a:r>
           </a:p>
           <a:p>
-            <a:pPr algn="l" lvl="1">
+            <a:pPr lvl="1" algn="l">
               <a:spcAft>
                 <a:spcPts val="300"/>
               </a:spcAft>
@@ -8887,7 +8926,7 @@
             </a:r>
           </a:p>
           <a:p>
-            <a:pPr algn="l" lvl="1">
+            <a:pPr lvl="1" algn="l">
               <a:spcAft>
                 <a:spcPts val="300"/>
               </a:spcAft>
@@ -8905,7 +8944,7 @@
             </a:r>
           </a:p>
           <a:p>
-            <a:pPr algn="l" lvl="1">
+            <a:pPr lvl="1" algn="l">
               <a:spcAft>
                 <a:spcPts val="300"/>
               </a:spcAft>
@@ -8941,7 +8980,7 @@
             </a:r>
           </a:p>
           <a:p>
-            <a:pPr algn="l" lvl="1">
+            <a:pPr lvl="1" algn="l">
               <a:spcAft>
                 <a:spcPts val="300"/>
               </a:spcAft>
@@ -8959,7 +8998,7 @@
             </a:r>
           </a:p>
           <a:p>
-            <a:pPr algn="l" lvl="1">
+            <a:pPr lvl="1" algn="l">
               <a:spcAft>
                 <a:spcPts val="300"/>
               </a:spcAft>
@@ -8995,7 +9034,7 @@
           <a:noFill/>
         </p:spPr>
         <p:txBody>
-          <a:bodyPr wrap="square" anchor="t" lIns="50800" rIns="50800" tIns="25400" bIns="25400">
+          <a:bodyPr wrap="square" lIns="50800" tIns="25400" rIns="50800" bIns="25400" anchor="t">
             <a:spAutoFit/>
           </a:bodyPr>
           <a:lstStyle/>
@@ -9108,7 +9147,7 @@
           <a:noFill/>
         </p:spPr>
         <p:txBody>
-          <a:bodyPr wrap="square" anchor="t" lIns="50800" rIns="50800" tIns="25400" bIns="25400">
+          <a:bodyPr wrap="square" lIns="50800" tIns="25400" rIns="50800" bIns="25400" anchor="t">
             <a:spAutoFit/>
           </a:bodyPr>
           <a:lstStyle/>
@@ -9141,7 +9180,7 @@
 </file>
 
 <file path=ppt/slides/slide14.xml><?xml version="1.0" encoding="utf-8"?>
-<p:sld xmlns:a="http://schemas.openxmlformats.org/drawingml/2006/main" xmlns:p="http://schemas.openxmlformats.org/presentationml/2006/main" xmlns:r="http://schemas.openxmlformats.org/officeDocument/2006/relationships">
+<p:sld xmlns:a="http://schemas.openxmlformats.org/drawingml/2006/main" xmlns:r="http://schemas.openxmlformats.org/officeDocument/2006/relationships" xmlns:p="http://schemas.openxmlformats.org/presentationml/2006/main">
   <p:cSld>
     <p:spTree>
       <p:nvGrpSpPr>
@@ -9149,7 +9188,14 @@
         <p:cNvGrpSpPr/>
         <p:nvPr/>
       </p:nvGrpSpPr>
-      <p:grpSpPr/>
+      <p:grpSpPr>
+        <a:xfrm>
+          <a:off x="0" y="0"/>
+          <a:ext cx="0" cy="0"/>
+          <a:chOff x="0" y="0"/>
+          <a:chExt cx="0" cy="0"/>
+        </a:xfrm>
+      </p:grpSpPr>
       <p:sp>
         <p:nvSpPr>
           <p:cNvPr id="2" name="Rectangle 1"/>
@@ -9190,6 +9236,7 @@
           <a:lstStyle/>
           <a:p>
             <a:pPr algn="ctr"/>
+            <a:endParaRPr/>
           </a:p>
         </p:txBody>
       </p:sp>
@@ -9229,21 +9276,18 @@
           </a:fontRef>
         </p:style>
         <p:txBody>
-          <a:bodyPr rtlCol="0" anchor="ctr" wrap="none" lIns="25400" rIns="25400"/>
+          <a:bodyPr wrap="none" lIns="25400" rIns="25400" rtlCol="0" anchor="ctr"/>
           <a:lstStyle/>
           <a:p>
             <a:pPr algn="ctr"/>
-            <a:r>
-              <a:rPr sz="1250" b="1">
-                <a:solidFill>
-                  <a:srgbClr val="FFFFFF"/>
-                </a:solidFill>
-                <a:latin typeface="Microsoft YaHei"/>
-                <a:ea typeface="Microsoft YaHei"/>
-                <a:cs typeface="Microsoft YaHei"/>
-              </a:rPr>
-              <a:t>系统与技术指标 · 成员 A</a:t>
-            </a:r>
+            <a:endParaRPr sz="1250" b="1" dirty="0">
+              <a:solidFill>
+                <a:srgbClr val="FFFFFF"/>
+              </a:solidFill>
+              <a:latin typeface="Microsoft YaHei"/>
+              <a:ea typeface="Microsoft YaHei"/>
+              <a:cs typeface="Microsoft YaHei"/>
+            </a:endParaRPr>
           </a:p>
         </p:txBody>
       </p:sp>
@@ -9264,7 +9308,7 @@
           <a:noFill/>
         </p:spPr>
         <p:txBody>
-          <a:bodyPr wrap="square" anchor="ctr" lIns="50800" rIns="50800" tIns="25400" bIns="25400">
+          <a:bodyPr wrap="square" lIns="50800" tIns="25400" rIns="50800" bIns="25400" anchor="ctr">
             <a:spAutoFit/>
           </a:bodyPr>
           <a:lstStyle/>
@@ -9328,6 +9372,7 @@
           <a:lstStyle/>
           <a:p>
             <a:pPr algn="ctr"/>
+            <a:endParaRPr/>
           </a:p>
         </p:txBody>
       </p:sp>
@@ -9348,7 +9393,7 @@
           <a:noFill/>
         </p:spPr>
         <p:txBody>
-          <a:bodyPr wrap="square" anchor="t" lIns="50800" rIns="50800" tIns="25400" bIns="25400">
+          <a:bodyPr wrap="square" lIns="50800" tIns="25400" rIns="50800" bIns="25400" anchor="t">
             <a:spAutoFit/>
           </a:bodyPr>
           <a:lstStyle/>
@@ -9497,7 +9542,7 @@
           <a:noFill/>
         </p:spPr>
         <p:txBody>
-          <a:bodyPr wrap="square" anchor="t" lIns="50800" rIns="50800" tIns="25400" bIns="25400">
+          <a:bodyPr wrap="square" lIns="50800" tIns="25400" rIns="50800" bIns="25400" anchor="t">
             <a:spAutoFit/>
           </a:bodyPr>
           <a:lstStyle/>
@@ -9718,7 +9763,7 @@
           <a:noFill/>
         </p:spPr>
         <p:txBody>
-          <a:bodyPr wrap="square" anchor="t" lIns="50800" rIns="50800" tIns="25400" bIns="25400">
+          <a:bodyPr wrap="square" lIns="50800" tIns="25400" rIns="50800" bIns="25400" anchor="t">
             <a:spAutoFit/>
           </a:bodyPr>
           <a:lstStyle/>
@@ -9751,7 +9796,7 @@
 </file>
 
 <file path=ppt/slides/slide15.xml><?xml version="1.0" encoding="utf-8"?>
-<p:sld xmlns:a="http://schemas.openxmlformats.org/drawingml/2006/main" xmlns:p="http://schemas.openxmlformats.org/presentationml/2006/main" xmlns:r="http://schemas.openxmlformats.org/officeDocument/2006/relationships">
+<p:sld xmlns:a="http://schemas.openxmlformats.org/drawingml/2006/main" xmlns:r="http://schemas.openxmlformats.org/officeDocument/2006/relationships" xmlns:p="http://schemas.openxmlformats.org/presentationml/2006/main">
   <p:cSld>
     <p:spTree>
       <p:nvGrpSpPr>
@@ -9759,7 +9804,14 @@
         <p:cNvGrpSpPr/>
         <p:nvPr/>
       </p:nvGrpSpPr>
-      <p:grpSpPr/>
+      <p:grpSpPr>
+        <a:xfrm>
+          <a:off x="0" y="0"/>
+          <a:ext cx="0" cy="0"/>
+          <a:chOff x="0" y="0"/>
+          <a:chExt cx="0" cy="0"/>
+        </a:xfrm>
+      </p:grpSpPr>
       <p:sp>
         <p:nvSpPr>
           <p:cNvPr id="2" name="Rectangle 1"/>
@@ -9800,6 +9852,7 @@
           <a:lstStyle/>
           <a:p>
             <a:pPr algn="ctr"/>
+            <a:endParaRPr/>
           </a:p>
         </p:txBody>
       </p:sp>
@@ -9820,7 +9873,7 @@
           <a:noFill/>
         </p:spPr>
         <p:txBody>
-          <a:bodyPr wrap="square" anchor="t" lIns="50800" rIns="50800" tIns="25400" bIns="25400">
+          <a:bodyPr wrap="square" lIns="50800" tIns="25400" rIns="50800" bIns="25400" anchor="t">
             <a:spAutoFit/>
           </a:bodyPr>
           <a:lstStyle/>
@@ -9920,6 +9973,7 @@
           <a:lstStyle/>
           <a:p>
             <a:pPr algn="ctr"/>
+            <a:endParaRPr/>
           </a:p>
         </p:txBody>
       </p:sp>
@@ -9940,7 +9994,7 @@
           <a:noFill/>
         </p:spPr>
         <p:txBody>
-          <a:bodyPr wrap="square" anchor="t" lIns="50800" rIns="50800" tIns="25400" bIns="25400">
+          <a:bodyPr wrap="square" lIns="50800" tIns="25400" rIns="50800" bIns="25400" anchor="t">
             <a:spAutoFit/>
           </a:bodyPr>
           <a:lstStyle/>
@@ -9991,7 +10045,7 @@
 </file>
 
 <file path=ppt/slides/slide2.xml><?xml version="1.0" encoding="utf-8"?>
-<p:sld xmlns:a="http://schemas.openxmlformats.org/drawingml/2006/main" xmlns:p="http://schemas.openxmlformats.org/presentationml/2006/main" xmlns:r="http://schemas.openxmlformats.org/officeDocument/2006/relationships">
+<p:sld xmlns:a="http://schemas.openxmlformats.org/drawingml/2006/main" xmlns:r="http://schemas.openxmlformats.org/officeDocument/2006/relationships" xmlns:p="http://schemas.openxmlformats.org/presentationml/2006/main">
   <p:cSld>
     <p:spTree>
       <p:nvGrpSpPr>
@@ -9999,7 +10053,14 @@
         <p:cNvGrpSpPr/>
         <p:nvPr/>
       </p:nvGrpSpPr>
-      <p:grpSpPr/>
+      <p:grpSpPr>
+        <a:xfrm>
+          <a:off x="0" y="0"/>
+          <a:ext cx="0" cy="0"/>
+          <a:chOff x="0" y="0"/>
+          <a:chExt cx="0" cy="0"/>
+        </a:xfrm>
+      </p:grpSpPr>
       <p:sp>
         <p:nvSpPr>
           <p:cNvPr id="2" name="Rectangle 1"/>
@@ -10040,6 +10101,7 @@
           <a:lstStyle/>
           <a:p>
             <a:pPr algn="ctr"/>
+            <a:endParaRPr/>
           </a:p>
         </p:txBody>
       </p:sp>
@@ -10079,7 +10141,7 @@
           </a:fontRef>
         </p:style>
         <p:txBody>
-          <a:bodyPr rtlCol="0" anchor="ctr" wrap="none" lIns="25400" rIns="25400"/>
+          <a:bodyPr wrap="none" lIns="25400" rIns="25400" rtlCol="0" anchor="ctr"/>
           <a:lstStyle/>
           <a:p>
             <a:pPr algn="ctr"/>
@@ -10114,7 +10176,7 @@
           <a:noFill/>
         </p:spPr>
         <p:txBody>
-          <a:bodyPr wrap="square" anchor="ctr" lIns="50800" rIns="50800" tIns="25400" bIns="25400">
+          <a:bodyPr wrap="square" lIns="50800" tIns="25400" rIns="50800" bIns="25400" anchor="ctr">
             <a:spAutoFit/>
           </a:bodyPr>
           <a:lstStyle/>
@@ -10178,6 +10240,7 @@
           <a:lstStyle/>
           <a:p>
             <a:pPr algn="ctr"/>
+            <a:endParaRPr/>
           </a:p>
         </p:txBody>
       </p:sp>
@@ -10198,7 +10261,7 @@
           <a:noFill/>
         </p:spPr>
         <p:txBody>
-          <a:bodyPr wrap="square" anchor="t" lIns="50800" rIns="50800" tIns="25400" bIns="25400">
+          <a:bodyPr wrap="square" lIns="50800" tIns="25400" rIns="50800" bIns="25400" anchor="t">
             <a:spAutoFit/>
           </a:bodyPr>
           <a:lstStyle/>
@@ -10221,7 +10284,7 @@
             </a:r>
           </a:p>
           <a:p>
-            <a:pPr algn="l" lvl="1">
+            <a:pPr lvl="1" algn="l">
               <a:spcAft>
                 <a:spcPts val="500"/>
               </a:spcAft>
@@ -10239,7 +10302,7 @@
             </a:r>
           </a:p>
           <a:p>
-            <a:pPr algn="l" lvl="1">
+            <a:pPr lvl="1" algn="l">
               <a:spcAft>
                 <a:spcPts val="500"/>
               </a:spcAft>
@@ -10275,7 +10338,7 @@
             </a:r>
           </a:p>
           <a:p>
-            <a:pPr algn="l" lvl="1">
+            <a:pPr lvl="1" algn="l">
               <a:spcAft>
                 <a:spcPts val="500"/>
               </a:spcAft>
@@ -10293,7 +10356,7 @@
             </a:r>
           </a:p>
           <a:p>
-            <a:pPr algn="l" lvl="1">
+            <a:pPr lvl="1" algn="l">
               <a:spcAft>
                 <a:spcPts val="500"/>
               </a:spcAft>
@@ -10311,7 +10374,7 @@
             </a:r>
           </a:p>
           <a:p>
-            <a:pPr algn="l" lvl="1">
+            <a:pPr lvl="1" algn="l">
               <a:spcAft>
                 <a:spcPts val="500"/>
               </a:spcAft>
@@ -10347,7 +10410,7 @@
             </a:r>
           </a:p>
           <a:p>
-            <a:pPr algn="l" lvl="1">
+            <a:pPr lvl="1" algn="l">
               <a:spcAft>
                 <a:spcPts val="500"/>
               </a:spcAft>
@@ -10365,7 +10428,7 @@
             </a:r>
           </a:p>
           <a:p>
-            <a:pPr algn="l" lvl="1">
+            <a:pPr lvl="1" algn="l">
               <a:spcAft>
                 <a:spcPts val="500"/>
               </a:spcAft>
@@ -10393,7 +10456,7 @@
           <p:nvPr/>
         </p:nvPicPr>
         <p:blipFill>
-          <a:blip r:embed="rId2"/>
+          <a:blip r:embed="rId3"/>
           <a:stretch>
             <a:fillRect/>
           </a:stretch>
@@ -10425,7 +10488,7 @@
           <a:noFill/>
         </p:spPr>
         <p:txBody>
-          <a:bodyPr wrap="square" anchor="t" lIns="50800" rIns="50800" tIns="25400" bIns="25400">
+          <a:bodyPr wrap="square" lIns="50800" tIns="25400" rIns="50800" bIns="25400" anchor="t">
             <a:spAutoFit/>
           </a:bodyPr>
           <a:lstStyle/>
@@ -10466,7 +10529,7 @@
           <a:noFill/>
         </p:spPr>
         <p:txBody>
-          <a:bodyPr wrap="square" anchor="t" lIns="50800" rIns="50800" tIns="25400" bIns="25400">
+          <a:bodyPr wrap="square" lIns="50800" tIns="25400" rIns="50800" bIns="25400" anchor="t">
             <a:spAutoFit/>
           </a:bodyPr>
           <a:lstStyle/>
@@ -10499,7 +10562,7 @@
 </file>
 
 <file path=ppt/slides/slide3.xml><?xml version="1.0" encoding="utf-8"?>
-<p:sld xmlns:a="http://schemas.openxmlformats.org/drawingml/2006/main" xmlns:p="http://schemas.openxmlformats.org/presentationml/2006/main" xmlns:r="http://schemas.openxmlformats.org/officeDocument/2006/relationships">
+<p:sld xmlns:a="http://schemas.openxmlformats.org/drawingml/2006/main" xmlns:r="http://schemas.openxmlformats.org/officeDocument/2006/relationships" xmlns:p="http://schemas.openxmlformats.org/presentationml/2006/main">
   <p:cSld>
     <p:spTree>
       <p:nvGrpSpPr>
@@ -10507,7 +10570,14 @@
         <p:cNvGrpSpPr/>
         <p:nvPr/>
       </p:nvGrpSpPr>
-      <p:grpSpPr/>
+      <p:grpSpPr>
+        <a:xfrm>
+          <a:off x="0" y="0"/>
+          <a:ext cx="0" cy="0"/>
+          <a:chOff x="0" y="0"/>
+          <a:chExt cx="0" cy="0"/>
+        </a:xfrm>
+      </p:grpSpPr>
       <p:sp>
         <p:nvSpPr>
           <p:cNvPr id="2" name="Rectangle 1"/>
@@ -10548,6 +10618,7 @@
           <a:lstStyle/>
           <a:p>
             <a:pPr algn="ctr"/>
+            <a:endParaRPr/>
           </a:p>
         </p:txBody>
       </p:sp>
@@ -10587,7 +10658,7 @@
           </a:fontRef>
         </p:style>
         <p:txBody>
-          <a:bodyPr rtlCol="0" anchor="ctr" wrap="none" lIns="25400" rIns="25400"/>
+          <a:bodyPr wrap="none" lIns="25400" rIns="25400" rtlCol="0" anchor="ctr"/>
           <a:lstStyle/>
           <a:p>
             <a:pPr algn="ctr"/>
@@ -10622,7 +10693,7 @@
           <a:noFill/>
         </p:spPr>
         <p:txBody>
-          <a:bodyPr wrap="square" anchor="ctr" lIns="50800" rIns="50800" tIns="25400" bIns="25400">
+          <a:bodyPr wrap="square" lIns="50800" tIns="25400" rIns="50800" bIns="25400" anchor="ctr">
             <a:spAutoFit/>
           </a:bodyPr>
           <a:lstStyle/>
@@ -10686,6 +10757,7 @@
           <a:lstStyle/>
           <a:p>
             <a:pPr algn="ctr"/>
+            <a:endParaRPr/>
           </a:p>
         </p:txBody>
       </p:sp>
@@ -10708,15 +10780,39 @@
                 <a:tableStyleId>{5C22544A-7EE6-4342-B048-85BDC9FD1C3A}</a:tableStyleId>
               </a:tblPr>
               <a:tblGrid>
-                <a:gridCol w="1784908"/>
-                <a:gridCol w="2900476"/>
-                <a:gridCol w="3346703"/>
-                <a:gridCol w="3123590"/>
+                <a:gridCol w="1784908">
+                  <a:extLst>
+                    <a:ext uri="{9D8B030D-6E8A-4147-A177-3AD203B41FA5}">
+                      <a16:colId xmlns:a16="http://schemas.microsoft.com/office/drawing/2014/main" val="20000"/>
+                    </a:ext>
+                  </a:extLst>
+                </a:gridCol>
+                <a:gridCol w="2900476">
+                  <a:extLst>
+                    <a:ext uri="{9D8B030D-6E8A-4147-A177-3AD203B41FA5}">
+                      <a16:colId xmlns:a16="http://schemas.microsoft.com/office/drawing/2014/main" val="20001"/>
+                    </a:ext>
+                  </a:extLst>
+                </a:gridCol>
+                <a:gridCol w="3346703">
+                  <a:extLst>
+                    <a:ext uri="{9D8B030D-6E8A-4147-A177-3AD203B41FA5}">
+                      <a16:colId xmlns:a16="http://schemas.microsoft.com/office/drawing/2014/main" val="20002"/>
+                    </a:ext>
+                  </a:extLst>
+                </a:gridCol>
+                <a:gridCol w="3123590">
+                  <a:extLst>
+                    <a:ext uri="{9D8B030D-6E8A-4147-A177-3AD203B41FA5}">
+                      <a16:colId xmlns:a16="http://schemas.microsoft.com/office/drawing/2014/main" val="20003"/>
+                    </a:ext>
+                  </a:extLst>
+                </a:gridCol>
               </a:tblGrid>
               <a:tr h="420624">
                 <a:tc>
                   <a:txBody>
-                    <a:bodyPr wrap="square"/>
+                    <a:bodyPr/>
                     <a:lstStyle/>
                     <a:p>
                       <a:pPr algn="l"/>
@@ -10741,7 +10837,7 @@
                 </a:tc>
                 <a:tc>
                   <a:txBody>
-                    <a:bodyPr wrap="square"/>
+                    <a:bodyPr/>
                     <a:lstStyle/>
                     <a:p>
                       <a:pPr algn="l"/>
@@ -10766,7 +10862,7 @@
                 </a:tc>
                 <a:tc>
                   <a:txBody>
-                    <a:bodyPr wrap="square"/>
+                    <a:bodyPr/>
                     <a:lstStyle/>
                     <a:p>
                       <a:pPr algn="l"/>
@@ -10791,7 +10887,7 @@
                 </a:tc>
                 <a:tc>
                   <a:txBody>
-                    <a:bodyPr wrap="square"/>
+                    <a:bodyPr/>
                     <a:lstStyle/>
                     <a:p>
                       <a:pPr algn="l"/>
@@ -10814,11 +10910,16 @@
                     </a:solidFill>
                   </a:tcPr>
                 </a:tc>
+                <a:extLst>
+                  <a:ext uri="{0D108BD9-81ED-4DB2-BD59-A6C34878D82A}">
+                    <a16:rowId xmlns:a16="http://schemas.microsoft.com/office/drawing/2014/main" val="10000"/>
+                  </a:ext>
+                </a:extLst>
               </a:tr>
               <a:tr h="420624">
                 <a:tc>
                   <a:txBody>
-                    <a:bodyPr wrap="square"/>
+                    <a:bodyPr/>
                     <a:lstStyle/>
                     <a:p>
                       <a:pPr algn="l"/>
@@ -10843,7 +10944,7 @@
                 </a:tc>
                 <a:tc>
                   <a:txBody>
-                    <a:bodyPr wrap="square"/>
+                    <a:bodyPr/>
                     <a:lstStyle/>
                     <a:p>
                       <a:pPr algn="l"/>
@@ -10868,7 +10969,7 @@
                 </a:tc>
                 <a:tc>
                   <a:txBody>
-                    <a:bodyPr wrap="square"/>
+                    <a:bodyPr/>
                     <a:lstStyle/>
                     <a:p>
                       <a:pPr algn="l"/>
@@ -10893,7 +10994,7 @@
                 </a:tc>
                 <a:tc>
                   <a:txBody>
-                    <a:bodyPr wrap="square"/>
+                    <a:bodyPr/>
                     <a:lstStyle/>
                     <a:p>
                       <a:pPr algn="l"/>
@@ -10916,11 +11017,16 @@
                     </a:solidFill>
                   </a:tcPr>
                 </a:tc>
+                <a:extLst>
+                  <a:ext uri="{0D108BD9-81ED-4DB2-BD59-A6C34878D82A}">
+                    <a16:rowId xmlns:a16="http://schemas.microsoft.com/office/drawing/2014/main" val="10001"/>
+                  </a:ext>
+                </a:extLst>
               </a:tr>
               <a:tr h="420624">
                 <a:tc>
                   <a:txBody>
-                    <a:bodyPr wrap="square"/>
+                    <a:bodyPr/>
                     <a:lstStyle/>
                     <a:p>
                       <a:pPr algn="l"/>
@@ -10945,7 +11051,7 @@
                 </a:tc>
                 <a:tc>
                   <a:txBody>
-                    <a:bodyPr wrap="square"/>
+                    <a:bodyPr/>
                     <a:lstStyle/>
                     <a:p>
                       <a:pPr algn="l"/>
@@ -10970,7 +11076,7 @@
                 </a:tc>
                 <a:tc>
                   <a:txBody>
-                    <a:bodyPr wrap="square"/>
+                    <a:bodyPr/>
                     <a:lstStyle/>
                     <a:p>
                       <a:pPr algn="l"/>
@@ -10995,7 +11101,7 @@
                 </a:tc>
                 <a:tc>
                   <a:txBody>
-                    <a:bodyPr wrap="square"/>
+                    <a:bodyPr/>
                     <a:lstStyle/>
                     <a:p>
                       <a:pPr algn="l"/>
@@ -11018,11 +11124,16 @@
                     </a:solidFill>
                   </a:tcPr>
                 </a:tc>
+                <a:extLst>
+                  <a:ext uri="{0D108BD9-81ED-4DB2-BD59-A6C34878D82A}">
+                    <a16:rowId xmlns:a16="http://schemas.microsoft.com/office/drawing/2014/main" val="10002"/>
+                  </a:ext>
+                </a:extLst>
               </a:tr>
               <a:tr h="420624">
                 <a:tc>
                   <a:txBody>
-                    <a:bodyPr wrap="square"/>
+                    <a:bodyPr/>
                     <a:lstStyle/>
                     <a:p>
                       <a:pPr algn="l"/>
@@ -11047,7 +11158,7 @@
                 </a:tc>
                 <a:tc>
                   <a:txBody>
-                    <a:bodyPr wrap="square"/>
+                    <a:bodyPr/>
                     <a:lstStyle/>
                     <a:p>
                       <a:pPr algn="l"/>
@@ -11072,7 +11183,7 @@
                 </a:tc>
                 <a:tc>
                   <a:txBody>
-                    <a:bodyPr wrap="square"/>
+                    <a:bodyPr/>
                     <a:lstStyle/>
                     <a:p>
                       <a:pPr algn="l"/>
@@ -11097,7 +11208,7 @@
                 </a:tc>
                 <a:tc>
                   <a:txBody>
-                    <a:bodyPr wrap="square"/>
+                    <a:bodyPr/>
                     <a:lstStyle/>
                     <a:p>
                       <a:pPr algn="l"/>
@@ -11120,11 +11231,16 @@
                     </a:solidFill>
                   </a:tcPr>
                 </a:tc>
+                <a:extLst>
+                  <a:ext uri="{0D108BD9-81ED-4DB2-BD59-A6C34878D82A}">
+                    <a16:rowId xmlns:a16="http://schemas.microsoft.com/office/drawing/2014/main" val="10003"/>
+                  </a:ext>
+                </a:extLst>
               </a:tr>
               <a:tr h="420624">
                 <a:tc>
                   <a:txBody>
-                    <a:bodyPr wrap="square"/>
+                    <a:bodyPr/>
                     <a:lstStyle/>
                     <a:p>
                       <a:pPr algn="l"/>
@@ -11149,7 +11265,7 @@
                 </a:tc>
                 <a:tc>
                   <a:txBody>
-                    <a:bodyPr wrap="square"/>
+                    <a:bodyPr/>
                     <a:lstStyle/>
                     <a:p>
                       <a:pPr algn="l"/>
@@ -11174,7 +11290,7 @@
                 </a:tc>
                 <a:tc>
                   <a:txBody>
-                    <a:bodyPr wrap="square"/>
+                    <a:bodyPr/>
                     <a:lstStyle/>
                     <a:p>
                       <a:pPr algn="l"/>
@@ -11199,7 +11315,7 @@
                 </a:tc>
                 <a:tc>
                   <a:txBody>
-                    <a:bodyPr wrap="square"/>
+                    <a:bodyPr/>
                     <a:lstStyle/>
                     <a:p>
                       <a:pPr algn="l"/>
@@ -11222,11 +11338,16 @@
                     </a:solidFill>
                   </a:tcPr>
                 </a:tc>
+                <a:extLst>
+                  <a:ext uri="{0D108BD9-81ED-4DB2-BD59-A6C34878D82A}">
+                    <a16:rowId xmlns:a16="http://schemas.microsoft.com/office/drawing/2014/main" val="10004"/>
+                  </a:ext>
+                </a:extLst>
               </a:tr>
               <a:tr h="420624">
                 <a:tc>
                   <a:txBody>
-                    <a:bodyPr wrap="square"/>
+                    <a:bodyPr/>
                     <a:lstStyle/>
                     <a:p>
                       <a:pPr algn="l"/>
@@ -11251,7 +11372,7 @@
                 </a:tc>
                 <a:tc>
                   <a:txBody>
-                    <a:bodyPr wrap="square"/>
+                    <a:bodyPr/>
                     <a:lstStyle/>
                     <a:p>
                       <a:pPr algn="l"/>
@@ -11276,7 +11397,7 @@
                 </a:tc>
                 <a:tc>
                   <a:txBody>
-                    <a:bodyPr wrap="square"/>
+                    <a:bodyPr/>
                     <a:lstStyle/>
                     <a:p>
                       <a:pPr algn="l"/>
@@ -11301,7 +11422,7 @@
                 </a:tc>
                 <a:tc>
                   <a:txBody>
-                    <a:bodyPr wrap="square"/>
+                    <a:bodyPr/>
                     <a:lstStyle/>
                     <a:p>
                       <a:pPr algn="l"/>
@@ -11324,11 +11445,16 @@
                     </a:solidFill>
                   </a:tcPr>
                 </a:tc>
+                <a:extLst>
+                  <a:ext uri="{0D108BD9-81ED-4DB2-BD59-A6C34878D82A}">
+                    <a16:rowId xmlns:a16="http://schemas.microsoft.com/office/drawing/2014/main" val="10005"/>
+                  </a:ext>
+                </a:extLst>
               </a:tr>
               <a:tr h="420624">
                 <a:tc>
                   <a:txBody>
-                    <a:bodyPr wrap="square"/>
+                    <a:bodyPr/>
                     <a:lstStyle/>
                     <a:p>
                       <a:pPr algn="l"/>
@@ -11353,7 +11479,7 @@
                 </a:tc>
                 <a:tc>
                   <a:txBody>
-                    <a:bodyPr wrap="square"/>
+                    <a:bodyPr/>
                     <a:lstStyle/>
                     <a:p>
                       <a:pPr algn="l"/>
@@ -11378,7 +11504,7 @@
                 </a:tc>
                 <a:tc>
                   <a:txBody>
-                    <a:bodyPr wrap="square"/>
+                    <a:bodyPr/>
                     <a:lstStyle/>
                     <a:p>
                       <a:pPr algn="l"/>
@@ -11403,7 +11529,7 @@
                 </a:tc>
                 <a:tc>
                   <a:txBody>
-                    <a:bodyPr wrap="square"/>
+                    <a:bodyPr/>
                     <a:lstStyle/>
                     <a:p>
                       <a:pPr algn="l"/>
@@ -11426,11 +11552,16 @@
                     </a:solidFill>
                   </a:tcPr>
                 </a:tc>
+                <a:extLst>
+                  <a:ext uri="{0D108BD9-81ED-4DB2-BD59-A6C34878D82A}">
+                    <a16:rowId xmlns:a16="http://schemas.microsoft.com/office/drawing/2014/main" val="10006"/>
+                  </a:ext>
+                </a:extLst>
               </a:tr>
               <a:tr h="420624">
                 <a:tc>
                   <a:txBody>
-                    <a:bodyPr wrap="square"/>
+                    <a:bodyPr/>
                     <a:lstStyle/>
                     <a:p>
                       <a:pPr algn="l"/>
@@ -11455,7 +11586,7 @@
                 </a:tc>
                 <a:tc>
                   <a:txBody>
-                    <a:bodyPr wrap="square"/>
+                    <a:bodyPr/>
                     <a:lstStyle/>
                     <a:p>
                       <a:pPr algn="l"/>
@@ -11480,7 +11611,7 @@
                 </a:tc>
                 <a:tc>
                   <a:txBody>
-                    <a:bodyPr wrap="square"/>
+                    <a:bodyPr/>
                     <a:lstStyle/>
                     <a:p>
                       <a:pPr algn="l"/>
@@ -11505,7 +11636,7 @@
                 </a:tc>
                 <a:tc>
                   <a:txBody>
-                    <a:bodyPr wrap="square"/>
+                    <a:bodyPr/>
                     <a:lstStyle/>
                     <a:p>
                       <a:pPr algn="l"/>
@@ -11528,11 +11659,16 @@
                     </a:solidFill>
                   </a:tcPr>
                 </a:tc>
+                <a:extLst>
+                  <a:ext uri="{0D108BD9-81ED-4DB2-BD59-A6C34878D82A}">
+                    <a16:rowId xmlns:a16="http://schemas.microsoft.com/office/drawing/2014/main" val="10007"/>
+                  </a:ext>
+                </a:extLst>
               </a:tr>
               <a:tr h="420624">
                 <a:tc>
                   <a:txBody>
-                    <a:bodyPr wrap="square"/>
+                    <a:bodyPr/>
                     <a:lstStyle/>
                     <a:p>
                       <a:pPr algn="l"/>
@@ -11557,7 +11693,7 @@
                 </a:tc>
                 <a:tc>
                   <a:txBody>
-                    <a:bodyPr wrap="square"/>
+                    <a:bodyPr/>
                     <a:lstStyle/>
                     <a:p>
                       <a:pPr algn="l"/>
@@ -11582,7 +11718,7 @@
                 </a:tc>
                 <a:tc>
                   <a:txBody>
-                    <a:bodyPr wrap="square"/>
+                    <a:bodyPr/>
                     <a:lstStyle/>
                     <a:p>
                       <a:pPr algn="l"/>
@@ -11607,7 +11743,7 @@
                 </a:tc>
                 <a:tc>
                   <a:txBody>
-                    <a:bodyPr wrap="square"/>
+                    <a:bodyPr/>
                     <a:lstStyle/>
                     <a:p>
                       <a:pPr algn="l"/>
@@ -11630,6 +11766,11 @@
                     </a:solidFill>
                   </a:tcPr>
                 </a:tc>
+                <a:extLst>
+                  <a:ext uri="{0D108BD9-81ED-4DB2-BD59-A6C34878D82A}">
+                    <a16:rowId xmlns:a16="http://schemas.microsoft.com/office/drawing/2014/main" val="10008"/>
+                  </a:ext>
+                </a:extLst>
               </a:tr>
             </a:tbl>
           </a:graphicData>
@@ -11652,7 +11793,7 @@
           <a:noFill/>
         </p:spPr>
         <p:txBody>
-          <a:bodyPr wrap="square" anchor="t" lIns="50800" rIns="50800" tIns="25400" bIns="25400">
+          <a:bodyPr wrap="square" lIns="50800" tIns="25400" rIns="50800" bIns="25400" anchor="t">
             <a:spAutoFit/>
           </a:bodyPr>
           <a:lstStyle/>
@@ -11693,7 +11834,7 @@
           <a:noFill/>
         </p:spPr>
         <p:txBody>
-          <a:bodyPr wrap="square" anchor="t" lIns="50800" rIns="50800" tIns="25400" bIns="25400">
+          <a:bodyPr wrap="square" lIns="50800" tIns="25400" rIns="50800" bIns="25400" anchor="t">
             <a:spAutoFit/>
           </a:bodyPr>
           <a:lstStyle/>
@@ -11726,7 +11867,7 @@
 </file>
 
 <file path=ppt/slides/slide4.xml><?xml version="1.0" encoding="utf-8"?>
-<p:sld xmlns:a="http://schemas.openxmlformats.org/drawingml/2006/main" xmlns:p="http://schemas.openxmlformats.org/presentationml/2006/main" xmlns:r="http://schemas.openxmlformats.org/officeDocument/2006/relationships">
+<p:sld xmlns:a="http://schemas.openxmlformats.org/drawingml/2006/main" xmlns:r="http://schemas.openxmlformats.org/officeDocument/2006/relationships" xmlns:p="http://schemas.openxmlformats.org/presentationml/2006/main">
   <p:cSld>
     <p:spTree>
       <p:nvGrpSpPr>
@@ -11734,7 +11875,14 @@
         <p:cNvGrpSpPr/>
         <p:nvPr/>
       </p:nvGrpSpPr>
-      <p:grpSpPr/>
+      <p:grpSpPr>
+        <a:xfrm>
+          <a:off x="0" y="0"/>
+          <a:ext cx="0" cy="0"/>
+          <a:chOff x="0" y="0"/>
+          <a:chExt cx="0" cy="0"/>
+        </a:xfrm>
+      </p:grpSpPr>
       <p:sp>
         <p:nvSpPr>
           <p:cNvPr id="2" name="Rectangle 1"/>
@@ -11775,6 +11923,7 @@
           <a:lstStyle/>
           <a:p>
             <a:pPr algn="ctr"/>
+            <a:endParaRPr/>
           </a:p>
         </p:txBody>
       </p:sp>
@@ -11814,7 +11963,7 @@
           </a:fontRef>
         </p:style>
         <p:txBody>
-          <a:bodyPr rtlCol="0" anchor="ctr" wrap="none" lIns="25400" rIns="25400"/>
+          <a:bodyPr wrap="none" lIns="25400" rIns="25400" rtlCol="0" anchor="ctr"/>
           <a:lstStyle/>
           <a:p>
             <a:pPr algn="ctr"/>
@@ -11849,7 +11998,7 @@
           <a:noFill/>
         </p:spPr>
         <p:txBody>
-          <a:bodyPr wrap="square" anchor="ctr" lIns="50800" rIns="50800" tIns="25400" bIns="25400">
+          <a:bodyPr wrap="square" lIns="50800" tIns="25400" rIns="50800" bIns="25400" anchor="ctr">
             <a:spAutoFit/>
           </a:bodyPr>
           <a:lstStyle/>
@@ -11913,6 +12062,7 @@
           <a:lstStyle/>
           <a:p>
             <a:pPr algn="ctr"/>
+            <a:endParaRPr/>
           </a:p>
         </p:txBody>
       </p:sp>
@@ -11933,7 +12083,7 @@
           <a:noFill/>
         </p:spPr>
         <p:txBody>
-          <a:bodyPr wrap="square" anchor="t" lIns="50800" rIns="50800" tIns="25400" bIns="25400">
+          <a:bodyPr wrap="square" lIns="50800" tIns="25400" rIns="50800" bIns="25400" anchor="t">
             <a:spAutoFit/>
           </a:bodyPr>
           <a:lstStyle/>
@@ -11956,7 +12106,7 @@
             </a:r>
           </a:p>
           <a:p>
-            <a:pPr algn="l" lvl="1">
+            <a:pPr lvl="1" algn="l">
               <a:spcAft>
                 <a:spcPts val="500"/>
               </a:spcAft>
@@ -11974,7 +12124,7 @@
             </a:r>
           </a:p>
           <a:p>
-            <a:pPr algn="l" lvl="1">
+            <a:pPr lvl="1" algn="l">
               <a:spcAft>
                 <a:spcPts val="500"/>
               </a:spcAft>
@@ -12010,7 +12160,7 @@
             </a:r>
           </a:p>
           <a:p>
-            <a:pPr algn="l" lvl="1">
+            <a:pPr lvl="1" algn="l">
               <a:spcAft>
                 <a:spcPts val="500"/>
               </a:spcAft>
@@ -12028,7 +12178,7 @@
             </a:r>
           </a:p>
           <a:p>
-            <a:pPr algn="l" lvl="1">
+            <a:pPr lvl="1" algn="l">
               <a:spcAft>
                 <a:spcPts val="500"/>
               </a:spcAft>
@@ -12046,7 +12196,7 @@
             </a:r>
           </a:p>
           <a:p>
-            <a:pPr algn="l" lvl="1">
+            <a:pPr lvl="1" algn="l">
               <a:spcAft>
                 <a:spcPts val="500"/>
               </a:spcAft>
@@ -12082,7 +12232,7 @@
             </a:r>
           </a:p>
           <a:p>
-            <a:pPr algn="l" lvl="1">
+            <a:pPr lvl="1" algn="l">
               <a:spcAft>
                 <a:spcPts val="500"/>
               </a:spcAft>
@@ -12141,6 +12291,7 @@
           <a:lstStyle/>
           <a:p>
             <a:pPr algn="ctr"/>
+            <a:endParaRPr/>
           </a:p>
         </p:txBody>
       </p:sp>
@@ -12161,7 +12312,7 @@
           <a:noFill/>
         </p:spPr>
         <p:txBody>
-          <a:bodyPr wrap="square" anchor="t" lIns="50800" rIns="50800" tIns="25400" bIns="25400">
+          <a:bodyPr wrap="square" lIns="50800" tIns="25400" rIns="50800" bIns="25400" anchor="t">
             <a:spAutoFit/>
           </a:bodyPr>
           <a:lstStyle/>
@@ -12297,17 +12448,14 @@
                 <a:spcPts val="300"/>
               </a:spcAft>
             </a:pPr>
-            <a:r>
-              <a:rPr sz="1100" b="0">
-                <a:solidFill>
-                  <a:srgbClr val="333333"/>
-                </a:solidFill>
-                <a:latin typeface="Microsoft YaHei"/>
-                <a:ea typeface="Microsoft YaHei"/>
-                <a:cs typeface="Microsoft YaHei"/>
-              </a:rPr>
-              <a:t/>
-            </a:r>
+            <a:endParaRPr sz="1100" b="0">
+              <a:solidFill>
+                <a:srgbClr val="333333"/>
+              </a:solidFill>
+              <a:latin typeface="Microsoft YaHei"/>
+              <a:ea typeface="Microsoft YaHei"/>
+              <a:cs typeface="Microsoft YaHei"/>
+            </a:endParaRPr>
           </a:p>
           <a:p>
             <a:pPr algn="l">
@@ -12346,7 +12494,7 @@
           <a:noFill/>
         </p:spPr>
         <p:txBody>
-          <a:bodyPr wrap="square" anchor="t" lIns="50800" rIns="50800" tIns="25400" bIns="25400">
+          <a:bodyPr wrap="square" lIns="50800" tIns="25400" rIns="50800" bIns="25400" anchor="t">
             <a:spAutoFit/>
           </a:bodyPr>
           <a:lstStyle/>
@@ -12405,7 +12553,7 @@
           <a:noFill/>
         </p:spPr>
         <p:txBody>
-          <a:bodyPr wrap="square" anchor="t" lIns="50800" rIns="50800" tIns="25400" bIns="25400">
+          <a:bodyPr wrap="square" lIns="50800" tIns="25400" rIns="50800" bIns="25400" anchor="t">
             <a:spAutoFit/>
           </a:bodyPr>
           <a:lstStyle/>
@@ -12438,7 +12586,7 @@
 </file>
 
 <file path=ppt/slides/slide5.xml><?xml version="1.0" encoding="utf-8"?>
-<p:sld xmlns:a="http://schemas.openxmlformats.org/drawingml/2006/main" xmlns:p="http://schemas.openxmlformats.org/presentationml/2006/main" xmlns:r="http://schemas.openxmlformats.org/officeDocument/2006/relationships">
+<p:sld xmlns:a="http://schemas.openxmlformats.org/drawingml/2006/main" xmlns:r="http://schemas.openxmlformats.org/officeDocument/2006/relationships" xmlns:p="http://schemas.openxmlformats.org/presentationml/2006/main">
   <p:cSld>
     <p:spTree>
       <p:nvGrpSpPr>
@@ -12446,7 +12594,14 @@
         <p:cNvGrpSpPr/>
         <p:nvPr/>
       </p:nvGrpSpPr>
-      <p:grpSpPr/>
+      <p:grpSpPr>
+        <a:xfrm>
+          <a:off x="0" y="0"/>
+          <a:ext cx="0" cy="0"/>
+          <a:chOff x="0" y="0"/>
+          <a:chExt cx="0" cy="0"/>
+        </a:xfrm>
+      </p:grpSpPr>
       <p:sp>
         <p:nvSpPr>
           <p:cNvPr id="2" name="Rectangle 1"/>
@@ -12487,6 +12642,7 @@
           <a:lstStyle/>
           <a:p>
             <a:pPr algn="ctr"/>
+            <a:endParaRPr/>
           </a:p>
         </p:txBody>
       </p:sp>
@@ -12526,7 +12682,7 @@
           </a:fontRef>
         </p:style>
         <p:txBody>
-          <a:bodyPr rtlCol="0" anchor="ctr" wrap="none" lIns="25400" rIns="25400"/>
+          <a:bodyPr wrap="none" lIns="25400" rIns="25400" rtlCol="0" anchor="ctr"/>
           <a:lstStyle/>
           <a:p>
             <a:pPr algn="ctr"/>
@@ -12561,7 +12717,7 @@
           <a:noFill/>
         </p:spPr>
         <p:txBody>
-          <a:bodyPr wrap="square" anchor="ctr" lIns="50800" rIns="50800" tIns="25400" bIns="25400">
+          <a:bodyPr wrap="square" lIns="50800" tIns="25400" rIns="50800" bIns="25400" anchor="ctr">
             <a:spAutoFit/>
           </a:bodyPr>
           <a:lstStyle/>
@@ -12602,7 +12758,7 @@
           <a:noFill/>
         </p:spPr>
         <p:txBody>
-          <a:bodyPr wrap="square" anchor="t" lIns="50800" rIns="50800" tIns="25400" bIns="25400">
+          <a:bodyPr wrap="square" lIns="50800" tIns="25400" rIns="50800" bIns="25400" anchor="t">
             <a:spAutoFit/>
           </a:bodyPr>
           <a:lstStyle/>
@@ -12666,6 +12822,7 @@
           <a:lstStyle/>
           <a:p>
             <a:pPr algn="ctr"/>
+            <a:endParaRPr/>
           </a:p>
         </p:txBody>
       </p:sp>
@@ -12686,7 +12843,7 @@
           <a:noFill/>
         </p:spPr>
         <p:txBody>
-          <a:bodyPr wrap="square" anchor="t" lIns="50800" rIns="50800" tIns="25400" bIns="25400">
+          <a:bodyPr wrap="square" lIns="50800" tIns="25400" rIns="50800" bIns="25400" anchor="t">
             <a:spAutoFit/>
           </a:bodyPr>
           <a:lstStyle/>
@@ -12709,7 +12866,7 @@
             </a:r>
           </a:p>
           <a:p>
-            <a:pPr algn="l" lvl="1">
+            <a:pPr lvl="1" algn="l">
               <a:spcAft>
                 <a:spcPts val="400"/>
               </a:spcAft>
@@ -12727,7 +12884,7 @@
             </a:r>
           </a:p>
           <a:p>
-            <a:pPr algn="l" lvl="1">
+            <a:pPr lvl="1" algn="l">
               <a:spcAft>
                 <a:spcPts val="400"/>
               </a:spcAft>
@@ -12763,7 +12920,7 @@
             </a:r>
           </a:p>
           <a:p>
-            <a:pPr algn="l" lvl="1">
+            <a:pPr lvl="1" algn="l">
               <a:spcAft>
                 <a:spcPts val="400"/>
               </a:spcAft>
@@ -12781,7 +12938,7 @@
             </a:r>
           </a:p>
           <a:p>
-            <a:pPr algn="l" lvl="1">
+            <a:pPr lvl="1" algn="l">
               <a:spcAft>
                 <a:spcPts val="400"/>
               </a:spcAft>
@@ -12817,7 +12974,7 @@
             </a:r>
           </a:p>
           <a:p>
-            <a:pPr algn="l" lvl="1">
+            <a:pPr lvl="1" algn="l">
               <a:spcAft>
                 <a:spcPts val="400"/>
               </a:spcAft>
@@ -12835,7 +12992,7 @@
             </a:r>
           </a:p>
           <a:p>
-            <a:pPr algn="l" lvl="1">
+            <a:pPr lvl="1" algn="l">
               <a:spcAft>
                 <a:spcPts val="400"/>
               </a:spcAft>
@@ -12871,7 +13028,7 @@
             </a:r>
           </a:p>
           <a:p>
-            <a:pPr algn="l" lvl="1">
+            <a:pPr lvl="1" algn="l">
               <a:spcAft>
                 <a:spcPts val="400"/>
               </a:spcAft>
@@ -12930,6 +13087,7 @@
           <a:lstStyle/>
           <a:p>
             <a:pPr algn="ctr"/>
+            <a:endParaRPr/>
           </a:p>
         </p:txBody>
       </p:sp>
@@ -12950,7 +13108,7 @@
           <a:noFill/>
         </p:spPr>
         <p:txBody>
-          <a:bodyPr wrap="square" anchor="t" lIns="50800" rIns="50800" tIns="25400" bIns="25400">
+          <a:bodyPr wrap="square" lIns="50800" tIns="25400" rIns="50800" bIns="25400" anchor="t">
             <a:spAutoFit/>
           </a:bodyPr>
           <a:lstStyle/>
@@ -12978,17 +13136,14 @@
                 <a:spcPts val="300"/>
               </a:spcAft>
             </a:pPr>
-            <a:r>
-              <a:rPr sz="1150" b="0">
-                <a:solidFill>
-                  <a:srgbClr val="333333"/>
-                </a:solidFill>
-                <a:latin typeface="Microsoft YaHei"/>
-                <a:ea typeface="Microsoft YaHei"/>
-                <a:cs typeface="Microsoft YaHei"/>
-              </a:rPr>
-              <a:t/>
-            </a:r>
+            <a:endParaRPr sz="1150" b="0">
+              <a:solidFill>
+                <a:srgbClr val="333333"/>
+              </a:solidFill>
+              <a:latin typeface="Microsoft YaHei"/>
+              <a:ea typeface="Microsoft YaHei"/>
+              <a:cs typeface="Microsoft YaHei"/>
+            </a:endParaRPr>
           </a:p>
           <a:p>
             <a:pPr algn="l">
@@ -13032,17 +13187,14 @@
                 <a:spcPts val="300"/>
               </a:spcAft>
             </a:pPr>
-            <a:r>
-              <a:rPr sz="1150" b="0">
-                <a:solidFill>
-                  <a:srgbClr val="333333"/>
-                </a:solidFill>
-                <a:latin typeface="Microsoft YaHei"/>
-                <a:ea typeface="Microsoft YaHei"/>
-                <a:cs typeface="Microsoft YaHei"/>
-              </a:rPr>
-              <a:t/>
-            </a:r>
+            <a:endParaRPr sz="1150" b="0">
+              <a:solidFill>
+                <a:srgbClr val="333333"/>
+              </a:solidFill>
+              <a:latin typeface="Microsoft YaHei"/>
+              <a:ea typeface="Microsoft YaHei"/>
+              <a:cs typeface="Microsoft YaHei"/>
+            </a:endParaRPr>
           </a:p>
           <a:p>
             <a:pPr algn="l">
@@ -13135,7 +13287,7 @@
           <a:noFill/>
         </p:spPr>
         <p:txBody>
-          <a:bodyPr wrap="square" anchor="t" lIns="50800" rIns="50800" tIns="25400" bIns="25400">
+          <a:bodyPr wrap="square" lIns="50800" tIns="25400" rIns="50800" bIns="25400" anchor="t">
             <a:spAutoFit/>
           </a:bodyPr>
           <a:lstStyle/>
@@ -13194,7 +13346,7 @@
           <a:noFill/>
         </p:spPr>
         <p:txBody>
-          <a:bodyPr wrap="square" anchor="t" lIns="50800" rIns="50800" tIns="25400" bIns="25400">
+          <a:bodyPr wrap="square" lIns="50800" tIns="25400" rIns="50800" bIns="25400" anchor="t">
             <a:spAutoFit/>
           </a:bodyPr>
           <a:lstStyle/>
@@ -13227,7 +13379,7 @@
 </file>
 
 <file path=ppt/slides/slide6.xml><?xml version="1.0" encoding="utf-8"?>
-<p:sld xmlns:a="http://schemas.openxmlformats.org/drawingml/2006/main" xmlns:p="http://schemas.openxmlformats.org/presentationml/2006/main" xmlns:r="http://schemas.openxmlformats.org/officeDocument/2006/relationships">
+<p:sld xmlns:a="http://schemas.openxmlformats.org/drawingml/2006/main" xmlns:r="http://schemas.openxmlformats.org/officeDocument/2006/relationships" xmlns:p="http://schemas.openxmlformats.org/presentationml/2006/main">
   <p:cSld>
     <p:spTree>
       <p:nvGrpSpPr>
@@ -13235,7 +13387,14 @@
         <p:cNvGrpSpPr/>
         <p:nvPr/>
       </p:nvGrpSpPr>
-      <p:grpSpPr/>
+      <p:grpSpPr>
+        <a:xfrm>
+          <a:off x="0" y="0"/>
+          <a:ext cx="0" cy="0"/>
+          <a:chOff x="0" y="0"/>
+          <a:chExt cx="0" cy="0"/>
+        </a:xfrm>
+      </p:grpSpPr>
       <p:sp>
         <p:nvSpPr>
           <p:cNvPr id="2" name="Rectangle 1"/>
@@ -13276,6 +13435,7 @@
           <a:lstStyle/>
           <a:p>
             <a:pPr algn="ctr"/>
+            <a:endParaRPr/>
           </a:p>
         </p:txBody>
       </p:sp>
@@ -13315,7 +13475,7 @@
           </a:fontRef>
         </p:style>
         <p:txBody>
-          <a:bodyPr rtlCol="0" anchor="ctr" wrap="none" lIns="25400" rIns="25400"/>
+          <a:bodyPr wrap="none" lIns="25400" rIns="25400" rtlCol="0" anchor="ctr"/>
           <a:lstStyle/>
           <a:p>
             <a:pPr algn="ctr"/>
@@ -13350,7 +13510,7 @@
           <a:noFill/>
         </p:spPr>
         <p:txBody>
-          <a:bodyPr wrap="square" anchor="ctr" lIns="50800" rIns="50800" tIns="25400" bIns="25400">
+          <a:bodyPr wrap="square" lIns="50800" tIns="25400" rIns="50800" bIns="25400" anchor="ctr">
             <a:spAutoFit/>
           </a:bodyPr>
           <a:lstStyle/>
@@ -13414,6 +13574,7 @@
           <a:lstStyle/>
           <a:p>
             <a:pPr algn="ctr"/>
+            <a:endParaRPr/>
           </a:p>
         </p:txBody>
       </p:sp>
@@ -13434,7 +13595,7 @@
           <a:noFill/>
         </p:spPr>
         <p:txBody>
-          <a:bodyPr wrap="square" anchor="t" lIns="50800" rIns="50800" tIns="25400" bIns="25400">
+          <a:bodyPr wrap="square" lIns="50800" tIns="25400" rIns="50800" bIns="25400" anchor="t">
             <a:spAutoFit/>
           </a:bodyPr>
           <a:lstStyle/>
@@ -13457,7 +13618,7 @@
             </a:r>
           </a:p>
           <a:p>
-            <a:pPr algn="l" lvl="1">
+            <a:pPr lvl="1" algn="l">
               <a:spcAft>
                 <a:spcPts val="400"/>
               </a:spcAft>
@@ -13475,7 +13636,7 @@
             </a:r>
           </a:p>
           <a:p>
-            <a:pPr algn="l" lvl="1">
+            <a:pPr lvl="1" algn="l">
               <a:spcAft>
                 <a:spcPts val="400"/>
               </a:spcAft>
@@ -13511,7 +13672,7 @@
             </a:r>
           </a:p>
           <a:p>
-            <a:pPr algn="l" lvl="1">
+            <a:pPr lvl="1" algn="l">
               <a:spcAft>
                 <a:spcPts val="400"/>
               </a:spcAft>
@@ -13529,7 +13690,7 @@
             </a:r>
           </a:p>
           <a:p>
-            <a:pPr algn="l" lvl="1">
+            <a:pPr lvl="1" algn="l">
               <a:spcAft>
                 <a:spcPts val="400"/>
               </a:spcAft>
@@ -13547,7 +13708,7 @@
             </a:r>
           </a:p>
           <a:p>
-            <a:pPr algn="l" lvl="1">
+            <a:pPr lvl="1" algn="l">
               <a:spcAft>
                 <a:spcPts val="400"/>
               </a:spcAft>
@@ -13583,7 +13744,7 @@
             </a:r>
           </a:p>
           <a:p>
-            <a:pPr algn="l" lvl="1">
+            <a:pPr lvl="1" algn="l">
               <a:spcAft>
                 <a:spcPts val="400"/>
               </a:spcAft>
@@ -13601,7 +13762,7 @@
             </a:r>
           </a:p>
           <a:p>
-            <a:pPr algn="l" lvl="1">
+            <a:pPr lvl="1" algn="l">
               <a:spcAft>
                 <a:spcPts val="400"/>
               </a:spcAft>
@@ -13639,16 +13800,46 @@
                 <a:tableStyleId>{5C22544A-7EE6-4342-B048-85BDC9FD1C3A}</a:tableStyleId>
               </a:tblPr>
               <a:tblGrid>
-                <a:gridCol w="1549908"/>
-                <a:gridCol w="878281"/>
-                <a:gridCol w="878281"/>
-                <a:gridCol w="929944"/>
-                <a:gridCol w="929944"/>
+                <a:gridCol w="1549908">
+                  <a:extLst>
+                    <a:ext uri="{9D8B030D-6E8A-4147-A177-3AD203B41FA5}">
+                      <a16:colId xmlns:a16="http://schemas.microsoft.com/office/drawing/2014/main" val="20000"/>
+                    </a:ext>
+                  </a:extLst>
+                </a:gridCol>
+                <a:gridCol w="878281">
+                  <a:extLst>
+                    <a:ext uri="{9D8B030D-6E8A-4147-A177-3AD203B41FA5}">
+                      <a16:colId xmlns:a16="http://schemas.microsoft.com/office/drawing/2014/main" val="20001"/>
+                    </a:ext>
+                  </a:extLst>
+                </a:gridCol>
+                <a:gridCol w="878281">
+                  <a:extLst>
+                    <a:ext uri="{9D8B030D-6E8A-4147-A177-3AD203B41FA5}">
+                      <a16:colId xmlns:a16="http://schemas.microsoft.com/office/drawing/2014/main" val="20002"/>
+                    </a:ext>
+                  </a:extLst>
+                </a:gridCol>
+                <a:gridCol w="929944">
+                  <a:extLst>
+                    <a:ext uri="{9D8B030D-6E8A-4147-A177-3AD203B41FA5}">
+                      <a16:colId xmlns:a16="http://schemas.microsoft.com/office/drawing/2014/main" val="20003"/>
+                    </a:ext>
+                  </a:extLst>
+                </a:gridCol>
+                <a:gridCol w="929944">
+                  <a:extLst>
+                    <a:ext uri="{9D8B030D-6E8A-4147-A177-3AD203B41FA5}">
+                      <a16:colId xmlns:a16="http://schemas.microsoft.com/office/drawing/2014/main" val="20004"/>
+                    </a:ext>
+                  </a:extLst>
+                </a:gridCol>
               </a:tblGrid>
               <a:tr h="384048">
                 <a:tc>
                   <a:txBody>
-                    <a:bodyPr wrap="square"/>
+                    <a:bodyPr/>
                     <a:lstStyle/>
                     <a:p>
                       <a:pPr algn="l"/>
@@ -13673,7 +13864,7 @@
                 </a:tc>
                 <a:tc>
                   <a:txBody>
-                    <a:bodyPr wrap="square"/>
+                    <a:bodyPr/>
                     <a:lstStyle/>
                     <a:p>
                       <a:pPr algn="l"/>
@@ -13698,7 +13889,7 @@
                 </a:tc>
                 <a:tc>
                   <a:txBody>
-                    <a:bodyPr wrap="square"/>
+                    <a:bodyPr/>
                     <a:lstStyle/>
                     <a:p>
                       <a:pPr algn="l"/>
@@ -13723,7 +13914,7 @@
                 </a:tc>
                 <a:tc>
                   <a:txBody>
-                    <a:bodyPr wrap="square"/>
+                    <a:bodyPr/>
                     <a:lstStyle/>
                     <a:p>
                       <a:pPr algn="l"/>
@@ -13748,7 +13939,7 @@
                 </a:tc>
                 <a:tc>
                   <a:txBody>
-                    <a:bodyPr wrap="square"/>
+                    <a:bodyPr/>
                     <a:lstStyle/>
                     <a:p>
                       <a:pPr algn="l"/>
@@ -13771,11 +13962,16 @@
                     </a:solidFill>
                   </a:tcPr>
                 </a:tc>
+                <a:extLst>
+                  <a:ext uri="{0D108BD9-81ED-4DB2-BD59-A6C34878D82A}">
+                    <a16:rowId xmlns:a16="http://schemas.microsoft.com/office/drawing/2014/main" val="10000"/>
+                  </a:ext>
+                </a:extLst>
               </a:tr>
               <a:tr h="384048">
                 <a:tc>
                   <a:txBody>
-                    <a:bodyPr wrap="square"/>
+                    <a:bodyPr/>
                     <a:lstStyle/>
                     <a:p>
                       <a:pPr algn="l"/>
@@ -13800,7 +13996,7 @@
                 </a:tc>
                 <a:tc>
                   <a:txBody>
-                    <a:bodyPr wrap="square"/>
+                    <a:bodyPr/>
                     <a:lstStyle/>
                     <a:p>
                       <a:pPr algn="l"/>
@@ -13825,7 +14021,7 @@
                 </a:tc>
                 <a:tc>
                   <a:txBody>
-                    <a:bodyPr wrap="square"/>
+                    <a:bodyPr/>
                     <a:lstStyle/>
                     <a:p>
                       <a:pPr algn="l"/>
@@ -13850,7 +14046,7 @@
                 </a:tc>
                 <a:tc>
                   <a:txBody>
-                    <a:bodyPr wrap="square"/>
+                    <a:bodyPr/>
                     <a:lstStyle/>
                     <a:p>
                       <a:pPr algn="l"/>
@@ -13875,7 +14071,7 @@
                 </a:tc>
                 <a:tc>
                   <a:txBody>
-                    <a:bodyPr wrap="square"/>
+                    <a:bodyPr/>
                     <a:lstStyle/>
                     <a:p>
                       <a:pPr algn="l"/>
@@ -13898,11 +14094,16 @@
                     </a:solidFill>
                   </a:tcPr>
                 </a:tc>
+                <a:extLst>
+                  <a:ext uri="{0D108BD9-81ED-4DB2-BD59-A6C34878D82A}">
+                    <a16:rowId xmlns:a16="http://schemas.microsoft.com/office/drawing/2014/main" val="10001"/>
+                  </a:ext>
+                </a:extLst>
               </a:tr>
               <a:tr h="384048">
                 <a:tc>
                   <a:txBody>
-                    <a:bodyPr wrap="square"/>
+                    <a:bodyPr/>
                     <a:lstStyle/>
                     <a:p>
                       <a:pPr algn="l"/>
@@ -13927,7 +14128,7 @@
                 </a:tc>
                 <a:tc>
                   <a:txBody>
-                    <a:bodyPr wrap="square"/>
+                    <a:bodyPr/>
                     <a:lstStyle/>
                     <a:p>
                       <a:pPr algn="l"/>
@@ -13952,7 +14153,7 @@
                 </a:tc>
                 <a:tc>
                   <a:txBody>
-                    <a:bodyPr wrap="square"/>
+                    <a:bodyPr/>
                     <a:lstStyle/>
                     <a:p>
                       <a:pPr algn="l"/>
@@ -13977,7 +14178,7 @@
                 </a:tc>
                 <a:tc>
                   <a:txBody>
-                    <a:bodyPr wrap="square"/>
+                    <a:bodyPr/>
                     <a:lstStyle/>
                     <a:p>
                       <a:pPr algn="l"/>
@@ -14002,7 +14203,7 @@
                 </a:tc>
                 <a:tc>
                   <a:txBody>
-                    <a:bodyPr wrap="square"/>
+                    <a:bodyPr/>
                     <a:lstStyle/>
                     <a:p>
                       <a:pPr algn="l"/>
@@ -14025,6 +14226,11 @@
                     </a:solidFill>
                   </a:tcPr>
                 </a:tc>
+                <a:extLst>
+                  <a:ext uri="{0D108BD9-81ED-4DB2-BD59-A6C34878D82A}">
+                    <a16:rowId xmlns:a16="http://schemas.microsoft.com/office/drawing/2014/main" val="10002"/>
+                  </a:ext>
+                </a:extLst>
               </a:tr>
             </a:tbl>
           </a:graphicData>
@@ -14047,7 +14253,7 @@
           <a:noFill/>
         </p:spPr>
         <p:txBody>
-          <a:bodyPr wrap="square" anchor="t" lIns="50800" rIns="50800" tIns="25400" bIns="25400">
+          <a:bodyPr wrap="square" lIns="50800" tIns="25400" rIns="50800" bIns="25400" anchor="t">
             <a:spAutoFit/>
           </a:bodyPr>
           <a:lstStyle/>
@@ -14142,7 +14348,7 @@
           <a:noFill/>
         </p:spPr>
         <p:txBody>
-          <a:bodyPr wrap="square" anchor="t" lIns="50800" rIns="50800" tIns="25400" bIns="25400">
+          <a:bodyPr wrap="square" lIns="50800" tIns="25400" rIns="50800" bIns="25400" anchor="t">
             <a:spAutoFit/>
           </a:bodyPr>
           <a:lstStyle/>
@@ -14175,7 +14381,7 @@
 </file>
 
 <file path=ppt/slides/slide7.xml><?xml version="1.0" encoding="utf-8"?>
-<p:sld xmlns:a="http://schemas.openxmlformats.org/drawingml/2006/main" xmlns:p="http://schemas.openxmlformats.org/presentationml/2006/main" xmlns:r="http://schemas.openxmlformats.org/officeDocument/2006/relationships">
+<p:sld xmlns:a="http://schemas.openxmlformats.org/drawingml/2006/main" xmlns:r="http://schemas.openxmlformats.org/officeDocument/2006/relationships" xmlns:p="http://schemas.openxmlformats.org/presentationml/2006/main">
   <p:cSld>
     <p:spTree>
       <p:nvGrpSpPr>
@@ -14183,7 +14389,14 @@
         <p:cNvGrpSpPr/>
         <p:nvPr/>
       </p:nvGrpSpPr>
-      <p:grpSpPr/>
+      <p:grpSpPr>
+        <a:xfrm>
+          <a:off x="0" y="0"/>
+          <a:ext cx="0" cy="0"/>
+          <a:chOff x="0" y="0"/>
+          <a:chExt cx="0" cy="0"/>
+        </a:xfrm>
+      </p:grpSpPr>
       <p:sp>
         <p:nvSpPr>
           <p:cNvPr id="2" name="Rectangle 1"/>
@@ -14224,6 +14437,7 @@
           <a:lstStyle/>
           <a:p>
             <a:pPr algn="ctr"/>
+            <a:endParaRPr/>
           </a:p>
         </p:txBody>
       </p:sp>
@@ -14263,7 +14477,7 @@
           </a:fontRef>
         </p:style>
         <p:txBody>
-          <a:bodyPr rtlCol="0" anchor="ctr" wrap="none" lIns="25400" rIns="25400"/>
+          <a:bodyPr wrap="none" lIns="25400" rIns="25400" rtlCol="0" anchor="ctr"/>
           <a:lstStyle/>
           <a:p>
             <a:pPr algn="ctr"/>
@@ -14298,7 +14512,7 @@
           <a:noFill/>
         </p:spPr>
         <p:txBody>
-          <a:bodyPr wrap="square" anchor="ctr" lIns="50800" rIns="50800" tIns="25400" bIns="25400">
+          <a:bodyPr wrap="square" lIns="50800" tIns="25400" rIns="50800" bIns="25400" anchor="ctr">
             <a:spAutoFit/>
           </a:bodyPr>
           <a:lstStyle/>
@@ -14362,6 +14576,7 @@
           <a:lstStyle/>
           <a:p>
             <a:pPr algn="ctr"/>
+            <a:endParaRPr/>
           </a:p>
         </p:txBody>
       </p:sp>
@@ -14384,16 +14599,46 @@
                 <a:tableStyleId>{5C22544A-7EE6-4342-B048-85BDC9FD1C3A}</a:tableStyleId>
               </a:tblPr>
               <a:tblGrid>
-                <a:gridCol w="1673351"/>
-                <a:gridCol w="1784908"/>
-                <a:gridCol w="2454249"/>
-                <a:gridCol w="2565806"/>
-                <a:gridCol w="2677363"/>
+                <a:gridCol w="1673351">
+                  <a:extLst>
+                    <a:ext uri="{9D8B030D-6E8A-4147-A177-3AD203B41FA5}">
+                      <a16:colId xmlns:a16="http://schemas.microsoft.com/office/drawing/2014/main" val="20000"/>
+                    </a:ext>
+                  </a:extLst>
+                </a:gridCol>
+                <a:gridCol w="1784908">
+                  <a:extLst>
+                    <a:ext uri="{9D8B030D-6E8A-4147-A177-3AD203B41FA5}">
+                      <a16:colId xmlns:a16="http://schemas.microsoft.com/office/drawing/2014/main" val="20001"/>
+                    </a:ext>
+                  </a:extLst>
+                </a:gridCol>
+                <a:gridCol w="2454249">
+                  <a:extLst>
+                    <a:ext uri="{9D8B030D-6E8A-4147-A177-3AD203B41FA5}">
+                      <a16:colId xmlns:a16="http://schemas.microsoft.com/office/drawing/2014/main" val="20002"/>
+                    </a:ext>
+                  </a:extLst>
+                </a:gridCol>
+                <a:gridCol w="2565806">
+                  <a:extLst>
+                    <a:ext uri="{9D8B030D-6E8A-4147-A177-3AD203B41FA5}">
+                      <a16:colId xmlns:a16="http://schemas.microsoft.com/office/drawing/2014/main" val="20003"/>
+                    </a:ext>
+                  </a:extLst>
+                </a:gridCol>
+                <a:gridCol w="2677363">
+                  <a:extLst>
+                    <a:ext uri="{9D8B030D-6E8A-4147-A177-3AD203B41FA5}">
+                      <a16:colId xmlns:a16="http://schemas.microsoft.com/office/drawing/2014/main" val="20004"/>
+                    </a:ext>
+                  </a:extLst>
+                </a:gridCol>
               </a:tblGrid>
               <a:tr h="384048">
                 <a:tc>
                   <a:txBody>
-                    <a:bodyPr wrap="square"/>
+                    <a:bodyPr/>
                     <a:lstStyle/>
                     <a:p>
                       <a:pPr algn="l"/>
@@ -14418,7 +14663,7 @@
                 </a:tc>
                 <a:tc>
                   <a:txBody>
-                    <a:bodyPr wrap="square"/>
+                    <a:bodyPr/>
                     <a:lstStyle/>
                     <a:p>
                       <a:pPr algn="l"/>
@@ -14443,7 +14688,7 @@
                 </a:tc>
                 <a:tc>
                   <a:txBody>
-                    <a:bodyPr wrap="square"/>
+                    <a:bodyPr/>
                     <a:lstStyle/>
                     <a:p>
                       <a:pPr algn="l"/>
@@ -14468,7 +14713,7 @@
                 </a:tc>
                 <a:tc>
                   <a:txBody>
-                    <a:bodyPr wrap="square"/>
+                    <a:bodyPr/>
                     <a:lstStyle/>
                     <a:p>
                       <a:pPr algn="l"/>
@@ -14493,7 +14738,7 @@
                 </a:tc>
                 <a:tc>
                   <a:txBody>
-                    <a:bodyPr wrap="square"/>
+                    <a:bodyPr/>
                     <a:lstStyle/>
                     <a:p>
                       <a:pPr algn="l"/>
@@ -14516,11 +14761,16 @@
                     </a:solidFill>
                   </a:tcPr>
                 </a:tc>
+                <a:extLst>
+                  <a:ext uri="{0D108BD9-81ED-4DB2-BD59-A6C34878D82A}">
+                    <a16:rowId xmlns:a16="http://schemas.microsoft.com/office/drawing/2014/main" val="10000"/>
+                  </a:ext>
+                </a:extLst>
               </a:tr>
               <a:tr h="384048">
                 <a:tc>
                   <a:txBody>
-                    <a:bodyPr wrap="square"/>
+                    <a:bodyPr/>
                     <a:lstStyle/>
                     <a:p>
                       <a:pPr algn="l"/>
@@ -14545,7 +14795,7 @@
                 </a:tc>
                 <a:tc>
                   <a:txBody>
-                    <a:bodyPr wrap="square"/>
+                    <a:bodyPr/>
                     <a:lstStyle/>
                     <a:p>
                       <a:pPr algn="l"/>
@@ -14570,7 +14820,7 @@
                 </a:tc>
                 <a:tc>
                   <a:txBody>
-                    <a:bodyPr wrap="square"/>
+                    <a:bodyPr/>
                     <a:lstStyle/>
                     <a:p>
                       <a:pPr algn="l"/>
@@ -14595,7 +14845,7 @@
                 </a:tc>
                 <a:tc>
                   <a:txBody>
-                    <a:bodyPr wrap="square"/>
+                    <a:bodyPr/>
                     <a:lstStyle/>
                     <a:p>
                       <a:pPr algn="l"/>
@@ -14620,7 +14870,7 @@
                 </a:tc>
                 <a:tc>
                   <a:txBody>
-                    <a:bodyPr wrap="square"/>
+                    <a:bodyPr/>
                     <a:lstStyle/>
                     <a:p>
                       <a:pPr algn="l"/>
@@ -14643,11 +14893,16 @@
                     </a:solidFill>
                   </a:tcPr>
                 </a:tc>
+                <a:extLst>
+                  <a:ext uri="{0D108BD9-81ED-4DB2-BD59-A6C34878D82A}">
+                    <a16:rowId xmlns:a16="http://schemas.microsoft.com/office/drawing/2014/main" val="10001"/>
+                  </a:ext>
+                </a:extLst>
               </a:tr>
               <a:tr h="384048">
                 <a:tc>
                   <a:txBody>
-                    <a:bodyPr wrap="square"/>
+                    <a:bodyPr/>
                     <a:lstStyle/>
                     <a:p>
                       <a:pPr algn="l"/>
@@ -14672,7 +14927,7 @@
                 </a:tc>
                 <a:tc>
                   <a:txBody>
-                    <a:bodyPr wrap="square"/>
+                    <a:bodyPr/>
                     <a:lstStyle/>
                     <a:p>
                       <a:pPr algn="l"/>
@@ -14697,7 +14952,7 @@
                 </a:tc>
                 <a:tc>
                   <a:txBody>
-                    <a:bodyPr wrap="square"/>
+                    <a:bodyPr/>
                     <a:lstStyle/>
                     <a:p>
                       <a:pPr algn="l"/>
@@ -14722,7 +14977,7 @@
                 </a:tc>
                 <a:tc>
                   <a:txBody>
-                    <a:bodyPr wrap="square"/>
+                    <a:bodyPr/>
                     <a:lstStyle/>
                     <a:p>
                       <a:pPr algn="l"/>
@@ -14747,7 +15002,7 @@
                 </a:tc>
                 <a:tc>
                   <a:txBody>
-                    <a:bodyPr wrap="square"/>
+                    <a:bodyPr/>
                     <a:lstStyle/>
                     <a:p>
                       <a:pPr algn="l"/>
@@ -14770,11 +15025,16 @@
                     </a:solidFill>
                   </a:tcPr>
                 </a:tc>
+                <a:extLst>
+                  <a:ext uri="{0D108BD9-81ED-4DB2-BD59-A6C34878D82A}">
+                    <a16:rowId xmlns:a16="http://schemas.microsoft.com/office/drawing/2014/main" val="10002"/>
+                  </a:ext>
+                </a:extLst>
               </a:tr>
               <a:tr h="384048">
                 <a:tc>
                   <a:txBody>
-                    <a:bodyPr wrap="square"/>
+                    <a:bodyPr/>
                     <a:lstStyle/>
                     <a:p>
                       <a:pPr algn="l"/>
@@ -14799,7 +15059,7 @@
                 </a:tc>
                 <a:tc>
                   <a:txBody>
-                    <a:bodyPr wrap="square"/>
+                    <a:bodyPr/>
                     <a:lstStyle/>
                     <a:p>
                       <a:pPr algn="l"/>
@@ -14824,7 +15084,7 @@
                 </a:tc>
                 <a:tc>
                   <a:txBody>
-                    <a:bodyPr wrap="square"/>
+                    <a:bodyPr/>
                     <a:lstStyle/>
                     <a:p>
                       <a:pPr algn="l"/>
@@ -14849,7 +15109,7 @@
                 </a:tc>
                 <a:tc>
                   <a:txBody>
-                    <a:bodyPr wrap="square"/>
+                    <a:bodyPr/>
                     <a:lstStyle/>
                     <a:p>
                       <a:pPr algn="l"/>
@@ -14874,7 +15134,7 @@
                 </a:tc>
                 <a:tc>
                   <a:txBody>
-                    <a:bodyPr wrap="square"/>
+                    <a:bodyPr/>
                     <a:lstStyle/>
                     <a:p>
                       <a:pPr algn="l"/>
@@ -14897,11 +15157,16 @@
                     </a:solidFill>
                   </a:tcPr>
                 </a:tc>
+                <a:extLst>
+                  <a:ext uri="{0D108BD9-81ED-4DB2-BD59-A6C34878D82A}">
+                    <a16:rowId xmlns:a16="http://schemas.microsoft.com/office/drawing/2014/main" val="10003"/>
+                  </a:ext>
+                </a:extLst>
               </a:tr>
               <a:tr h="384048">
                 <a:tc>
                   <a:txBody>
-                    <a:bodyPr wrap="square"/>
+                    <a:bodyPr/>
                     <a:lstStyle/>
                     <a:p>
                       <a:pPr algn="l"/>
@@ -14926,7 +15191,7 @@
                 </a:tc>
                 <a:tc>
                   <a:txBody>
-                    <a:bodyPr wrap="square"/>
+                    <a:bodyPr/>
                     <a:lstStyle/>
                     <a:p>
                       <a:pPr algn="l"/>
@@ -14951,7 +15216,7 @@
                 </a:tc>
                 <a:tc>
                   <a:txBody>
-                    <a:bodyPr wrap="square"/>
+                    <a:bodyPr/>
                     <a:lstStyle/>
                     <a:p>
                       <a:pPr algn="l"/>
@@ -14976,7 +15241,7 @@
                 </a:tc>
                 <a:tc>
                   <a:txBody>
-                    <a:bodyPr wrap="square"/>
+                    <a:bodyPr/>
                     <a:lstStyle/>
                     <a:p>
                       <a:pPr algn="l"/>
@@ -15001,7 +15266,7 @@
                 </a:tc>
                 <a:tc>
                   <a:txBody>
-                    <a:bodyPr wrap="square"/>
+                    <a:bodyPr/>
                     <a:lstStyle/>
                     <a:p>
                       <a:pPr algn="l"/>
@@ -15024,6 +15289,11 @@
                     </a:solidFill>
                   </a:tcPr>
                 </a:tc>
+                <a:extLst>
+                  <a:ext uri="{0D108BD9-81ED-4DB2-BD59-A6C34878D82A}">
+                    <a16:rowId xmlns:a16="http://schemas.microsoft.com/office/drawing/2014/main" val="10004"/>
+                  </a:ext>
+                </a:extLst>
               </a:tr>
             </a:tbl>
           </a:graphicData>
@@ -15046,7 +15316,7 @@
           <a:noFill/>
         </p:spPr>
         <p:txBody>
-          <a:bodyPr wrap="square" anchor="t" lIns="50800" rIns="50800" tIns="25400" bIns="25400">
+          <a:bodyPr wrap="square" lIns="50800" tIns="25400" rIns="50800" bIns="25400" anchor="t">
             <a:spAutoFit/>
           </a:bodyPr>
           <a:lstStyle/>
@@ -15115,7 +15385,7 @@
           <p:nvPr/>
         </p:nvPicPr>
         <p:blipFill>
-          <a:blip r:embed="rId2"/>
+          <a:blip r:embed="rId3"/>
           <a:stretch>
             <a:fillRect/>
           </a:stretch>
@@ -15147,7 +15417,7 @@
           <a:noFill/>
         </p:spPr>
         <p:txBody>
-          <a:bodyPr wrap="square" anchor="t" lIns="50800" rIns="50800" tIns="25400" bIns="25400">
+          <a:bodyPr wrap="square" lIns="50800" tIns="25400" rIns="50800" bIns="25400" anchor="t">
             <a:spAutoFit/>
           </a:bodyPr>
           <a:lstStyle/>
@@ -15180,7 +15450,7 @@
 </file>
 
 <file path=ppt/slides/slide8.xml><?xml version="1.0" encoding="utf-8"?>
-<p:sld xmlns:a="http://schemas.openxmlformats.org/drawingml/2006/main" xmlns:p="http://schemas.openxmlformats.org/presentationml/2006/main" xmlns:r="http://schemas.openxmlformats.org/officeDocument/2006/relationships">
+<p:sld xmlns:a="http://schemas.openxmlformats.org/drawingml/2006/main" xmlns:r="http://schemas.openxmlformats.org/officeDocument/2006/relationships" xmlns:p="http://schemas.openxmlformats.org/presentationml/2006/main">
   <p:cSld>
     <p:spTree>
       <p:nvGrpSpPr>
@@ -15188,7 +15458,14 @@
         <p:cNvGrpSpPr/>
         <p:nvPr/>
       </p:nvGrpSpPr>
-      <p:grpSpPr/>
+      <p:grpSpPr>
+        <a:xfrm>
+          <a:off x="0" y="0"/>
+          <a:ext cx="0" cy="0"/>
+          <a:chOff x="0" y="0"/>
+          <a:chExt cx="0" cy="0"/>
+        </a:xfrm>
+      </p:grpSpPr>
       <p:sp>
         <p:nvSpPr>
           <p:cNvPr id="2" name="Rectangle 1"/>
@@ -15229,6 +15506,7 @@
           <a:lstStyle/>
           <a:p>
             <a:pPr algn="ctr"/>
+            <a:endParaRPr/>
           </a:p>
         </p:txBody>
       </p:sp>
@@ -15268,7 +15546,7 @@
           </a:fontRef>
         </p:style>
         <p:txBody>
-          <a:bodyPr rtlCol="0" anchor="ctr" wrap="none" lIns="25400" rIns="25400"/>
+          <a:bodyPr wrap="none" lIns="25400" rIns="25400" rtlCol="0" anchor="ctr"/>
           <a:lstStyle/>
           <a:p>
             <a:pPr algn="ctr"/>
@@ -15303,7 +15581,7 @@
           <a:noFill/>
         </p:spPr>
         <p:txBody>
-          <a:bodyPr wrap="square" anchor="ctr" lIns="50800" rIns="50800" tIns="25400" bIns="25400">
+          <a:bodyPr wrap="square" lIns="50800" tIns="25400" rIns="50800" bIns="25400" anchor="ctr">
             <a:spAutoFit/>
           </a:bodyPr>
           <a:lstStyle/>
@@ -15367,6 +15645,7 @@
           <a:lstStyle/>
           <a:p>
             <a:pPr algn="ctr"/>
+            <a:endParaRPr/>
           </a:p>
         </p:txBody>
       </p:sp>
@@ -15387,7 +15666,7 @@
           <a:noFill/>
         </p:spPr>
         <p:txBody>
-          <a:bodyPr wrap="square" anchor="t" lIns="50800" rIns="50800" tIns="25400" bIns="25400">
+          <a:bodyPr wrap="square" lIns="50800" tIns="25400" rIns="50800" bIns="25400" anchor="t">
             <a:spAutoFit/>
           </a:bodyPr>
           <a:lstStyle/>
@@ -15410,7 +15689,7 @@
             </a:r>
           </a:p>
           <a:p>
-            <a:pPr algn="l" lvl="1">
+            <a:pPr lvl="1" algn="l">
               <a:spcAft>
                 <a:spcPts val="400"/>
               </a:spcAft>
@@ -15428,7 +15707,7 @@
             </a:r>
           </a:p>
           <a:p>
-            <a:pPr algn="l" lvl="1">
+            <a:pPr lvl="1" algn="l">
               <a:spcAft>
                 <a:spcPts val="400"/>
               </a:spcAft>
@@ -15466,14 +15745,32 @@
                 <a:tableStyleId>{5C22544A-7EE6-4342-B048-85BDC9FD1C3A}</a:tableStyleId>
               </a:tblPr>
               <a:tblGrid>
-                <a:gridCol w="1896465"/>
-                <a:gridCol w="5131612"/>
-                <a:gridCol w="4127601"/>
+                <a:gridCol w="1896465">
+                  <a:extLst>
+                    <a:ext uri="{9D8B030D-6E8A-4147-A177-3AD203B41FA5}">
+                      <a16:colId xmlns:a16="http://schemas.microsoft.com/office/drawing/2014/main" val="20000"/>
+                    </a:ext>
+                  </a:extLst>
+                </a:gridCol>
+                <a:gridCol w="5131612">
+                  <a:extLst>
+                    <a:ext uri="{9D8B030D-6E8A-4147-A177-3AD203B41FA5}">
+                      <a16:colId xmlns:a16="http://schemas.microsoft.com/office/drawing/2014/main" val="20001"/>
+                    </a:ext>
+                  </a:extLst>
+                </a:gridCol>
+                <a:gridCol w="4127601">
+                  <a:extLst>
+                    <a:ext uri="{9D8B030D-6E8A-4147-A177-3AD203B41FA5}">
+                      <a16:colId xmlns:a16="http://schemas.microsoft.com/office/drawing/2014/main" val="20002"/>
+                    </a:ext>
+                  </a:extLst>
+                </a:gridCol>
               </a:tblGrid>
               <a:tr h="457200">
                 <a:tc>
                   <a:txBody>
-                    <a:bodyPr wrap="square"/>
+                    <a:bodyPr/>
                     <a:lstStyle/>
                     <a:p>
                       <a:pPr algn="l"/>
@@ -15498,7 +15795,7 @@
                 </a:tc>
                 <a:tc>
                   <a:txBody>
-                    <a:bodyPr wrap="square"/>
+                    <a:bodyPr/>
                     <a:lstStyle/>
                     <a:p>
                       <a:pPr algn="l"/>
@@ -15523,7 +15820,7 @@
                 </a:tc>
                 <a:tc>
                   <a:txBody>
-                    <a:bodyPr wrap="square"/>
+                    <a:bodyPr/>
                     <a:lstStyle/>
                     <a:p>
                       <a:pPr algn="l"/>
@@ -15546,11 +15843,16 @@
                     </a:solidFill>
                   </a:tcPr>
                 </a:tc>
+                <a:extLst>
+                  <a:ext uri="{0D108BD9-81ED-4DB2-BD59-A6C34878D82A}">
+                    <a16:rowId xmlns:a16="http://schemas.microsoft.com/office/drawing/2014/main" val="10000"/>
+                  </a:ext>
+                </a:extLst>
               </a:tr>
               <a:tr h="457200">
                 <a:tc>
                   <a:txBody>
-                    <a:bodyPr wrap="square"/>
+                    <a:bodyPr/>
                     <a:lstStyle/>
                     <a:p>
                       <a:pPr algn="l"/>
@@ -15575,7 +15877,7 @@
                 </a:tc>
                 <a:tc>
                   <a:txBody>
-                    <a:bodyPr wrap="square"/>
+                    <a:bodyPr/>
                     <a:lstStyle/>
                     <a:p>
                       <a:pPr algn="l"/>
@@ -15600,7 +15902,7 @@
                 </a:tc>
                 <a:tc>
                   <a:txBody>
-                    <a:bodyPr wrap="square"/>
+                    <a:bodyPr/>
                     <a:lstStyle/>
                     <a:p>
                       <a:pPr algn="l"/>
@@ -15623,11 +15925,16 @@
                     </a:solidFill>
                   </a:tcPr>
                 </a:tc>
+                <a:extLst>
+                  <a:ext uri="{0D108BD9-81ED-4DB2-BD59-A6C34878D82A}">
+                    <a16:rowId xmlns:a16="http://schemas.microsoft.com/office/drawing/2014/main" val="10001"/>
+                  </a:ext>
+                </a:extLst>
               </a:tr>
               <a:tr h="457200">
                 <a:tc>
                   <a:txBody>
-                    <a:bodyPr wrap="square"/>
+                    <a:bodyPr/>
                     <a:lstStyle/>
                     <a:p>
                       <a:pPr algn="l"/>
@@ -15652,7 +15959,7 @@
                 </a:tc>
                 <a:tc>
                   <a:txBody>
-                    <a:bodyPr wrap="square"/>
+                    <a:bodyPr/>
                     <a:lstStyle/>
                     <a:p>
                       <a:pPr algn="l"/>
@@ -15677,7 +15984,7 @@
                 </a:tc>
                 <a:tc>
                   <a:txBody>
-                    <a:bodyPr wrap="square"/>
+                    <a:bodyPr/>
                     <a:lstStyle/>
                     <a:p>
                       <a:pPr algn="l"/>
@@ -15700,11 +16007,16 @@
                     </a:solidFill>
                   </a:tcPr>
                 </a:tc>
+                <a:extLst>
+                  <a:ext uri="{0D108BD9-81ED-4DB2-BD59-A6C34878D82A}">
+                    <a16:rowId xmlns:a16="http://schemas.microsoft.com/office/drawing/2014/main" val="10002"/>
+                  </a:ext>
+                </a:extLst>
               </a:tr>
               <a:tr h="457200">
                 <a:tc>
                   <a:txBody>
-                    <a:bodyPr wrap="square"/>
+                    <a:bodyPr/>
                     <a:lstStyle/>
                     <a:p>
                       <a:pPr algn="l"/>
@@ -15729,7 +16041,7 @@
                 </a:tc>
                 <a:tc>
                   <a:txBody>
-                    <a:bodyPr wrap="square"/>
+                    <a:bodyPr/>
                     <a:lstStyle/>
                     <a:p>
                       <a:pPr algn="l"/>
@@ -15754,7 +16066,7 @@
                 </a:tc>
                 <a:tc>
                   <a:txBody>
-                    <a:bodyPr wrap="square"/>
+                    <a:bodyPr/>
                     <a:lstStyle/>
                     <a:p>
                       <a:pPr algn="l"/>
@@ -15777,11 +16089,16 @@
                     </a:solidFill>
                   </a:tcPr>
                 </a:tc>
+                <a:extLst>
+                  <a:ext uri="{0D108BD9-81ED-4DB2-BD59-A6C34878D82A}">
+                    <a16:rowId xmlns:a16="http://schemas.microsoft.com/office/drawing/2014/main" val="10003"/>
+                  </a:ext>
+                </a:extLst>
               </a:tr>
               <a:tr h="457200">
                 <a:tc>
                   <a:txBody>
-                    <a:bodyPr wrap="square"/>
+                    <a:bodyPr/>
                     <a:lstStyle/>
                     <a:p>
                       <a:pPr algn="l"/>
@@ -15806,7 +16123,7 @@
                 </a:tc>
                 <a:tc>
                   <a:txBody>
-                    <a:bodyPr wrap="square"/>
+                    <a:bodyPr/>
                     <a:lstStyle/>
                     <a:p>
                       <a:pPr algn="l"/>
@@ -15831,7 +16148,7 @@
                 </a:tc>
                 <a:tc>
                   <a:txBody>
-                    <a:bodyPr wrap="square"/>
+                    <a:bodyPr/>
                     <a:lstStyle/>
                     <a:p>
                       <a:pPr algn="l"/>
@@ -15854,6 +16171,11 @@
                     </a:solidFill>
                   </a:tcPr>
                 </a:tc>
+                <a:extLst>
+                  <a:ext uri="{0D108BD9-81ED-4DB2-BD59-A6C34878D82A}">
+                    <a16:rowId xmlns:a16="http://schemas.microsoft.com/office/drawing/2014/main" val="10004"/>
+                  </a:ext>
+                </a:extLst>
               </a:tr>
             </a:tbl>
           </a:graphicData>
@@ -15876,7 +16198,7 @@
           <a:noFill/>
         </p:spPr>
         <p:txBody>
-          <a:bodyPr wrap="square" anchor="t" lIns="50800" rIns="50800" tIns="25400" bIns="25400">
+          <a:bodyPr wrap="square" lIns="50800" tIns="25400" rIns="50800" bIns="25400" anchor="t">
             <a:spAutoFit/>
           </a:bodyPr>
           <a:lstStyle/>
@@ -15917,7 +16239,7 @@
           <a:noFill/>
         </p:spPr>
         <p:txBody>
-          <a:bodyPr wrap="square" anchor="t" lIns="50800" rIns="50800" tIns="25400" bIns="25400">
+          <a:bodyPr wrap="square" lIns="50800" tIns="25400" rIns="50800" bIns="25400" anchor="t">
             <a:spAutoFit/>
           </a:bodyPr>
           <a:lstStyle/>
@@ -15950,7 +16272,7 @@
 </file>
 
 <file path=ppt/slides/slide9.xml><?xml version="1.0" encoding="utf-8"?>
-<p:sld xmlns:a="http://schemas.openxmlformats.org/drawingml/2006/main" xmlns:p="http://schemas.openxmlformats.org/presentationml/2006/main" xmlns:r="http://schemas.openxmlformats.org/officeDocument/2006/relationships">
+<p:sld xmlns:a="http://schemas.openxmlformats.org/drawingml/2006/main" xmlns:r="http://schemas.openxmlformats.org/officeDocument/2006/relationships" xmlns:p="http://schemas.openxmlformats.org/presentationml/2006/main">
   <p:cSld>
     <p:spTree>
       <p:nvGrpSpPr>
@@ -15958,7 +16280,14 @@
         <p:cNvGrpSpPr/>
         <p:nvPr/>
       </p:nvGrpSpPr>
-      <p:grpSpPr/>
+      <p:grpSpPr>
+        <a:xfrm>
+          <a:off x="0" y="0"/>
+          <a:ext cx="0" cy="0"/>
+          <a:chOff x="0" y="0"/>
+          <a:chExt cx="0" cy="0"/>
+        </a:xfrm>
+      </p:grpSpPr>
       <p:sp>
         <p:nvSpPr>
           <p:cNvPr id="2" name="Rectangle 1"/>
@@ -15999,6 +16328,7 @@
           <a:lstStyle/>
           <a:p>
             <a:pPr algn="ctr"/>
+            <a:endParaRPr/>
           </a:p>
         </p:txBody>
       </p:sp>
@@ -16038,7 +16368,7 @@
           </a:fontRef>
         </p:style>
         <p:txBody>
-          <a:bodyPr rtlCol="0" anchor="ctr" wrap="none" lIns="25400" rIns="25400"/>
+          <a:bodyPr wrap="none" lIns="25400" rIns="25400" rtlCol="0" anchor="ctr"/>
           <a:lstStyle/>
           <a:p>
             <a:pPr algn="ctr"/>
@@ -16073,7 +16403,7 @@
           <a:noFill/>
         </p:spPr>
         <p:txBody>
-          <a:bodyPr wrap="square" anchor="ctr" lIns="50800" rIns="50800" tIns="25400" bIns="25400">
+          <a:bodyPr wrap="square" lIns="50800" tIns="25400" rIns="50800" bIns="25400" anchor="ctr">
             <a:spAutoFit/>
           </a:bodyPr>
           <a:lstStyle/>
@@ -16137,6 +16467,7 @@
           <a:lstStyle/>
           <a:p>
             <a:pPr algn="ctr"/>
+            <a:endParaRPr/>
           </a:p>
         </p:txBody>
       </p:sp>
@@ -16180,6 +16511,7 @@
           <a:lstStyle/>
           <a:p>
             <a:pPr algn="ctr"/>
+            <a:endParaRPr/>
           </a:p>
         </p:txBody>
       </p:sp>
@@ -16200,7 +16532,7 @@
           <a:noFill/>
         </p:spPr>
         <p:txBody>
-          <a:bodyPr wrap="square" anchor="t" lIns="50800" rIns="50800" tIns="25400" bIns="25400">
+          <a:bodyPr wrap="square" lIns="50800" tIns="25400" rIns="50800" bIns="25400" anchor="t">
             <a:spAutoFit/>
           </a:bodyPr>
           <a:lstStyle/>
@@ -16336,6 +16668,7 @@
           <a:lstStyle/>
           <a:p>
             <a:pPr algn="ctr"/>
+            <a:endParaRPr/>
           </a:p>
         </p:txBody>
       </p:sp>
@@ -16356,7 +16689,7 @@
           <a:noFill/>
         </p:spPr>
         <p:txBody>
-          <a:bodyPr wrap="square" anchor="t" lIns="50800" rIns="50800" tIns="25400" bIns="25400">
+          <a:bodyPr wrap="square" lIns="50800" tIns="25400" rIns="50800" bIns="25400" anchor="t">
             <a:spAutoFit/>
           </a:bodyPr>
           <a:lstStyle/>
@@ -16492,6 +16825,7 @@
           <a:lstStyle/>
           <a:p>
             <a:pPr algn="ctr"/>
+            <a:endParaRPr/>
           </a:p>
         </p:txBody>
       </p:sp>
@@ -16512,7 +16846,7 @@
           <a:noFill/>
         </p:spPr>
         <p:txBody>
-          <a:bodyPr wrap="square" anchor="t" lIns="50800" rIns="50800" tIns="25400" bIns="25400">
+          <a:bodyPr wrap="square" lIns="50800" tIns="25400" rIns="50800" bIns="25400" anchor="t">
             <a:spAutoFit/>
           </a:bodyPr>
           <a:lstStyle/>
@@ -16625,7 +16959,7 @@
           <a:noFill/>
         </p:spPr>
         <p:txBody>
-          <a:bodyPr wrap="square" anchor="t" lIns="50800" rIns="50800" tIns="25400" bIns="25400">
+          <a:bodyPr wrap="square" lIns="50800" tIns="25400" rIns="50800" bIns="25400" anchor="t">
             <a:spAutoFit/>
           </a:bodyPr>
           <a:lstStyle/>
@@ -16978,7 +17312,7 @@
 </file>
 
 <file path=ppt/theme/theme2.xml><?xml version="1.0" encoding="utf-8"?>
-<a:theme xmlns:a="http://schemas.openxmlformats.org/drawingml/2006/main" name="Office Theme">
+<a:theme xmlns:a="http://schemas.openxmlformats.org/drawingml/2006/main" name="Office 主题​​">
   <a:themeElements>
     <a:clrScheme name="Office">
       <a:dk1>
@@ -16988,44 +17322,44 @@
         <a:sysClr val="window" lastClr="FFFFFF"/>
       </a:lt1>
       <a:dk2>
-        <a:srgbClr val="1F497D"/>
+        <a:srgbClr val="44546A"/>
       </a:dk2>
       <a:lt2>
-        <a:srgbClr val="EEECE1"/>
+        <a:srgbClr val="E7E6E6"/>
       </a:lt2>
       <a:accent1>
-        <a:srgbClr val="4F81BD"/>
+        <a:srgbClr val="4472C4"/>
       </a:accent1>
       <a:accent2>
-        <a:srgbClr val="C0504D"/>
+        <a:srgbClr val="ED7D31"/>
       </a:accent2>
       <a:accent3>
-        <a:srgbClr val="9BBB59"/>
+        <a:srgbClr val="A5A5A5"/>
       </a:accent3>
       <a:accent4>
-        <a:srgbClr val="8064A2"/>
+        <a:srgbClr val="FFC000"/>
       </a:accent4>
       <a:accent5>
-        <a:srgbClr val="4BACC6"/>
+        <a:srgbClr val="5B9BD5"/>
       </a:accent5>
       <a:accent6>
-        <a:srgbClr val="F79646"/>
+        <a:srgbClr val="70AD47"/>
       </a:accent6>
       <a:hlink>
-        <a:srgbClr val="0000FF"/>
+        <a:srgbClr val="0563C1"/>
       </a:hlink>
       <a:folHlink>
-        <a:srgbClr val="800080"/>
+        <a:srgbClr val="954F72"/>
       </a:folHlink>
     </a:clrScheme>
     <a:fontScheme name="Office">
       <a:majorFont>
-        <a:latin typeface="Calibri"/>
+        <a:latin typeface="等线 Light" panose="020F0302020204030204"/>
         <a:ea typeface=""/>
         <a:cs typeface=""/>
-        <a:font script="Jpan" typeface="ＭＳ Ｐゴシック"/>
+        <a:font script="Jpan" typeface="游ゴシック Light"/>
         <a:font script="Hang" typeface="맑은 고딕"/>
-        <a:font script="Hans" typeface="宋体"/>
+        <a:font script="Hans" typeface="等线 Light"/>
         <a:font script="Hant" typeface="新細明體"/>
         <a:font script="Arab" typeface="Times New Roman"/>
         <a:font script="Hebr" typeface="Times New Roman"/>
@@ -17053,14 +17387,31 @@
         <a:font script="Viet" typeface="Times New Roman"/>
         <a:font script="Uigh" typeface="Microsoft Uighur"/>
         <a:font script="Geor" typeface="Sylfaen"/>
+        <a:font script="Armn" typeface="Arial"/>
+        <a:font script="Bugi" typeface="Leelawadee UI"/>
+        <a:font script="Bopo" typeface="Microsoft JhengHei"/>
+        <a:font script="Java" typeface="Javanese Text"/>
+        <a:font script="Lisu" typeface="Segoe UI"/>
+        <a:font script="Mymr" typeface="Myanmar Text"/>
+        <a:font script="Nkoo" typeface="Ebrima"/>
+        <a:font script="Olck" typeface="Nirmala UI"/>
+        <a:font script="Osma" typeface="Ebrima"/>
+        <a:font script="Phag" typeface="Phagspa"/>
+        <a:font script="Syrn" typeface="Estrangelo Edessa"/>
+        <a:font script="Syrj" typeface="Estrangelo Edessa"/>
+        <a:font script="Syre" typeface="Estrangelo Edessa"/>
+        <a:font script="Sora" typeface="Nirmala UI"/>
+        <a:font script="Tale" typeface="Microsoft Tai Le"/>
+        <a:font script="Talu" typeface="Microsoft New Tai Lue"/>
+        <a:font script="Tfng" typeface="Ebrima"/>
       </a:majorFont>
       <a:minorFont>
-        <a:latin typeface="Calibri"/>
+        <a:latin typeface="等线" panose="020F0502020204030204"/>
         <a:ea typeface=""/>
         <a:cs typeface=""/>
-        <a:font script="Jpan" typeface="ＭＳ Ｐゴシック"/>
+        <a:font script="Jpan" typeface="游ゴシック"/>
         <a:font script="Hang" typeface="맑은 고딕"/>
-        <a:font script="Hans" typeface="宋体"/>
+        <a:font script="Hans" typeface="等线"/>
         <a:font script="Hant" typeface="新細明體"/>
         <a:font script="Arab" typeface="Arial"/>
         <a:font script="Hebr" typeface="Arial"/>
@@ -17088,6 +17439,23 @@
         <a:font script="Viet" typeface="Arial"/>
         <a:font script="Uigh" typeface="Microsoft Uighur"/>
         <a:font script="Geor" typeface="Sylfaen"/>
+        <a:font script="Armn" typeface="Arial"/>
+        <a:font script="Bugi" typeface="Leelawadee UI"/>
+        <a:font script="Bopo" typeface="Microsoft JhengHei"/>
+        <a:font script="Java" typeface="Javanese Text"/>
+        <a:font script="Lisu" typeface="Segoe UI"/>
+        <a:font script="Mymr" typeface="Myanmar Text"/>
+        <a:font script="Nkoo" typeface="Ebrima"/>
+        <a:font script="Olck" typeface="Nirmala UI"/>
+        <a:font script="Osma" typeface="Ebrima"/>
+        <a:font script="Phag" typeface="Phagspa"/>
+        <a:font script="Syrn" typeface="Estrangelo Edessa"/>
+        <a:font script="Syrj" typeface="Estrangelo Edessa"/>
+        <a:font script="Syre" typeface="Estrangelo Edessa"/>
+        <a:font script="Sora" typeface="Nirmala UI"/>
+        <a:font script="Tale" typeface="Microsoft Tai Le"/>
+        <a:font script="Talu" typeface="Microsoft New Tai Lue"/>
+        <a:font script="Tfng" typeface="Ebrima"/>
       </a:minorFont>
     </a:fontScheme>
     <a:fmtScheme name="Office">
@@ -17099,200 +17467,141 @@
           <a:gsLst>
             <a:gs pos="0">
               <a:schemeClr val="phClr">
-                <a:tint val="50000"/>
-                <a:satMod val="300000"/>
+                <a:lumMod val="110000"/>
+                <a:satMod val="105000"/>
+                <a:tint val="67000"/>
               </a:schemeClr>
             </a:gs>
-            <a:gs pos="35000">
+            <a:gs pos="50000">
               <a:schemeClr val="phClr">
-                <a:tint val="37000"/>
-                <a:satMod val="300000"/>
+                <a:lumMod val="105000"/>
+                <a:satMod val="103000"/>
+                <a:tint val="73000"/>
               </a:schemeClr>
             </a:gs>
             <a:gs pos="100000">
               <a:schemeClr val="phClr">
-                <a:tint val="15000"/>
-                <a:satMod val="350000"/>
+                <a:lumMod val="105000"/>
+                <a:satMod val="109000"/>
+                <a:tint val="81000"/>
               </a:schemeClr>
             </a:gs>
           </a:gsLst>
-          <a:lin ang="16200000" scaled="1"/>
+          <a:lin ang="5400000" scaled="0"/>
         </a:gradFill>
         <a:gradFill rotWithShape="1">
           <a:gsLst>
             <a:gs pos="0">
               <a:schemeClr val="phClr">
-                <a:tint val="100000"/>
+                <a:satMod val="103000"/>
+                <a:lumMod val="102000"/>
+                <a:tint val="94000"/>
+              </a:schemeClr>
+            </a:gs>
+            <a:gs pos="50000">
+              <a:schemeClr val="phClr">
+                <a:satMod val="110000"/>
+                <a:lumMod val="100000"/>
                 <a:shade val="100000"/>
-                <a:satMod val="130000"/>
               </a:schemeClr>
             </a:gs>
             <a:gs pos="100000">
               <a:schemeClr val="phClr">
-                <a:tint val="50000"/>
-                <a:shade val="100000"/>
-                <a:satMod val="350000"/>
+                <a:lumMod val="99000"/>
+                <a:satMod val="120000"/>
+                <a:shade val="78000"/>
               </a:schemeClr>
             </a:gs>
           </a:gsLst>
-          <a:lin ang="16200000" scaled="0"/>
+          <a:lin ang="5400000" scaled="0"/>
         </a:gradFill>
       </a:fillStyleLst>
       <a:lnStyleLst>
-        <a:ln w="9525" cap="flat" cmpd="sng" algn="ctr">
-          <a:solidFill>
-            <a:schemeClr val="phClr">
-              <a:shade val="95000"/>
-              <a:satMod val="105000"/>
-            </a:schemeClr>
-          </a:solidFill>
-          <a:prstDash val="solid"/>
-        </a:ln>
-        <a:ln w="25400" cap="flat" cmpd="sng" algn="ctr">
+        <a:ln w="6350" cap="flat" cmpd="sng" algn="ctr">
           <a:solidFill>
             <a:schemeClr val="phClr"/>
           </a:solidFill>
           <a:prstDash val="solid"/>
+          <a:miter lim="800000"/>
         </a:ln>
-        <a:ln w="38100" cap="flat" cmpd="sng" algn="ctr">
+        <a:ln w="12700" cap="flat" cmpd="sng" algn="ctr">
           <a:solidFill>
             <a:schemeClr val="phClr"/>
           </a:solidFill>
           <a:prstDash val="solid"/>
+          <a:miter lim="800000"/>
+        </a:ln>
+        <a:ln w="19050" cap="flat" cmpd="sng" algn="ctr">
+          <a:solidFill>
+            <a:schemeClr val="phClr"/>
+          </a:solidFill>
+          <a:prstDash val="solid"/>
+          <a:miter lim="800000"/>
         </a:ln>
       </a:lnStyleLst>
       <a:effectStyleLst>
         <a:effectStyle>
+          <a:effectLst/>
+        </a:effectStyle>
+        <a:effectStyle>
+          <a:effectLst/>
+        </a:effectStyle>
+        <a:effectStyle>
           <a:effectLst>
-            <a:outerShdw blurRad="40000" dist="20000" dir="5400000" rotWithShape="0">
+            <a:outerShdw blurRad="57150" dist="19050" dir="5400000" algn="ctr" rotWithShape="0">
               <a:srgbClr val="000000">
-                <a:alpha val="38000"/>
+                <a:alpha val="63000"/>
               </a:srgbClr>
             </a:outerShdw>
           </a:effectLst>
-        </a:effectStyle>
-        <a:effectStyle>
-          <a:effectLst>
-            <a:outerShdw blurRad="40000" dist="23000" dir="5400000" rotWithShape="0">
-              <a:srgbClr val="000000">
-                <a:alpha val="35000"/>
-              </a:srgbClr>
-            </a:outerShdw>
-          </a:effectLst>
-        </a:effectStyle>
-        <a:effectStyle>
-          <a:effectLst>
-            <a:outerShdw blurRad="40000" dist="23000" dir="5400000" rotWithShape="0">
-              <a:srgbClr val="000000">
-                <a:alpha val="35000"/>
-              </a:srgbClr>
-            </a:outerShdw>
-          </a:effectLst>
-          <a:scene3d>
-            <a:camera prst="orthographicFront">
-              <a:rot lat="0" lon="0" rev="0"/>
-            </a:camera>
-            <a:lightRig rig="threePt" dir="t">
-              <a:rot lat="0" lon="0" rev="1200000"/>
-            </a:lightRig>
-          </a:scene3d>
-          <a:sp3d>
-            <a:bevelT w="63500" h="25400"/>
-          </a:sp3d>
         </a:effectStyle>
       </a:effectStyleLst>
       <a:bgFillStyleLst>
         <a:solidFill>
           <a:schemeClr val="phClr"/>
         </a:solidFill>
+        <a:solidFill>
+          <a:schemeClr val="phClr">
+            <a:tint val="95000"/>
+            <a:satMod val="170000"/>
+          </a:schemeClr>
+        </a:solidFill>
         <a:gradFill rotWithShape="1">
           <a:gsLst>
             <a:gs pos="0">
               <a:schemeClr val="phClr">
-                <a:tint val="40000"/>
-                <a:satMod val="350000"/>
+                <a:tint val="93000"/>
+                <a:satMod val="150000"/>
+                <a:shade val="98000"/>
+                <a:lumMod val="102000"/>
               </a:schemeClr>
             </a:gs>
-            <a:gs pos="40000">
+            <a:gs pos="50000">
               <a:schemeClr val="phClr">
-                <a:tint val="45000"/>
-                <a:shade val="99000"/>
-                <a:satMod val="350000"/>
+                <a:tint val="98000"/>
+                <a:satMod val="130000"/>
+                <a:shade val="90000"/>
+                <a:lumMod val="103000"/>
               </a:schemeClr>
             </a:gs>
             <a:gs pos="100000">
               <a:schemeClr val="phClr">
-                <a:shade val="20000"/>
-                <a:satMod val="255000"/>
+                <a:shade val="63000"/>
+                <a:satMod val="120000"/>
               </a:schemeClr>
             </a:gs>
           </a:gsLst>
-          <a:path path="circle">
-            <a:fillToRect l="50000" t="-80000" r="50000" b="180000"/>
-          </a:path>
-        </a:gradFill>
-        <a:gradFill rotWithShape="1">
-          <a:gsLst>
-            <a:gs pos="0">
-              <a:schemeClr val="phClr">
-                <a:tint val="80000"/>
-                <a:satMod val="300000"/>
-              </a:schemeClr>
-            </a:gs>
-            <a:gs pos="100000">
-              <a:schemeClr val="phClr">
-                <a:shade val="30000"/>
-                <a:satMod val="200000"/>
-              </a:schemeClr>
-            </a:gs>
-          </a:gsLst>
-          <a:path path="circle">
-            <a:fillToRect l="50000" t="50000" r="50000" b="50000"/>
-          </a:path>
+          <a:lin ang="5400000" scaled="0"/>
         </a:gradFill>
       </a:bgFillStyleLst>
     </a:fmtScheme>
   </a:themeElements>
-  <a:objectDefaults>
-    <a:spDef>
-      <a:spPr/>
-      <a:bodyPr/>
-      <a:lstStyle/>
-      <a:style>
-        <a:lnRef idx="1">
-          <a:schemeClr val="accent1"/>
-        </a:lnRef>
-        <a:fillRef idx="3">
-          <a:schemeClr val="accent1"/>
-        </a:fillRef>
-        <a:effectRef idx="2">
-          <a:schemeClr val="accent1"/>
-        </a:effectRef>
-        <a:fontRef idx="minor">
-          <a:schemeClr val="lt1"/>
-        </a:fontRef>
-      </a:style>
-    </a:spDef>
-    <a:lnDef>
-      <a:spPr/>
-      <a:bodyPr/>
-      <a:lstStyle/>
-      <a:style>
-        <a:lnRef idx="2">
-          <a:schemeClr val="accent1"/>
-        </a:lnRef>
-        <a:fillRef idx="0">
-          <a:schemeClr val="accent1"/>
-        </a:fillRef>
-        <a:effectRef idx="1">
-          <a:schemeClr val="accent1"/>
-        </a:effectRef>
-        <a:fontRef idx="minor">
-          <a:schemeClr val="tx1"/>
-        </a:fontRef>
-      </a:style>
-    </a:lnDef>
-  </a:objectDefaults>
+  <a:objectDefaults/>
   <a:extraClrSchemeLst/>
+  <a:extLst>
+    <a:ext uri="{05A4C25C-085E-4340-85A3-A5531E510DB2}">
+      <thm15:themeFamily xmlns:thm15="http://schemas.microsoft.com/office/thememl/2012/main" name="Office Theme" id="{62F939B6-93AF-4DB8-9C6B-D6C7DFDC589F}" vid="{4A3C46E8-61CC-4603-A589-7422A47A8E4A}"/>
+    </a:ext>
+  </a:extLst>
 </a:theme>
 </file>